--- a/pptx/Module08_MPD__Interfaces__BDD_OO.pptx
+++ b/pptx/Module08_MPD__Interfaces__BDD_OO.pptx
@@ -12,9 +12,14 @@
     <p:sldId id="260" r:id="rId6"/>
     <p:sldId id="261" r:id="rId7"/>
     <p:sldId id="262" r:id="rId8"/>
+    <p:sldId id="263" r:id="rId9"/>
+    <p:sldId id="264" r:id="rId10"/>
+    <p:sldId id="265" r:id="rId11"/>
+    <p:sldId id="266" r:id="rId12"/>
+    <p:sldId id="267" r:id="rId13"/>
   </p:sldIdLst>
   <p:notesMasterIdLst>
-    <p:notesMasterId r:id="rId9"/>
+    <p:notesMasterId r:id="rId14"/>
   </p:notesMasterIdLst>
   <p:sldSz cx="9144000" cy="5143500"/>
   <p:notesSz cx="5143500" cy="9144000"/>
@@ -550,6 +555,270 @@
 </p:notes>
 </file>
 
+<file path=ppt/notesSlides/notesSlide10.xml><?xml version="1.0" encoding="utf-8"?>
+<p:notes xmlns:a="http://schemas.openxmlformats.org/drawingml/2006/main" xmlns:r="http://schemas.openxmlformats.org/officeDocument/2006/relationships" xmlns:p="http://schemas.openxmlformats.org/presentationml/2006/main">
+  <p:cSld>
+    <p:spTree>
+      <p:nvGrpSpPr>
+        <p:cNvPr id="1" name=""/>
+        <p:cNvGrpSpPr/>
+        <p:nvPr/>
+      </p:nvGrpSpPr>
+      <p:grpSpPr>
+        <a:xfrm>
+          <a:off x="0" y="0"/>
+          <a:ext cx="0" cy="0"/>
+          <a:chOff x="0" y="0"/>
+          <a:chExt cx="0" cy="0"/>
+        </a:xfrm>
+      </p:grpSpPr>
+      <p:sp>
+        <p:nvSpPr>
+          <p:cNvPr id="2" name="Slide Image Placeholder 1"/>
+          <p:cNvSpPr>
+            <a:spLocks noGrp="1" noRot="1" noChangeAspect="1"/>
+          </p:cNvSpPr>
+          <p:nvPr>
+            <p:ph type="sldImg"/>
+          </p:nvPr>
+        </p:nvSpPr>
+        <p:spPr/>
+      </p:sp>
+      <p:sp>
+        <p:nvSpPr>
+          <p:cNvPr id="3" name="Notes Placeholder 2"/>
+          <p:cNvSpPr>
+            <a:spLocks noGrp="1"/>
+          </p:cNvSpPr>
+          <p:nvPr>
+            <p:ph type="body" idx="1"/>
+          </p:nvPr>
+        </p:nvSpPr>
+        <p:spPr/>
+        <p:txBody>
+          <a:bodyPr/>
+          <a:lstStyle/>
+          <a:p>
+            <a:r>
+              <a:rPr lang="en-US" dirty="0"/>
+              <a:t>Ce module clôture la LO1. L'étudiant a maintenant : DD, matrice DF, graphe, MCD, MLD, 3NF vérifié, MPD complet.</a:t>
+            </a:r>
+            <a:endParaRPr lang="en-US" dirty="0"/>
+          </a:p>
+        </p:txBody>
+      </p:sp>
+      <p:sp>
+        <p:nvSpPr>
+          <p:cNvPr id="4" name="Slide Number Placeholder 3"/>
+          <p:cNvSpPr>
+            <a:spLocks noGrp="1"/>
+          </p:cNvSpPr>
+          <p:nvPr>
+            <p:ph type="sldNum" sz="quarter" idx="10"/>
+          </p:nvPr>
+        </p:nvSpPr>
+        <p:spPr/>
+        <p:txBody>
+          <a:bodyPr/>
+          <a:lstStyle/>
+          <a:p>
+            <a:fld id="{F7021451-1387-4CA6-816F-3879F97B5CBC}" type="slidenum">
+              <a:rPr lang="en-US"/>
+              <a:t>10</a:t>
+            </a:fld>
+            <a:endParaRPr lang="en-US"/>
+          </a:p>
+        </p:txBody>
+      </p:sp>
+    </p:spTree>
+    <p:extLst>
+      <p:ext uri="{BB962C8B-B14F-4D97-AF65-F5344CB8AC3E}">
+        <p14:creationId xmlns:p14="http://schemas.microsoft.com/office/powerpoint/2010/main" val="1024086991"/>
+      </p:ext>
+    </p:extLst>
+  </p:cSld>
+  <p:clrMapOvr>
+    <a:masterClrMapping/>
+  </p:clrMapOvr>
+</p:notes>
+</file>
+
+<file path=ppt/notesSlides/notesSlide11.xml><?xml version="1.0" encoding="utf-8"?>
+<p:notes xmlns:a="http://schemas.openxmlformats.org/drawingml/2006/main" xmlns:r="http://schemas.openxmlformats.org/officeDocument/2006/relationships" xmlns:p="http://schemas.openxmlformats.org/presentationml/2006/main">
+  <p:cSld>
+    <p:spTree>
+      <p:nvGrpSpPr>
+        <p:cNvPr id="1" name=""/>
+        <p:cNvGrpSpPr/>
+        <p:nvPr/>
+      </p:nvGrpSpPr>
+      <p:grpSpPr>
+        <a:xfrm>
+          <a:off x="0" y="0"/>
+          <a:ext cx="0" cy="0"/>
+          <a:chOff x="0" y="0"/>
+          <a:chExt cx="0" cy="0"/>
+        </a:xfrm>
+      </p:grpSpPr>
+      <p:sp>
+        <p:nvSpPr>
+          <p:cNvPr id="2" name="Slide Image Placeholder 1"/>
+          <p:cNvSpPr>
+            <a:spLocks noGrp="1" noRot="1" noChangeAspect="1"/>
+          </p:cNvSpPr>
+          <p:nvPr>
+            <p:ph type="sldImg"/>
+          </p:nvPr>
+        </p:nvSpPr>
+        <p:spPr/>
+      </p:sp>
+      <p:sp>
+        <p:nvSpPr>
+          <p:cNvPr id="3" name="Notes Placeholder 2"/>
+          <p:cNvSpPr>
+            <a:spLocks noGrp="1"/>
+          </p:cNvSpPr>
+          <p:nvPr>
+            <p:ph type="body" idx="1"/>
+          </p:nvPr>
+        </p:nvSpPr>
+        <p:spPr/>
+        <p:txBody>
+          <a:bodyPr/>
+          <a:lstStyle/>
+          <a:p>
+            <a:r>
+              <a:rPr lang="en-US" dirty="0"/>
+              <a:t/>
+            </a:r>
+            <a:endParaRPr lang="en-US" dirty="0"/>
+          </a:p>
+        </p:txBody>
+      </p:sp>
+      <p:sp>
+        <p:nvSpPr>
+          <p:cNvPr id="4" name="Slide Number Placeholder 3"/>
+          <p:cNvSpPr>
+            <a:spLocks noGrp="1"/>
+          </p:cNvSpPr>
+          <p:nvPr>
+            <p:ph type="sldNum" sz="quarter" idx="10"/>
+          </p:nvPr>
+        </p:nvSpPr>
+        <p:spPr/>
+        <p:txBody>
+          <a:bodyPr/>
+          <a:lstStyle/>
+          <a:p>
+            <a:fld id="{F7021451-1387-4CA6-816F-3879F97B5CBC}" type="slidenum">
+              <a:rPr lang="en-US"/>
+              <a:t>11</a:t>
+            </a:fld>
+            <a:endParaRPr lang="en-US"/>
+          </a:p>
+        </p:txBody>
+      </p:sp>
+    </p:spTree>
+    <p:extLst>
+      <p:ext uri="{BB962C8B-B14F-4D97-AF65-F5344CB8AC3E}">
+        <p14:creationId xmlns:p14="http://schemas.microsoft.com/office/powerpoint/2010/main" val="1024086991"/>
+      </p:ext>
+    </p:extLst>
+  </p:cSld>
+  <p:clrMapOvr>
+    <a:masterClrMapping/>
+  </p:clrMapOvr>
+</p:notes>
+</file>
+
+<file path=ppt/notesSlides/notesSlide12.xml><?xml version="1.0" encoding="utf-8"?>
+<p:notes xmlns:a="http://schemas.openxmlformats.org/drawingml/2006/main" xmlns:r="http://schemas.openxmlformats.org/officeDocument/2006/relationships" xmlns:p="http://schemas.openxmlformats.org/presentationml/2006/main">
+  <p:cSld>
+    <p:spTree>
+      <p:nvGrpSpPr>
+        <p:cNvPr id="1" name=""/>
+        <p:cNvGrpSpPr/>
+        <p:nvPr/>
+      </p:nvGrpSpPr>
+      <p:grpSpPr>
+        <a:xfrm>
+          <a:off x="0" y="0"/>
+          <a:ext cx="0" cy="0"/>
+          <a:chOff x="0" y="0"/>
+          <a:chExt cx="0" cy="0"/>
+        </a:xfrm>
+      </p:grpSpPr>
+      <p:sp>
+        <p:nvSpPr>
+          <p:cNvPr id="2" name="Slide Image Placeholder 1"/>
+          <p:cNvSpPr>
+            <a:spLocks noGrp="1" noRot="1" noChangeAspect="1"/>
+          </p:cNvSpPr>
+          <p:nvPr>
+            <p:ph type="sldImg"/>
+          </p:nvPr>
+        </p:nvSpPr>
+        <p:spPr/>
+      </p:sp>
+      <p:sp>
+        <p:nvSpPr>
+          <p:cNvPr id="3" name="Notes Placeholder 2"/>
+          <p:cNvSpPr>
+            <a:spLocks noGrp="1"/>
+          </p:cNvSpPr>
+          <p:nvPr>
+            <p:ph type="body" idx="1"/>
+          </p:nvPr>
+        </p:nvSpPr>
+        <p:spPr/>
+        <p:txBody>
+          <a:bodyPr/>
+          <a:lstStyle/>
+          <a:p>
+            <a:r>
+              <a:rPr lang="en-US" dirty="0"/>
+              <a:t/>
+            </a:r>
+            <a:endParaRPr lang="en-US" dirty="0"/>
+          </a:p>
+        </p:txBody>
+      </p:sp>
+      <p:sp>
+        <p:nvSpPr>
+          <p:cNvPr id="4" name="Slide Number Placeholder 3"/>
+          <p:cNvSpPr>
+            <a:spLocks noGrp="1"/>
+          </p:cNvSpPr>
+          <p:nvPr>
+            <p:ph type="sldNum" sz="quarter" idx="10"/>
+          </p:nvPr>
+        </p:nvSpPr>
+        <p:spPr/>
+        <p:txBody>
+          <a:bodyPr/>
+          <a:lstStyle/>
+          <a:p>
+            <a:fld id="{F7021451-1387-4CA6-816F-3879F97B5CBC}" type="slidenum">
+              <a:rPr lang="en-US"/>
+              <a:t>12</a:t>
+            </a:fld>
+            <a:endParaRPr lang="en-US"/>
+          </a:p>
+        </p:txBody>
+      </p:sp>
+    </p:spTree>
+    <p:extLst>
+      <p:ext uri="{BB962C8B-B14F-4D97-AF65-F5344CB8AC3E}">
+        <p14:creationId xmlns:p14="http://schemas.microsoft.com/office/powerpoint/2010/main" val="1024086991"/>
+      </p:ext>
+    </p:extLst>
+  </p:cSld>
+  <p:clrMapOvr>
+    <a:masterClrMapping/>
+  </p:clrMapOvr>
+</p:notes>
+</file>
+
 <file path=ppt/notesSlides/notesSlide2.xml><?xml version="1.0" encoding="utf-8"?>
 <p:notes xmlns:a="http://schemas.openxmlformats.org/drawingml/2006/main" xmlns:r="http://schemas.openxmlformats.org/officeDocument/2006/relationships" xmlns:p="http://schemas.openxmlformats.org/presentationml/2006/main">
   <p:cSld>
@@ -596,7 +865,7 @@
           <a:p>
             <a:r>
               <a:rPr lang="en-US" dirty="0"/>
-              <a:t/>
+              <a:t>Faire le parallèle avec l'architecture : MCD = esquisse, MLD = plan, MPD = plan technique détaillé.</a:t>
             </a:r>
             <a:endParaRPr lang="en-US" dirty="0"/>
           </a:p>
@@ -684,7 +953,7 @@
           <a:p>
             <a:r>
               <a:rPr lang="en-US" dirty="0"/>
-              <a:t/>
+              <a:t>⚠️ Erreurs fréquentes : utiliser FLOAT au lieu de DECIMAL pour les prix (imprécision), TEXT pour un email (trop large), INT pour un téléphone (+41... n'est pas un nombre).</a:t>
             </a:r>
             <a:endParaRPr lang="en-US" dirty="0"/>
           </a:p>
@@ -772,7 +1041,7 @@
           <a:p>
             <a:r>
               <a:rPr lang="en-US" dirty="0"/>
-              <a:t/>
+              <a:t>Exercice rapide : afficher une liste de choix de types et demander de corriger les erreurs.</a:t>
             </a:r>
             <a:endParaRPr lang="en-US" dirty="0"/>
           </a:p>
@@ -860,7 +1129,7 @@
           <a:p>
             <a:r>
               <a:rPr lang="en-US" dirty="0"/>
-              <a:t/>
+              <a:t>Chaque contrainte vient d'une RÈGLE DE GESTION du Module 3.</a:t>
             </a:r>
             <a:endParaRPr lang="en-US" dirty="0"/>
           </a:p>
@@ -948,7 +1217,7 @@
           <a:p>
             <a:r>
               <a:rPr lang="en-US" dirty="0"/>
-              <a:t/>
+              <a:t>Les maquettes sont requises pour M1. Pas besoin d'être joli, juste fonctionnel.</a:t>
             </a:r>
             <a:endParaRPr lang="en-US" dirty="0"/>
           </a:p>
@@ -1036,7 +1305,7 @@
           <a:p>
             <a:r>
               <a:rPr lang="en-US" dirty="0"/>
-              <a:t/>
+              <a:t>La matrice de droits sera implémentée en SQL au Module 16.</a:t>
             </a:r>
             <a:endParaRPr lang="en-US" dirty="0"/>
           </a:p>
@@ -1060,6 +1329,182 @@
             <a:fld id="{F7021451-1387-4CA6-816F-3879F97B5CBC}" type="slidenum">
               <a:rPr lang="en-US"/>
               <a:t>7</a:t>
+            </a:fld>
+            <a:endParaRPr lang="en-US"/>
+          </a:p>
+        </p:txBody>
+      </p:sp>
+    </p:spTree>
+    <p:extLst>
+      <p:ext uri="{BB962C8B-B14F-4D97-AF65-F5344CB8AC3E}">
+        <p14:creationId xmlns:p14="http://schemas.microsoft.com/office/powerpoint/2010/main" val="1024086991"/>
+      </p:ext>
+    </p:extLst>
+  </p:cSld>
+  <p:clrMapOvr>
+    <a:masterClrMapping/>
+  </p:clrMapOvr>
+</p:notes>
+</file>
+
+<file path=ppt/notesSlides/notesSlide8.xml><?xml version="1.0" encoding="utf-8"?>
+<p:notes xmlns:a="http://schemas.openxmlformats.org/drawingml/2006/main" xmlns:r="http://schemas.openxmlformats.org/officeDocument/2006/relationships" xmlns:p="http://schemas.openxmlformats.org/presentationml/2006/main">
+  <p:cSld>
+    <p:spTree>
+      <p:nvGrpSpPr>
+        <p:cNvPr id="1" name=""/>
+        <p:cNvGrpSpPr/>
+        <p:nvPr/>
+      </p:nvGrpSpPr>
+      <p:grpSpPr>
+        <a:xfrm>
+          <a:off x="0" y="0"/>
+          <a:ext cx="0" cy="0"/>
+          <a:chOff x="0" y="0"/>
+          <a:chExt cx="0" cy="0"/>
+        </a:xfrm>
+      </p:grpSpPr>
+      <p:sp>
+        <p:nvSpPr>
+          <p:cNvPr id="2" name="Slide Image Placeholder 1"/>
+          <p:cNvSpPr>
+            <a:spLocks noGrp="1" noRot="1" noChangeAspect="1"/>
+          </p:cNvSpPr>
+          <p:nvPr>
+            <p:ph type="sldImg"/>
+          </p:nvPr>
+        </p:nvSpPr>
+        <p:spPr/>
+      </p:sp>
+      <p:sp>
+        <p:nvSpPr>
+          <p:cNvPr id="3" name="Notes Placeholder 2"/>
+          <p:cNvSpPr>
+            <a:spLocks noGrp="1"/>
+          </p:cNvSpPr>
+          <p:nvPr>
+            <p:ph type="body" idx="1"/>
+          </p:nvPr>
+        </p:nvSpPr>
+        <p:spPr/>
+        <p:txBody>
+          <a:bodyPr/>
+          <a:lstStyle/>
+          <a:p>
+            <a:r>
+              <a:rPr lang="en-US" dirty="0"/>
+              <a:t>Section brève pour la culture. Les étudiants travailleront avec des ORM en Unit 20 (Advanced Programming).</a:t>
+            </a:r>
+            <a:endParaRPr lang="en-US" dirty="0"/>
+          </a:p>
+        </p:txBody>
+      </p:sp>
+      <p:sp>
+        <p:nvSpPr>
+          <p:cNvPr id="4" name="Slide Number Placeholder 3"/>
+          <p:cNvSpPr>
+            <a:spLocks noGrp="1"/>
+          </p:cNvSpPr>
+          <p:nvPr>
+            <p:ph type="sldNum" sz="quarter" idx="10"/>
+          </p:nvPr>
+        </p:nvSpPr>
+        <p:spPr/>
+        <p:txBody>
+          <a:bodyPr/>
+          <a:lstStyle/>
+          <a:p>
+            <a:fld id="{F7021451-1387-4CA6-816F-3879F97B5CBC}" type="slidenum">
+              <a:rPr lang="en-US"/>
+              <a:t>8</a:t>
+            </a:fld>
+            <a:endParaRPr lang="en-US"/>
+          </a:p>
+        </p:txBody>
+      </p:sp>
+    </p:spTree>
+    <p:extLst>
+      <p:ext uri="{BB962C8B-B14F-4D97-AF65-F5344CB8AC3E}">
+        <p14:creationId xmlns:p14="http://schemas.microsoft.com/office/powerpoint/2010/main" val="1024086991"/>
+      </p:ext>
+    </p:extLst>
+  </p:cSld>
+  <p:clrMapOvr>
+    <a:masterClrMapping/>
+  </p:clrMapOvr>
+</p:notes>
+</file>
+
+<file path=ppt/notesSlides/notesSlide9.xml><?xml version="1.0" encoding="utf-8"?>
+<p:notes xmlns:a="http://schemas.openxmlformats.org/drawingml/2006/main" xmlns:r="http://schemas.openxmlformats.org/officeDocument/2006/relationships" xmlns:p="http://schemas.openxmlformats.org/presentationml/2006/main">
+  <p:cSld>
+    <p:spTree>
+      <p:nvGrpSpPr>
+        <p:cNvPr id="1" name=""/>
+        <p:cNvGrpSpPr/>
+        <p:nvPr/>
+      </p:nvGrpSpPr>
+      <p:grpSpPr>
+        <a:xfrm>
+          <a:off x="0" y="0"/>
+          <a:ext cx="0" cy="0"/>
+          <a:chOff x="0" y="0"/>
+          <a:chExt cx="0" cy="0"/>
+        </a:xfrm>
+      </p:grpSpPr>
+      <p:sp>
+        <p:nvSpPr>
+          <p:cNvPr id="2" name="Slide Image Placeholder 1"/>
+          <p:cNvSpPr>
+            <a:spLocks noGrp="1" noRot="1" noChangeAspect="1"/>
+          </p:cNvSpPr>
+          <p:nvPr>
+            <p:ph type="sldImg"/>
+          </p:nvPr>
+        </p:nvSpPr>
+        <p:spPr/>
+      </p:sp>
+      <p:sp>
+        <p:nvSpPr>
+          <p:cNvPr id="3" name="Notes Placeholder 2"/>
+          <p:cNvSpPr>
+            <a:spLocks noGrp="1"/>
+          </p:cNvSpPr>
+          <p:nvPr>
+            <p:ph type="body" idx="1"/>
+          </p:nvPr>
+        </p:nvSpPr>
+        <p:spPr/>
+        <p:txBody>
+          <a:bodyPr/>
+          <a:lstStyle/>
+          <a:p>
+            <a:r>
+              <a:rPr lang="en-US" dirty="0"/>
+              <a:t>D1 = Distinction. Les étudiants doivent aller au-delà de la description et ARGUMENTER.</a:t>
+            </a:r>
+            <a:endParaRPr lang="en-US" dirty="0"/>
+          </a:p>
+        </p:txBody>
+      </p:sp>
+      <p:sp>
+        <p:nvSpPr>
+          <p:cNvPr id="4" name="Slide Number Placeholder 3"/>
+          <p:cNvSpPr>
+            <a:spLocks noGrp="1"/>
+          </p:cNvSpPr>
+          <p:nvPr>
+            <p:ph type="sldNum" sz="quarter" idx="10"/>
+          </p:nvPr>
+        </p:nvSpPr>
+        <p:spPr/>
+        <p:txBody>
+          <a:bodyPr/>
+          <a:lstStyle/>
+          <a:p>
+            <a:fld id="{F7021451-1387-4CA6-816F-3879F97B5CBC}" type="slidenum">
+              <a:rPr lang="en-US"/>
+              <a:t>9</a:t>
             </a:fld>
             <a:endParaRPr lang="en-US"/>
           </a:p>
@@ -1445,7 +1890,7 @@
         </p:blipFill>
         <p:spPr>
           <a:xfrm>
-            <a:off x="3931920" y="457200"/>
+            <a:off x="3931920" y="365760"/>
             <a:ext cx="1280160" cy="1280160"/>
           </a:xfrm>
           <a:prstGeom prst="rect">
@@ -1461,7 +1906,7 @@
         </p:nvSpPr>
         <p:spPr>
           <a:xfrm>
-            <a:off x="457200" y="1828800"/>
+            <a:off x="457200" y="1737360"/>
             <a:ext cx="8229600" cy="457200"/>
           </a:xfrm>
           <a:prstGeom prst="rect">
@@ -1500,8 +1945,8 @@
         </p:nvSpPr>
         <p:spPr>
           <a:xfrm>
-            <a:off x="457200" y="2286000"/>
-            <a:ext cx="8229600" cy="822960"/>
+            <a:off x="274320" y="2194560"/>
+            <a:ext cx="8595360" cy="822960"/>
           </a:xfrm>
           <a:prstGeom prst="rect">
             <a:avLst/>
@@ -1517,7 +1962,7 @@
               <a:buNone/>
             </a:pPr>
             <a:r>
-              <a:rPr lang="en-US" sz="3400" b="1" dirty="0">
+              <a:rPr lang="en-US" sz="3200" b="1" dirty="0">
                 <a:solidFill>
                   <a:srgbClr val="FFFFFF"/>
                 </a:solidFill>
@@ -1527,7 +1972,7 @@
               </a:rPr>
               <a:t>MPD + Interfaces + BDD OO</a:t>
             </a:r>
-            <a:endParaRPr lang="en-US" sz="3400" dirty="0"/>
+            <a:endParaRPr lang="en-US" sz="3200" dirty="0"/>
           </a:p>
         </p:txBody>
       </p:sp>
@@ -1539,7 +1984,7 @@
         </p:nvSpPr>
         <p:spPr>
           <a:xfrm>
-            <a:off x="457200" y="3108960"/>
+            <a:off x="457200" y="3017520"/>
             <a:ext cx="8229600" cy="457200"/>
           </a:xfrm>
           <a:prstGeom prst="rect">
@@ -1556,7 +2001,7 @@
               <a:buNone/>
             </a:pPr>
             <a:r>
-              <a:rPr lang="en-US" sz="1600" dirty="0">
+              <a:rPr lang="en-US" sz="1500" dirty="0">
                 <a:solidFill>
                   <a:srgbClr val="CCCCCC"/>
                 </a:solidFill>
@@ -1564,9 +2009,9 @@
                 <a:ea typeface="Calibri" pitchFamily="34" charset="-122"/>
                 <a:cs typeface="Calibri" pitchFamily="34" charset="-120"/>
               </a:rPr>
-              <a:t>Types MySQL, contraintes, maquettes, sécurité</a:t>
-            </a:r>
-            <a:endParaRPr lang="en-US" sz="1600" dirty="0"/>
+              <a:t>Types MySQL · Contraintes · Maquettes · Sécurité</a:t>
+            </a:r>
+            <a:endParaRPr lang="en-US" sz="1500" dirty="0"/>
           </a:p>
         </p:txBody>
       </p:sp>
@@ -1597,28 +2042,80 @@
             <a:r>
               <a:rPr lang="en-US" sz="1100" dirty="0">
                 <a:solidFill>
-                  <a:srgbClr val="AAAACC"/>
+                  <a:srgbClr val="AA99CC"/>
                 </a:solidFill>
                 <a:latin typeface="Calibri" pitchFamily="34" charset="0"/>
                 <a:ea typeface="Calibri" pitchFamily="34" charset="-122"/>
                 <a:cs typeface="Calibri" pitchFamily="34" charset="-120"/>
               </a:rPr>
-              <a:t>Unit 4 — Database Design &amp; Development | SwissSound Studios</a:t>
+              <a:t>SwissSound Studios | BTEC: M1 D1 | LO1</a:t>
             </a:r>
             <a:endParaRPr lang="en-US" sz="1100" dirty="0"/>
           </a:p>
         </p:txBody>
       </p:sp>
-      <p:sp>
-        <p:nvSpPr>
-          <p:cNvPr id="8" name="Text 5"/>
-          <p:cNvSpPr/>
-          <p:nvPr/>
-        </p:nvSpPr>
-        <p:spPr>
-          <a:xfrm>
-            <a:off x="457200" y="4434840"/>
-            <a:ext cx="8229600" cy="274320"/>
+    </p:spTree>
+  </p:cSld>
+  <p:clrMapOvr>
+    <a:masterClrMapping/>
+  </p:clrMapOvr>
+</p:sld>
+</file>
+
+<file path=ppt/slides/slide10.xml><?xml version="1.0" encoding="utf-8"?>
+<p:sld xmlns:a="http://schemas.openxmlformats.org/drawingml/2006/main" xmlns:r="http://schemas.openxmlformats.org/officeDocument/2006/relationships" xmlns:p="http://schemas.openxmlformats.org/presentationml/2006/main">
+  <p:cSld name="Slide 10">
+    <p:bg>
+      <p:bgPr>
+        <a:solidFill>
+          <a:srgbClr val="F5F7FA"/>
+        </a:solidFill>
+      </p:bgPr>
+    </p:bg>
+    <p:spTree>
+      <p:nvGrpSpPr>
+        <p:cNvPr id="1" name=""/>
+        <p:cNvGrpSpPr/>
+        <p:nvPr/>
+      </p:nvGrpSpPr>
+      <p:grpSpPr>
+        <a:xfrm>
+          <a:off x="0" y="0"/>
+          <a:ext cx="0" cy="0"/>
+          <a:chOff x="0" y="0"/>
+          <a:chExt cx="0" cy="0"/>
+        </a:xfrm>
+      </p:grpSpPr>
+      <p:sp>
+        <p:nvSpPr>
+          <p:cNvPr id="2" name="Shape 0"/>
+          <p:cNvSpPr/>
+          <p:nvPr/>
+        </p:nvSpPr>
+        <p:spPr>
+          <a:xfrm>
+            <a:off x="0" y="0"/>
+            <a:ext cx="9144000" cy="54864"/>
+          </a:xfrm>
+          <a:prstGeom prst="rect">
+            <a:avLst/>
+          </a:prstGeom>
+          <a:solidFill>
+            <a:srgbClr val="2E7D32"/>
+          </a:solidFill>
+          <a:ln/>
+        </p:spPr>
+      </p:sp>
+      <p:sp>
+        <p:nvSpPr>
+          <p:cNvPr id="3" name="Text 1"/>
+          <p:cNvSpPr/>
+          <p:nvPr/>
+        </p:nvSpPr>
+        <p:spPr>
+          <a:xfrm>
+            <a:off x="457200" y="182880"/>
+            <a:ext cx="8229600" cy="594360"/>
           </a:xfrm>
           <a:prstGeom prst="rect">
             <a:avLst/>
@@ -1630,21 +2127,1698 @@
           <a:bodyPr wrap="square" lIns="0" tIns="0" rIns="0" bIns="0" rtlCol="0" anchor="ctr"/>
           <a:lstStyle/>
           <a:p>
-            <a:pPr algn="ctr" indent="0" marL="0">
+            <a:pPr indent="0" marL="0">
               <a:buNone/>
             </a:pPr>
             <a:r>
-              <a:rPr lang="en-US" sz="1000" dirty="0">
+              <a:rPr lang="en-US" sz="2400" b="1" dirty="0">
                 <a:solidFill>
-                  <a:srgbClr val="8888AA"/>
+                  <a:srgbClr val="1B5E20"/>
+                </a:solidFill>
+                <a:latin typeface="Trebuchet MS" pitchFamily="34" charset="0"/>
+                <a:ea typeface="Trebuchet MS" pitchFamily="34" charset="-122"/>
+                <a:cs typeface="Trebuchet MS" pitchFamily="34" charset="-120"/>
+              </a:rPr>
+              <a:t>Exercice Module 8</a:t>
+            </a:r>
+            <a:endParaRPr lang="en-US" sz="2400" dirty="0"/>
+          </a:p>
+        </p:txBody>
+      </p:sp>
+      <p:sp>
+        <p:nvSpPr>
+          <p:cNvPr id="4" name="Shape 2"/>
+          <p:cNvSpPr/>
+          <p:nvPr/>
+        </p:nvSpPr>
+        <p:spPr>
+          <a:xfrm>
+            <a:off x="457200" y="914400"/>
+            <a:ext cx="8229600" cy="521208"/>
+          </a:xfrm>
+          <a:prstGeom prst="rect">
+            <a:avLst/>
+          </a:prstGeom>
+          <a:solidFill>
+            <a:srgbClr val="FFFFFF"/>
+          </a:solidFill>
+          <a:ln/>
+          <a:effectLst>
+            <a:outerShdw sx="100000" sy="100000" kx="0" ky="0" algn="bl" rotWithShape="0" blurRad="50800" dist="25400" dir="8100000">
+              <a:srgbClr val="000000">
+                <a:alpha val="12000"/>
+              </a:srgbClr>
+            </a:outerShdw>
+          </a:effectLst>
+        </p:spPr>
+      </p:sp>
+      <p:sp>
+        <p:nvSpPr>
+          <p:cNvPr id="5" name="Shape 3"/>
+          <p:cNvSpPr/>
+          <p:nvPr/>
+        </p:nvSpPr>
+        <p:spPr>
+          <a:xfrm>
+            <a:off x="457200" y="914400"/>
+            <a:ext cx="45720" cy="521208"/>
+          </a:xfrm>
+          <a:prstGeom prst="rect">
+            <a:avLst/>
+          </a:prstGeom>
+          <a:solidFill>
+            <a:srgbClr val="2E7D32"/>
+          </a:solidFill>
+          <a:ln/>
+        </p:spPr>
+      </p:sp>
+      <p:sp>
+        <p:nvSpPr>
+          <p:cNvPr id="6" name="Text 4"/>
+          <p:cNvSpPr/>
+          <p:nvPr/>
+        </p:nvSpPr>
+        <p:spPr>
+          <a:xfrm>
+            <a:off x="685800" y="914400"/>
+            <a:ext cx="7818120" cy="521208"/>
+          </a:xfrm>
+          <a:prstGeom prst="rect">
+            <a:avLst/>
+          </a:prstGeom>
+          <a:noFill/>
+          <a:ln/>
+        </p:spPr>
+        <p:txBody>
+          <a:bodyPr wrap="square" lIns="0" tIns="0" rIns="0" bIns="0" rtlCol="0" anchor="ctr"/>
+          <a:lstStyle/>
+          <a:p>
+            <a:pPr indent="0" marL="0">
+              <a:buNone/>
+            </a:pPr>
+            <a:r>
+              <a:rPr lang="en-US" sz="1200" dirty="0">
+                <a:solidFill>
+                  <a:srgbClr val="1A1A2E"/>
                 </a:solidFill>
                 <a:latin typeface="Calibri" pitchFamily="34" charset="0"/>
                 <a:ea typeface="Calibri" pitchFamily="34" charset="-122"/>
                 <a:cs typeface="Calibri" pitchFamily="34" charset="-120"/>
               </a:rPr>
-              <a:t>BTEC : M1 D1 | LO1</a:t>
-            </a:r>
-            <a:endParaRPr lang="en-US" sz="1000" dirty="0"/>
+              <a:t>Écrire le MPD complet de SwissSound (types MySQL + contraintes pour les 9 tables)</a:t>
+            </a:r>
+            <a:endParaRPr lang="en-US" sz="1200" dirty="0"/>
+          </a:p>
+        </p:txBody>
+      </p:sp>
+      <p:sp>
+        <p:nvSpPr>
+          <p:cNvPr id="7" name="Shape 5"/>
+          <p:cNvSpPr/>
+          <p:nvPr/>
+        </p:nvSpPr>
+        <p:spPr>
+          <a:xfrm>
+            <a:off x="457200" y="1463040"/>
+            <a:ext cx="8229600" cy="521208"/>
+          </a:xfrm>
+          <a:prstGeom prst="rect">
+            <a:avLst/>
+          </a:prstGeom>
+          <a:solidFill>
+            <a:srgbClr val="E8F5E9"/>
+          </a:solidFill>
+          <a:ln/>
+          <a:effectLst>
+            <a:outerShdw sx="100000" sy="100000" kx="0" ky="0" algn="bl" rotWithShape="0" blurRad="50800" dist="25400" dir="8100000">
+              <a:srgbClr val="000000">
+                <a:alpha val="12000"/>
+              </a:srgbClr>
+            </a:outerShdw>
+          </a:effectLst>
+        </p:spPr>
+      </p:sp>
+      <p:sp>
+        <p:nvSpPr>
+          <p:cNvPr id="8" name="Shape 6"/>
+          <p:cNvSpPr/>
+          <p:nvPr/>
+        </p:nvSpPr>
+        <p:spPr>
+          <a:xfrm>
+            <a:off x="457200" y="1463040"/>
+            <a:ext cx="45720" cy="521208"/>
+          </a:xfrm>
+          <a:prstGeom prst="rect">
+            <a:avLst/>
+          </a:prstGeom>
+          <a:solidFill>
+            <a:srgbClr val="2E7D32"/>
+          </a:solidFill>
+          <a:ln/>
+        </p:spPr>
+      </p:sp>
+      <p:sp>
+        <p:nvSpPr>
+          <p:cNvPr id="9" name="Text 7"/>
+          <p:cNvSpPr/>
+          <p:nvPr/>
+        </p:nvSpPr>
+        <p:spPr>
+          <a:xfrm>
+            <a:off x="685800" y="1463040"/>
+            <a:ext cx="7818120" cy="521208"/>
+          </a:xfrm>
+          <a:prstGeom prst="rect">
+            <a:avLst/>
+          </a:prstGeom>
+          <a:noFill/>
+          <a:ln/>
+        </p:spPr>
+        <p:txBody>
+          <a:bodyPr wrap="square" lIns="0" tIns="0" rIns="0" bIns="0" rtlCol="0" anchor="ctr"/>
+          <a:lstStyle/>
+          <a:p>
+            <a:pPr indent="0" marL="0">
+              <a:buNone/>
+            </a:pPr>
+            <a:r>
+              <a:rPr lang="en-US" sz="1200" dirty="0">
+                <a:solidFill>
+                  <a:srgbClr val="1A1A2E"/>
+                </a:solidFill>
+                <a:latin typeface="Calibri" pitchFamily="34" charset="0"/>
+                <a:ea typeface="Calibri" pitchFamily="34" charset="-122"/>
+                <a:cs typeface="Calibri" pitchFamily="34" charset="-120"/>
+              </a:rPr>
+              <a:t>Maquetter 2 interfaces : formulaire ajout artiste + réservation session</a:t>
+            </a:r>
+            <a:endParaRPr lang="en-US" sz="1200" dirty="0"/>
+          </a:p>
+        </p:txBody>
+      </p:sp>
+      <p:sp>
+        <p:nvSpPr>
+          <p:cNvPr id="10" name="Shape 8"/>
+          <p:cNvSpPr/>
+          <p:nvPr/>
+        </p:nvSpPr>
+        <p:spPr>
+          <a:xfrm>
+            <a:off x="457200" y="2011680"/>
+            <a:ext cx="8229600" cy="521208"/>
+          </a:xfrm>
+          <a:prstGeom prst="rect">
+            <a:avLst/>
+          </a:prstGeom>
+          <a:solidFill>
+            <a:srgbClr val="FFFFFF"/>
+          </a:solidFill>
+          <a:ln/>
+          <a:effectLst>
+            <a:outerShdw sx="100000" sy="100000" kx="0" ky="0" algn="bl" rotWithShape="0" blurRad="50800" dist="25400" dir="8100000">
+              <a:srgbClr val="000000">
+                <a:alpha val="12000"/>
+              </a:srgbClr>
+            </a:outerShdw>
+          </a:effectLst>
+        </p:spPr>
+      </p:sp>
+      <p:sp>
+        <p:nvSpPr>
+          <p:cNvPr id="11" name="Shape 9"/>
+          <p:cNvSpPr/>
+          <p:nvPr/>
+        </p:nvSpPr>
+        <p:spPr>
+          <a:xfrm>
+            <a:off x="457200" y="2011680"/>
+            <a:ext cx="45720" cy="521208"/>
+          </a:xfrm>
+          <a:prstGeom prst="rect">
+            <a:avLst/>
+          </a:prstGeom>
+          <a:solidFill>
+            <a:srgbClr val="2E7D32"/>
+          </a:solidFill>
+          <a:ln/>
+        </p:spPr>
+      </p:sp>
+      <p:sp>
+        <p:nvSpPr>
+          <p:cNvPr id="12" name="Text 10"/>
+          <p:cNvSpPr/>
+          <p:nvPr/>
+        </p:nvSpPr>
+        <p:spPr>
+          <a:xfrm>
+            <a:off x="685800" y="2011680"/>
+            <a:ext cx="7818120" cy="521208"/>
+          </a:xfrm>
+          <a:prstGeom prst="rect">
+            <a:avLst/>
+          </a:prstGeom>
+          <a:noFill/>
+          <a:ln/>
+        </p:spPr>
+        <p:txBody>
+          <a:bodyPr wrap="square" lIns="0" tIns="0" rIns="0" bIns="0" rtlCol="0" anchor="ctr"/>
+          <a:lstStyle/>
+          <a:p>
+            <a:pPr indent="0" marL="0">
+              <a:buNone/>
+            </a:pPr>
+            <a:r>
+              <a:rPr lang="en-US" sz="1200" dirty="0">
+                <a:solidFill>
+                  <a:srgbClr val="1A1A2E"/>
+                </a:solidFill>
+                <a:latin typeface="Calibri" pitchFamily="34" charset="0"/>
+                <a:ea typeface="Calibri" pitchFamily="34" charset="-122"/>
+                <a:cs typeface="Calibri" pitchFamily="34" charset="-120"/>
+              </a:rPr>
+              <a:t>Concevoir la matrice de droits d'accès (admin, ingénieur, comptable, reception)</a:t>
+            </a:r>
+            <a:endParaRPr lang="en-US" sz="1200" dirty="0"/>
+          </a:p>
+        </p:txBody>
+      </p:sp>
+      <p:sp>
+        <p:nvSpPr>
+          <p:cNvPr id="13" name="Shape 11"/>
+          <p:cNvSpPr/>
+          <p:nvPr/>
+        </p:nvSpPr>
+        <p:spPr>
+          <a:xfrm>
+            <a:off x="457200" y="2560320"/>
+            <a:ext cx="8229600" cy="521208"/>
+          </a:xfrm>
+          <a:prstGeom prst="rect">
+            <a:avLst/>
+          </a:prstGeom>
+          <a:solidFill>
+            <a:srgbClr val="E8F5E9"/>
+          </a:solidFill>
+          <a:ln/>
+          <a:effectLst>
+            <a:outerShdw sx="100000" sy="100000" kx="0" ky="0" algn="bl" rotWithShape="0" blurRad="50800" dist="25400" dir="8100000">
+              <a:srgbClr val="000000">
+                <a:alpha val="12000"/>
+              </a:srgbClr>
+            </a:outerShdw>
+          </a:effectLst>
+        </p:spPr>
+      </p:sp>
+      <p:sp>
+        <p:nvSpPr>
+          <p:cNvPr id="14" name="Shape 12"/>
+          <p:cNvSpPr/>
+          <p:nvPr/>
+        </p:nvSpPr>
+        <p:spPr>
+          <a:xfrm>
+            <a:off x="457200" y="2560320"/>
+            <a:ext cx="45720" cy="521208"/>
+          </a:xfrm>
+          <a:prstGeom prst="rect">
+            <a:avLst/>
+          </a:prstGeom>
+          <a:solidFill>
+            <a:srgbClr val="2E7D32"/>
+          </a:solidFill>
+          <a:ln/>
+        </p:spPr>
+      </p:sp>
+      <p:sp>
+        <p:nvSpPr>
+          <p:cNvPr id="15" name="Text 13"/>
+          <p:cNvSpPr/>
+          <p:nvPr/>
+        </p:nvSpPr>
+        <p:spPr>
+          <a:xfrm>
+            <a:off x="685800" y="2560320"/>
+            <a:ext cx="7818120" cy="521208"/>
+          </a:xfrm>
+          <a:prstGeom prst="rect">
+            <a:avLst/>
+          </a:prstGeom>
+          <a:noFill/>
+          <a:ln/>
+        </p:spPr>
+        <p:txBody>
+          <a:bodyPr wrap="square" lIns="0" tIns="0" rIns="0" bIns="0" rtlCol="0" anchor="ctr"/>
+          <a:lstStyle/>
+          <a:p>
+            <a:pPr indent="0" marL="0">
+              <a:buNone/>
+            </a:pPr>
+            <a:r>
+              <a:rPr lang="en-US" sz="1200" dirty="0">
+                <a:solidFill>
+                  <a:srgbClr val="1A1A2E"/>
+                </a:solidFill>
+                <a:latin typeface="Calibri" pitchFamily="34" charset="0"/>
+                <a:ea typeface="Calibri" pitchFamily="34" charset="-122"/>
+                <a:cs typeface="Calibri" pitchFamily="34" charset="-120"/>
+              </a:rPr>
+              <a:t>Identifier les données à chiffrer (RGPD)</a:t>
+            </a:r>
+            <a:endParaRPr lang="en-US" sz="1200" dirty="0"/>
+          </a:p>
+        </p:txBody>
+      </p:sp>
+      <p:sp>
+        <p:nvSpPr>
+          <p:cNvPr id="16" name="Shape 14"/>
+          <p:cNvSpPr/>
+          <p:nvPr/>
+        </p:nvSpPr>
+        <p:spPr>
+          <a:xfrm>
+            <a:off x="457200" y="3108960"/>
+            <a:ext cx="8229600" cy="521208"/>
+          </a:xfrm>
+          <a:prstGeom prst="rect">
+            <a:avLst/>
+          </a:prstGeom>
+          <a:solidFill>
+            <a:srgbClr val="FFFFFF"/>
+          </a:solidFill>
+          <a:ln/>
+          <a:effectLst>
+            <a:outerShdw sx="100000" sy="100000" kx="0" ky="0" algn="bl" rotWithShape="0" blurRad="50800" dist="25400" dir="8100000">
+              <a:srgbClr val="000000">
+                <a:alpha val="12000"/>
+              </a:srgbClr>
+            </a:outerShdw>
+          </a:effectLst>
+        </p:spPr>
+      </p:sp>
+      <p:sp>
+        <p:nvSpPr>
+          <p:cNvPr id="17" name="Shape 15"/>
+          <p:cNvSpPr/>
+          <p:nvPr/>
+        </p:nvSpPr>
+        <p:spPr>
+          <a:xfrm>
+            <a:off x="457200" y="3108960"/>
+            <a:ext cx="45720" cy="521208"/>
+          </a:xfrm>
+          <a:prstGeom prst="rect">
+            <a:avLst/>
+          </a:prstGeom>
+          <a:solidFill>
+            <a:srgbClr val="2E7D32"/>
+          </a:solidFill>
+          <a:ln/>
+        </p:spPr>
+      </p:sp>
+      <p:sp>
+        <p:nvSpPr>
+          <p:cNvPr id="18" name="Text 16"/>
+          <p:cNvSpPr/>
+          <p:nvPr/>
+        </p:nvSpPr>
+        <p:spPr>
+          <a:xfrm>
+            <a:off x="685800" y="3108960"/>
+            <a:ext cx="7818120" cy="521208"/>
+          </a:xfrm>
+          <a:prstGeom prst="rect">
+            <a:avLst/>
+          </a:prstGeom>
+          <a:noFill/>
+          <a:ln/>
+        </p:spPr>
+        <p:txBody>
+          <a:bodyPr wrap="square" lIns="0" tIns="0" rIns="0" bIns="0" rtlCol="0" anchor="ctr"/>
+          <a:lstStyle/>
+          <a:p>
+            <a:pPr indent="0" marL="0">
+              <a:buNone/>
+            </a:pPr>
+            <a:r>
+              <a:rPr lang="en-US" sz="1200" dirty="0">
+                <a:solidFill>
+                  <a:srgbClr val="1A1A2E"/>
+                </a:solidFill>
+                <a:latin typeface="Calibri" pitchFamily="34" charset="0"/>
+                <a:ea typeface="Calibri" pitchFamily="34" charset="-122"/>
+                <a:cs typeface="Calibri" pitchFamily="34" charset="-120"/>
+              </a:rPr>
+              <a:t>Rédiger l'évaluation D1 (forces, faiblesses, améliorations)</a:t>
+            </a:r>
+            <a:endParaRPr lang="en-US" sz="1200" dirty="0"/>
+          </a:p>
+        </p:txBody>
+      </p:sp>
+      <p:sp>
+        <p:nvSpPr>
+          <p:cNvPr id="19" name="Shape 17"/>
+          <p:cNvSpPr/>
+          <p:nvPr/>
+        </p:nvSpPr>
+        <p:spPr>
+          <a:xfrm>
+            <a:off x="457200" y="3657600"/>
+            <a:ext cx="8229600" cy="521208"/>
+          </a:xfrm>
+          <a:prstGeom prst="rect">
+            <a:avLst/>
+          </a:prstGeom>
+          <a:solidFill>
+            <a:srgbClr val="E8F5E9"/>
+          </a:solidFill>
+          <a:ln/>
+          <a:effectLst>
+            <a:outerShdw sx="100000" sy="100000" kx="0" ky="0" algn="bl" rotWithShape="0" blurRad="50800" dist="25400" dir="8100000">
+              <a:srgbClr val="000000">
+                <a:alpha val="12000"/>
+              </a:srgbClr>
+            </a:outerShdw>
+          </a:effectLst>
+        </p:spPr>
+      </p:sp>
+      <p:sp>
+        <p:nvSpPr>
+          <p:cNvPr id="20" name="Shape 18"/>
+          <p:cNvSpPr/>
+          <p:nvPr/>
+        </p:nvSpPr>
+        <p:spPr>
+          <a:xfrm>
+            <a:off x="457200" y="3657600"/>
+            <a:ext cx="45720" cy="521208"/>
+          </a:xfrm>
+          <a:prstGeom prst="rect">
+            <a:avLst/>
+          </a:prstGeom>
+          <a:solidFill>
+            <a:srgbClr val="2E7D32"/>
+          </a:solidFill>
+          <a:ln/>
+        </p:spPr>
+      </p:sp>
+      <p:sp>
+        <p:nvSpPr>
+          <p:cNvPr id="21" name="Text 19"/>
+          <p:cNvSpPr/>
+          <p:nvPr/>
+        </p:nvSpPr>
+        <p:spPr>
+          <a:xfrm>
+            <a:off x="685800" y="3657600"/>
+            <a:ext cx="7818120" cy="521208"/>
+          </a:xfrm>
+          <a:prstGeom prst="rect">
+            <a:avLst/>
+          </a:prstGeom>
+          <a:noFill/>
+          <a:ln/>
+        </p:spPr>
+        <p:txBody>
+          <a:bodyPr wrap="square" lIns="0" tIns="0" rIns="0" bIns="0" rtlCol="0" anchor="ctr"/>
+          <a:lstStyle/>
+          <a:p>
+            <a:pPr indent="0" marL="0">
+              <a:buNone/>
+            </a:pPr>
+            <a:r>
+              <a:rPr lang="en-US" sz="1200" dirty="0">
+                <a:solidFill>
+                  <a:srgbClr val="1A1A2E"/>
+                </a:solidFill>
+                <a:latin typeface="Calibri" pitchFamily="34" charset="0"/>
+                <a:ea typeface="Calibri" pitchFamily="34" charset="-122"/>
+                <a:cs typeface="Calibri" pitchFamily="34" charset="-120"/>
+              </a:rPr>
+              <a:t>DÉFI : comparer le modèle relationnel SwissSound avec un modèle OO équivalent</a:t>
+            </a:r>
+            <a:endParaRPr lang="en-US" sz="1200" dirty="0"/>
+          </a:p>
+        </p:txBody>
+      </p:sp>
+    </p:spTree>
+  </p:cSld>
+  <p:clrMapOvr>
+    <a:masterClrMapping/>
+  </p:clrMapOvr>
+</p:sld>
+</file>
+
+<file path=ppt/slides/slide11.xml><?xml version="1.0" encoding="utf-8"?>
+<p:sld xmlns:a="http://schemas.openxmlformats.org/drawingml/2006/main" xmlns:r="http://schemas.openxmlformats.org/officeDocument/2006/relationships" xmlns:p="http://schemas.openxmlformats.org/presentationml/2006/main">
+  <p:cSld name="Slide 11">
+    <p:bg>
+      <p:bgPr>
+        <a:solidFill>
+          <a:srgbClr val="1B5E20"/>
+        </a:solidFill>
+      </p:bgPr>
+    </p:bg>
+    <p:spTree>
+      <p:nvGrpSpPr>
+        <p:cNvPr id="1" name=""/>
+        <p:cNvGrpSpPr/>
+        <p:nvPr/>
+      </p:nvGrpSpPr>
+      <p:grpSpPr>
+        <a:xfrm>
+          <a:off x="0" y="0"/>
+          <a:ext cx="0" cy="0"/>
+          <a:chOff x="0" y="0"/>
+          <a:chExt cx="0" cy="0"/>
+        </a:xfrm>
+      </p:grpSpPr>
+      <p:sp>
+        <p:nvSpPr>
+          <p:cNvPr id="2" name="Text 0"/>
+          <p:cNvSpPr/>
+          <p:nvPr/>
+        </p:nvSpPr>
+        <p:spPr>
+          <a:xfrm>
+            <a:off x="3840480" y="457200"/>
+            <a:ext cx="1463040" cy="1097280"/>
+          </a:xfrm>
+          <a:prstGeom prst="rect">
+            <a:avLst/>
+          </a:prstGeom>
+          <a:noFill/>
+          <a:ln/>
+        </p:spPr>
+        <p:txBody>
+          <a:bodyPr wrap="square" lIns="0" tIns="0" rIns="0" bIns="0" rtlCol="0" anchor="ctr"/>
+          <a:lstStyle/>
+          <a:p>
+            <a:pPr algn="ctr" indent="0" marL="0">
+              <a:buNone/>
+            </a:pPr>
+            <a:r>
+              <a:rPr lang="en-US" sz="6000" dirty="0">
+                <a:solidFill>
+                  <a:srgbClr val="000000"/>
+                </a:solidFill>
+              </a:rPr>
+              <a:t>🎮</a:t>
+            </a:r>
+            <a:endParaRPr lang="en-US" sz="6000" dirty="0"/>
+          </a:p>
+        </p:txBody>
+      </p:sp>
+      <p:sp>
+        <p:nvSpPr>
+          <p:cNvPr id="3" name="Text 1"/>
+          <p:cNvSpPr/>
+          <p:nvPr/>
+        </p:nvSpPr>
+        <p:spPr>
+          <a:xfrm>
+            <a:off x="457200" y="1645920"/>
+            <a:ext cx="8229600" cy="548640"/>
+          </a:xfrm>
+          <a:prstGeom prst="rect">
+            <a:avLst/>
+          </a:prstGeom>
+          <a:noFill/>
+          <a:ln/>
+        </p:spPr>
+        <p:txBody>
+          <a:bodyPr wrap="square" lIns="0" tIns="0" rIns="0" bIns="0" rtlCol="0" anchor="ctr"/>
+          <a:lstStyle/>
+          <a:p>
+            <a:pPr algn="ctr" indent="0" marL="0">
+              <a:buNone/>
+            </a:pPr>
+            <a:r>
+              <a:rPr lang="en-US" sz="2600" b="1" dirty="0">
+                <a:solidFill>
+                  <a:srgbClr val="FFFFFF"/>
+                </a:solidFill>
+                <a:latin typeface="Trebuchet MS" pitchFamily="34" charset="0"/>
+                <a:ea typeface="Trebuchet MS" pitchFamily="34" charset="-122"/>
+                <a:cs typeface="Trebuchet MS" pitchFamily="34" charset="-120"/>
+              </a:rPr>
+              <a:t>Mini-jeu : Le Bouclier de Validation</a:t>
+            </a:r>
+            <a:endParaRPr lang="en-US" sz="2600" dirty="0"/>
+          </a:p>
+        </p:txBody>
+      </p:sp>
+      <p:sp>
+        <p:nvSpPr>
+          <p:cNvPr id="4" name="Text 2"/>
+          <p:cNvSpPr/>
+          <p:nvPr/>
+        </p:nvSpPr>
+        <p:spPr>
+          <a:xfrm>
+            <a:off x="1371600" y="2286000"/>
+            <a:ext cx="6400800" cy="731520"/>
+          </a:xfrm>
+          <a:prstGeom prst="rect">
+            <a:avLst/>
+          </a:prstGeom>
+          <a:noFill/>
+          <a:ln/>
+        </p:spPr>
+        <p:txBody>
+          <a:bodyPr wrap="square" lIns="0" tIns="0" rIns="0" bIns="0" rtlCol="0" anchor="ctr"/>
+          <a:lstStyle/>
+          <a:p>
+            <a:pPr algn="ctr" indent="0" marL="0">
+              <a:buNone/>
+            </a:pPr>
+            <a:r>
+              <a:rPr lang="en-US" sz="1400" dirty="0">
+                <a:solidFill>
+                  <a:srgbClr val="CCCCCC"/>
+                </a:solidFill>
+                <a:latin typeface="Calibri" pitchFamily="34" charset="0"/>
+                <a:ea typeface="Calibri" pitchFamily="34" charset="-122"/>
+                <a:cs typeface="Calibri" pitchFamily="34" charset="-120"/>
+              </a:rPr>
+              <a:t>Classez : type MySQL correct ou mal choisi ?</a:t>
+            </a:r>
+            <a:endParaRPr lang="en-US" sz="1400" dirty="0"/>
+          </a:p>
+        </p:txBody>
+      </p:sp>
+      <p:sp>
+        <p:nvSpPr>
+          <p:cNvPr id="5" name="Shape 3"/>
+          <p:cNvSpPr/>
+          <p:nvPr/>
+        </p:nvSpPr>
+        <p:spPr>
+          <a:xfrm>
+            <a:off x="2286000" y="3291840"/>
+            <a:ext cx="4572000" cy="548640"/>
+          </a:xfrm>
+          <a:prstGeom prst="rect">
+            <a:avLst/>
+          </a:prstGeom>
+          <a:solidFill>
+            <a:srgbClr val="FF6F00"/>
+          </a:solidFill>
+          <a:ln/>
+        </p:spPr>
+      </p:sp>
+      <p:sp>
+        <p:nvSpPr>
+          <p:cNvPr id="6" name="Text 4"/>
+          <p:cNvSpPr/>
+          <p:nvPr/>
+        </p:nvSpPr>
+        <p:spPr>
+          <a:xfrm>
+            <a:off x="2286000" y="3291840"/>
+            <a:ext cx="4572000" cy="548640"/>
+          </a:xfrm>
+          <a:prstGeom prst="rect">
+            <a:avLst/>
+          </a:prstGeom>
+          <a:noFill/>
+          <a:ln/>
+        </p:spPr>
+        <p:txBody>
+          <a:bodyPr wrap="square" lIns="0" tIns="0" rIns="0" bIns="0" rtlCol="0" anchor="ctr"/>
+          <a:lstStyle/>
+          <a:p>
+            <a:pPr algn="ctr" indent="0" marL="0">
+              <a:buNone/>
+            </a:pPr>
+            <a:r>
+              <a:rPr lang="en-US" sz="1800" b="1" dirty="0">
+                <a:solidFill>
+                  <a:srgbClr val="FFFFFF"/>
+                </a:solidFill>
+                <a:latin typeface="Trebuchet MS" pitchFamily="34" charset="0"/>
+                <a:ea typeface="Trebuchet MS" pitchFamily="34" charset="-122"/>
+                <a:cs typeface="Trebuchet MS" pitchFamily="34" charset="-120"/>
+              </a:rPr>
+              <a:t>▶  Lancer le jeu</a:t>
+            </a:r>
+            <a:endParaRPr lang="en-US" sz="1800" dirty="0"/>
+          </a:p>
+        </p:txBody>
+      </p:sp>
+    </p:spTree>
+  </p:cSld>
+  <p:clrMapOvr>
+    <a:masterClrMapping/>
+  </p:clrMapOvr>
+</p:sld>
+</file>
+
+<file path=ppt/slides/slide12.xml><?xml version="1.0" encoding="utf-8"?>
+<p:sld xmlns:a="http://schemas.openxmlformats.org/drawingml/2006/main" xmlns:r="http://schemas.openxmlformats.org/officeDocument/2006/relationships" xmlns:p="http://schemas.openxmlformats.org/presentationml/2006/main">
+  <p:cSld name="Slide 12">
+    <p:bg>
+      <p:bgPr>
+        <a:solidFill>
+          <a:srgbClr val="F5F7FA"/>
+        </a:solidFill>
+      </p:bgPr>
+    </p:bg>
+    <p:spTree>
+      <p:nvGrpSpPr>
+        <p:cNvPr id="1" name=""/>
+        <p:cNvGrpSpPr/>
+        <p:nvPr/>
+      </p:nvGrpSpPr>
+      <p:grpSpPr>
+        <a:xfrm>
+          <a:off x="0" y="0"/>
+          <a:ext cx="0" cy="0"/>
+          <a:chOff x="0" y="0"/>
+          <a:chExt cx="0" cy="0"/>
+        </a:xfrm>
+      </p:grpSpPr>
+      <p:sp>
+        <p:nvSpPr>
+          <p:cNvPr id="2" name="Text 0"/>
+          <p:cNvSpPr/>
+          <p:nvPr/>
+        </p:nvSpPr>
+        <p:spPr>
+          <a:xfrm>
+            <a:off x="457200" y="137160"/>
+            <a:ext cx="5486400" cy="411480"/>
+          </a:xfrm>
+          <a:prstGeom prst="rect">
+            <a:avLst/>
+          </a:prstGeom>
+          <a:noFill/>
+          <a:ln/>
+        </p:spPr>
+        <p:txBody>
+          <a:bodyPr wrap="square" lIns="0" tIns="0" rIns="0" bIns="0" rtlCol="0" anchor="ctr"/>
+          <a:lstStyle/>
+          <a:p>
+            <a:pPr indent="0" marL="0">
+              <a:buNone/>
+            </a:pPr>
+            <a:r>
+              <a:rPr lang="en-US" sz="1800" b="1" dirty="0">
+                <a:solidFill>
+                  <a:srgbClr val="1B5E20"/>
+                </a:solidFill>
+                <a:latin typeface="Trebuchet MS" pitchFamily="34" charset="0"/>
+                <a:ea typeface="Trebuchet MS" pitchFamily="34" charset="-122"/>
+                <a:cs typeface="Trebuchet MS" pitchFamily="34" charset="-120"/>
+              </a:rPr>
+              <a:t>📋 Mémo Module 8</a:t>
+            </a:r>
+            <a:endParaRPr lang="en-US" sz="1800" dirty="0"/>
+          </a:p>
+        </p:txBody>
+      </p:sp>
+      <p:sp>
+        <p:nvSpPr>
+          <p:cNvPr id="3" name="Shape 1"/>
+          <p:cNvSpPr/>
+          <p:nvPr/>
+        </p:nvSpPr>
+        <p:spPr>
+          <a:xfrm>
+            <a:off x="457200" y="548640"/>
+            <a:ext cx="8229600" cy="274320"/>
+          </a:xfrm>
+          <a:prstGeom prst="rect">
+            <a:avLst/>
+          </a:prstGeom>
+          <a:solidFill>
+            <a:srgbClr val="FFF3E0"/>
+          </a:solidFill>
+          <a:ln/>
+        </p:spPr>
+      </p:sp>
+      <p:sp>
+        <p:nvSpPr>
+          <p:cNvPr id="4" name="Text 2"/>
+          <p:cNvSpPr/>
+          <p:nvPr/>
+        </p:nvSpPr>
+        <p:spPr>
+          <a:xfrm>
+            <a:off x="640080" y="548640"/>
+            <a:ext cx="7772400" cy="274320"/>
+          </a:xfrm>
+          <a:prstGeom prst="rect">
+            <a:avLst/>
+          </a:prstGeom>
+          <a:noFill/>
+          <a:ln/>
+        </p:spPr>
+        <p:txBody>
+          <a:bodyPr wrap="square" lIns="0" tIns="0" rIns="0" bIns="0" rtlCol="0" anchor="ctr"/>
+          <a:lstStyle/>
+          <a:p>
+            <a:pPr indent="0" marL="0">
+              <a:buNone/>
+            </a:pPr>
+            <a:r>
+              <a:rPr lang="en-US" sz="900" b="1" dirty="0">
+                <a:solidFill>
+                  <a:srgbClr val="E65100"/>
+                </a:solidFill>
+                <a:latin typeface="Calibri" pitchFamily="34" charset="0"/>
+                <a:ea typeface="Calibri" pitchFamily="34" charset="-122"/>
+                <a:cs typeface="Calibri" pitchFamily="34" charset="-120"/>
+              </a:rPr>
+              <a:t>🔒 Déblocable après complétion</a:t>
+            </a:r>
+            <a:endParaRPr lang="en-US" sz="900" dirty="0"/>
+          </a:p>
+        </p:txBody>
+      </p:sp>
+      <p:sp>
+        <p:nvSpPr>
+          <p:cNvPr id="5" name="Shape 3"/>
+          <p:cNvSpPr/>
+          <p:nvPr/>
+        </p:nvSpPr>
+        <p:spPr>
+          <a:xfrm>
+            <a:off x="457200" y="960120"/>
+            <a:ext cx="2286000" cy="475488"/>
+          </a:xfrm>
+          <a:prstGeom prst="rect">
+            <a:avLst/>
+          </a:prstGeom>
+          <a:solidFill>
+            <a:srgbClr val="E8F5E9"/>
+          </a:solidFill>
+          <a:ln/>
+        </p:spPr>
+      </p:sp>
+      <p:sp>
+        <p:nvSpPr>
+          <p:cNvPr id="6" name="Text 4"/>
+          <p:cNvSpPr/>
+          <p:nvPr/>
+        </p:nvSpPr>
+        <p:spPr>
+          <a:xfrm>
+            <a:off x="548640" y="960120"/>
+            <a:ext cx="2103120" cy="475488"/>
+          </a:xfrm>
+          <a:prstGeom prst="rect">
+            <a:avLst/>
+          </a:prstGeom>
+          <a:noFill/>
+          <a:ln/>
+        </p:spPr>
+        <p:txBody>
+          <a:bodyPr wrap="square" lIns="0" tIns="0" rIns="0" bIns="0" rtlCol="0" anchor="ctr"/>
+          <a:lstStyle/>
+          <a:p>
+            <a:pPr indent="0" marL="0">
+              <a:buNone/>
+            </a:pPr>
+            <a:r>
+              <a:rPr lang="en-US" sz="900" b="1" dirty="0">
+                <a:solidFill>
+                  <a:srgbClr val="1B5E20"/>
+                </a:solidFill>
+                <a:latin typeface="Trebuchet MS" pitchFamily="34" charset="0"/>
+                <a:ea typeface="Trebuchet MS" pitchFamily="34" charset="-122"/>
+                <a:cs typeface="Trebuchet MS" pitchFamily="34" charset="-120"/>
+              </a:rPr>
+              <a:t>MPD</a:t>
+            </a:r>
+            <a:endParaRPr lang="en-US" sz="900" dirty="0"/>
+          </a:p>
+        </p:txBody>
+      </p:sp>
+      <p:sp>
+        <p:nvSpPr>
+          <p:cNvPr id="7" name="Shape 5"/>
+          <p:cNvSpPr/>
+          <p:nvPr/>
+        </p:nvSpPr>
+        <p:spPr>
+          <a:xfrm>
+            <a:off x="2743200" y="960120"/>
+            <a:ext cx="5943600" cy="475488"/>
+          </a:xfrm>
+          <a:prstGeom prst="rect">
+            <a:avLst/>
+          </a:prstGeom>
+          <a:solidFill>
+            <a:srgbClr val="E8F5E9"/>
+          </a:solidFill>
+          <a:ln/>
+        </p:spPr>
+      </p:sp>
+      <p:sp>
+        <p:nvSpPr>
+          <p:cNvPr id="8" name="Text 6"/>
+          <p:cNvSpPr/>
+          <p:nvPr/>
+        </p:nvSpPr>
+        <p:spPr>
+          <a:xfrm>
+            <a:off x="2834640" y="960120"/>
+            <a:ext cx="5760720" cy="475488"/>
+          </a:xfrm>
+          <a:prstGeom prst="rect">
+            <a:avLst/>
+          </a:prstGeom>
+          <a:noFill/>
+          <a:ln/>
+        </p:spPr>
+        <p:txBody>
+          <a:bodyPr wrap="square" lIns="0" tIns="0" rIns="0" bIns="0" rtlCol="0" anchor="ctr"/>
+          <a:lstStyle/>
+          <a:p>
+            <a:pPr indent="0" marL="0">
+              <a:buNone/>
+            </a:pPr>
+            <a:r>
+              <a:rPr lang="en-US" sz="900" dirty="0">
+                <a:solidFill>
+                  <a:srgbClr val="333333"/>
+                </a:solidFill>
+                <a:latin typeface="Calibri" pitchFamily="34" charset="0"/>
+                <a:ea typeface="Calibri" pitchFamily="34" charset="-122"/>
+                <a:cs typeface="Calibri" pitchFamily="34" charset="-120"/>
+              </a:rPr>
+              <a:t>MLD + types MySQL exacts + contraintes → prêt pour CREATE TABLE</a:t>
+            </a:r>
+            <a:endParaRPr lang="en-US" sz="900" dirty="0"/>
+          </a:p>
+        </p:txBody>
+      </p:sp>
+      <p:sp>
+        <p:nvSpPr>
+          <p:cNvPr id="9" name="Shape 7"/>
+          <p:cNvSpPr/>
+          <p:nvPr/>
+        </p:nvSpPr>
+        <p:spPr>
+          <a:xfrm>
+            <a:off x="457200" y="1463040"/>
+            <a:ext cx="2286000" cy="475488"/>
+          </a:xfrm>
+          <a:prstGeom prst="rect">
+            <a:avLst/>
+          </a:prstGeom>
+          <a:solidFill>
+            <a:srgbClr val="F0F0F0"/>
+          </a:solidFill>
+          <a:ln/>
+        </p:spPr>
+      </p:sp>
+      <p:sp>
+        <p:nvSpPr>
+          <p:cNvPr id="10" name="Text 8"/>
+          <p:cNvSpPr/>
+          <p:nvPr/>
+        </p:nvSpPr>
+        <p:spPr>
+          <a:xfrm>
+            <a:off x="548640" y="1463040"/>
+            <a:ext cx="2103120" cy="475488"/>
+          </a:xfrm>
+          <a:prstGeom prst="rect">
+            <a:avLst/>
+          </a:prstGeom>
+          <a:noFill/>
+          <a:ln/>
+        </p:spPr>
+        <p:txBody>
+          <a:bodyPr wrap="square" lIns="0" tIns="0" rIns="0" bIns="0" rtlCol="0" anchor="ctr"/>
+          <a:lstStyle/>
+          <a:p>
+            <a:pPr indent="0" marL="0">
+              <a:buNone/>
+            </a:pPr>
+            <a:r>
+              <a:rPr lang="en-US" sz="900" b="1" dirty="0">
+                <a:solidFill>
+                  <a:srgbClr val="1B5E20"/>
+                </a:solidFill>
+                <a:latin typeface="Trebuchet MS" pitchFamily="34" charset="0"/>
+                <a:ea typeface="Trebuchet MS" pitchFamily="34" charset="-122"/>
+                <a:cs typeface="Trebuchet MS" pitchFamily="34" charset="-120"/>
+              </a:rPr>
+              <a:t>Types clés</a:t>
+            </a:r>
+            <a:endParaRPr lang="en-US" sz="900" dirty="0"/>
+          </a:p>
+        </p:txBody>
+      </p:sp>
+      <p:sp>
+        <p:nvSpPr>
+          <p:cNvPr id="11" name="Shape 9"/>
+          <p:cNvSpPr/>
+          <p:nvPr/>
+        </p:nvSpPr>
+        <p:spPr>
+          <a:xfrm>
+            <a:off x="2743200" y="1463040"/>
+            <a:ext cx="5943600" cy="475488"/>
+          </a:xfrm>
+          <a:prstGeom prst="rect">
+            <a:avLst/>
+          </a:prstGeom>
+          <a:solidFill>
+            <a:srgbClr val="F0F0F0"/>
+          </a:solidFill>
+          <a:ln/>
+        </p:spPr>
+      </p:sp>
+      <p:sp>
+        <p:nvSpPr>
+          <p:cNvPr id="12" name="Text 10"/>
+          <p:cNvSpPr/>
+          <p:nvPr/>
+        </p:nvSpPr>
+        <p:spPr>
+          <a:xfrm>
+            <a:off x="2834640" y="1463040"/>
+            <a:ext cx="5760720" cy="475488"/>
+          </a:xfrm>
+          <a:prstGeom prst="rect">
+            <a:avLst/>
+          </a:prstGeom>
+          <a:noFill/>
+          <a:ln/>
+        </p:spPr>
+        <p:txBody>
+          <a:bodyPr wrap="square" lIns="0" tIns="0" rIns="0" bIns="0" rtlCol="0" anchor="ctr"/>
+          <a:lstStyle/>
+          <a:p>
+            <a:pPr indent="0" marL="0">
+              <a:buNone/>
+            </a:pPr>
+            <a:r>
+              <a:rPr lang="en-US" sz="900" dirty="0">
+                <a:solidFill>
+                  <a:srgbClr val="333333"/>
+                </a:solidFill>
+                <a:latin typeface="Calibri" pitchFamily="34" charset="0"/>
+                <a:ea typeface="Calibri" pitchFamily="34" charset="-122"/>
+                <a:cs typeface="Calibri" pitchFamily="34" charset="-120"/>
+              </a:rPr>
+              <a:t>DECIMAL pour CHF, VARCHAR pour texte court, ENUM pour listes fermées</a:t>
+            </a:r>
+            <a:endParaRPr lang="en-US" sz="900" dirty="0"/>
+          </a:p>
+        </p:txBody>
+      </p:sp>
+      <p:sp>
+        <p:nvSpPr>
+          <p:cNvPr id="13" name="Shape 11"/>
+          <p:cNvSpPr/>
+          <p:nvPr/>
+        </p:nvSpPr>
+        <p:spPr>
+          <a:xfrm>
+            <a:off x="457200" y="1965960"/>
+            <a:ext cx="2286000" cy="475488"/>
+          </a:xfrm>
+          <a:prstGeom prst="rect">
+            <a:avLst/>
+          </a:prstGeom>
+          <a:solidFill>
+            <a:srgbClr val="E8F5E9"/>
+          </a:solidFill>
+          <a:ln/>
+        </p:spPr>
+      </p:sp>
+      <p:sp>
+        <p:nvSpPr>
+          <p:cNvPr id="14" name="Text 12"/>
+          <p:cNvSpPr/>
+          <p:nvPr/>
+        </p:nvSpPr>
+        <p:spPr>
+          <a:xfrm>
+            <a:off x="548640" y="1965960"/>
+            <a:ext cx="2103120" cy="475488"/>
+          </a:xfrm>
+          <a:prstGeom prst="rect">
+            <a:avLst/>
+          </a:prstGeom>
+          <a:noFill/>
+          <a:ln/>
+        </p:spPr>
+        <p:txBody>
+          <a:bodyPr wrap="square" lIns="0" tIns="0" rIns="0" bIns="0" rtlCol="0" anchor="ctr"/>
+          <a:lstStyle/>
+          <a:p>
+            <a:pPr indent="0" marL="0">
+              <a:buNone/>
+            </a:pPr>
+            <a:r>
+              <a:rPr lang="en-US" sz="900" b="1" dirty="0">
+                <a:solidFill>
+                  <a:srgbClr val="1B5E20"/>
+                </a:solidFill>
+                <a:latin typeface="Trebuchet MS" pitchFamily="34" charset="0"/>
+                <a:ea typeface="Trebuchet MS" pitchFamily="34" charset="-122"/>
+                <a:cs typeface="Trebuchet MS" pitchFamily="34" charset="-120"/>
+              </a:rPr>
+              <a:t>Erreurs fréquentes</a:t>
+            </a:r>
+            <a:endParaRPr lang="en-US" sz="900" dirty="0"/>
+          </a:p>
+        </p:txBody>
+      </p:sp>
+      <p:sp>
+        <p:nvSpPr>
+          <p:cNvPr id="15" name="Shape 13"/>
+          <p:cNvSpPr/>
+          <p:nvPr/>
+        </p:nvSpPr>
+        <p:spPr>
+          <a:xfrm>
+            <a:off x="2743200" y="1965960"/>
+            <a:ext cx="5943600" cy="475488"/>
+          </a:xfrm>
+          <a:prstGeom prst="rect">
+            <a:avLst/>
+          </a:prstGeom>
+          <a:solidFill>
+            <a:srgbClr val="E8F5E9"/>
+          </a:solidFill>
+          <a:ln/>
+        </p:spPr>
+      </p:sp>
+      <p:sp>
+        <p:nvSpPr>
+          <p:cNvPr id="16" name="Text 14"/>
+          <p:cNvSpPr/>
+          <p:nvPr/>
+        </p:nvSpPr>
+        <p:spPr>
+          <a:xfrm>
+            <a:off x="2834640" y="1965960"/>
+            <a:ext cx="5760720" cy="475488"/>
+          </a:xfrm>
+          <a:prstGeom prst="rect">
+            <a:avLst/>
+          </a:prstGeom>
+          <a:noFill/>
+          <a:ln/>
+        </p:spPr>
+        <p:txBody>
+          <a:bodyPr wrap="square" lIns="0" tIns="0" rIns="0" bIns="0" rtlCol="0" anchor="ctr"/>
+          <a:lstStyle/>
+          <a:p>
+            <a:pPr indent="0" marL="0">
+              <a:buNone/>
+            </a:pPr>
+            <a:r>
+              <a:rPr lang="en-US" sz="900" dirty="0">
+                <a:solidFill>
+                  <a:srgbClr val="333333"/>
+                </a:solidFill>
+                <a:latin typeface="Calibri" pitchFamily="34" charset="0"/>
+                <a:ea typeface="Calibri" pitchFamily="34" charset="-122"/>
+                <a:cs typeface="Calibri" pitchFamily="34" charset="-120"/>
+              </a:rPr>
+              <a:t>FLOAT→DECIMAL, INT pour tel→VARCHAR, TEXT pour email→VARCHAR</a:t>
+            </a:r>
+            <a:endParaRPr lang="en-US" sz="900" dirty="0"/>
+          </a:p>
+        </p:txBody>
+      </p:sp>
+      <p:sp>
+        <p:nvSpPr>
+          <p:cNvPr id="17" name="Shape 15"/>
+          <p:cNvSpPr/>
+          <p:nvPr/>
+        </p:nvSpPr>
+        <p:spPr>
+          <a:xfrm>
+            <a:off x="457200" y="2468880"/>
+            <a:ext cx="2286000" cy="475488"/>
+          </a:xfrm>
+          <a:prstGeom prst="rect">
+            <a:avLst/>
+          </a:prstGeom>
+          <a:solidFill>
+            <a:srgbClr val="F0F0F0"/>
+          </a:solidFill>
+          <a:ln/>
+        </p:spPr>
+      </p:sp>
+      <p:sp>
+        <p:nvSpPr>
+          <p:cNvPr id="18" name="Text 16"/>
+          <p:cNvSpPr/>
+          <p:nvPr/>
+        </p:nvSpPr>
+        <p:spPr>
+          <a:xfrm>
+            <a:off x="548640" y="2468880"/>
+            <a:ext cx="2103120" cy="475488"/>
+          </a:xfrm>
+          <a:prstGeom prst="rect">
+            <a:avLst/>
+          </a:prstGeom>
+          <a:noFill/>
+          <a:ln/>
+        </p:spPr>
+        <p:txBody>
+          <a:bodyPr wrap="square" lIns="0" tIns="0" rIns="0" bIns="0" rtlCol="0" anchor="ctr"/>
+          <a:lstStyle/>
+          <a:p>
+            <a:pPr indent="0" marL="0">
+              <a:buNone/>
+            </a:pPr>
+            <a:r>
+              <a:rPr lang="en-US" sz="900" b="1" dirty="0">
+                <a:solidFill>
+                  <a:srgbClr val="1B5E20"/>
+                </a:solidFill>
+                <a:latin typeface="Trebuchet MS" pitchFamily="34" charset="0"/>
+                <a:ea typeface="Trebuchet MS" pitchFamily="34" charset="-122"/>
+                <a:cs typeface="Trebuchet MS" pitchFamily="34" charset="-120"/>
+              </a:rPr>
+              <a:t>Contraintes</a:t>
+            </a:r>
+            <a:endParaRPr lang="en-US" sz="900" dirty="0"/>
+          </a:p>
+        </p:txBody>
+      </p:sp>
+      <p:sp>
+        <p:nvSpPr>
+          <p:cNvPr id="19" name="Shape 17"/>
+          <p:cNvSpPr/>
+          <p:nvPr/>
+        </p:nvSpPr>
+        <p:spPr>
+          <a:xfrm>
+            <a:off x="2743200" y="2468880"/>
+            <a:ext cx="5943600" cy="475488"/>
+          </a:xfrm>
+          <a:prstGeom prst="rect">
+            <a:avLst/>
+          </a:prstGeom>
+          <a:solidFill>
+            <a:srgbClr val="F0F0F0"/>
+          </a:solidFill>
+          <a:ln/>
+        </p:spPr>
+      </p:sp>
+      <p:sp>
+        <p:nvSpPr>
+          <p:cNvPr id="20" name="Text 18"/>
+          <p:cNvSpPr/>
+          <p:nvPr/>
+        </p:nvSpPr>
+        <p:spPr>
+          <a:xfrm>
+            <a:off x="2834640" y="2468880"/>
+            <a:ext cx="5760720" cy="475488"/>
+          </a:xfrm>
+          <a:prstGeom prst="rect">
+            <a:avLst/>
+          </a:prstGeom>
+          <a:noFill/>
+          <a:ln/>
+        </p:spPr>
+        <p:txBody>
+          <a:bodyPr wrap="square" lIns="0" tIns="0" rIns="0" bIns="0" rtlCol="0" anchor="ctr"/>
+          <a:lstStyle/>
+          <a:p>
+            <a:pPr indent="0" marL="0">
+              <a:buNone/>
+            </a:pPr>
+            <a:r>
+              <a:rPr lang="en-US" sz="900" dirty="0">
+                <a:solidFill>
+                  <a:srgbClr val="333333"/>
+                </a:solidFill>
+                <a:latin typeface="Calibri" pitchFamily="34" charset="0"/>
+                <a:ea typeface="Calibri" pitchFamily="34" charset="-122"/>
+                <a:cs typeface="Calibri" pitchFamily="34" charset="-120"/>
+              </a:rPr>
+              <a:t>NOT NULL, UNIQUE, CHECK, DEFAULT, AUTO_INCREMENT, FK</a:t>
+            </a:r>
+            <a:endParaRPr lang="en-US" sz="900" dirty="0"/>
+          </a:p>
+        </p:txBody>
+      </p:sp>
+      <p:sp>
+        <p:nvSpPr>
+          <p:cNvPr id="21" name="Shape 19"/>
+          <p:cNvSpPr/>
+          <p:nvPr/>
+        </p:nvSpPr>
+        <p:spPr>
+          <a:xfrm>
+            <a:off x="457200" y="2971800"/>
+            <a:ext cx="2286000" cy="475488"/>
+          </a:xfrm>
+          <a:prstGeom prst="rect">
+            <a:avLst/>
+          </a:prstGeom>
+          <a:solidFill>
+            <a:srgbClr val="E8F5E9"/>
+          </a:solidFill>
+          <a:ln/>
+        </p:spPr>
+      </p:sp>
+      <p:sp>
+        <p:nvSpPr>
+          <p:cNvPr id="22" name="Text 20"/>
+          <p:cNvSpPr/>
+          <p:nvPr/>
+        </p:nvSpPr>
+        <p:spPr>
+          <a:xfrm>
+            <a:off x="548640" y="2971800"/>
+            <a:ext cx="2103120" cy="475488"/>
+          </a:xfrm>
+          <a:prstGeom prst="rect">
+            <a:avLst/>
+          </a:prstGeom>
+          <a:noFill/>
+          <a:ln/>
+        </p:spPr>
+        <p:txBody>
+          <a:bodyPr wrap="square" lIns="0" tIns="0" rIns="0" bIns="0" rtlCol="0" anchor="ctr"/>
+          <a:lstStyle/>
+          <a:p>
+            <a:pPr indent="0" marL="0">
+              <a:buNone/>
+            </a:pPr>
+            <a:r>
+              <a:rPr lang="en-US" sz="900" b="1" dirty="0">
+                <a:solidFill>
+                  <a:srgbClr val="1B5E20"/>
+                </a:solidFill>
+                <a:latin typeface="Trebuchet MS" pitchFamily="34" charset="0"/>
+                <a:ea typeface="Trebuchet MS" pitchFamily="34" charset="-122"/>
+                <a:cs typeface="Trebuchet MS" pitchFamily="34" charset="-120"/>
+              </a:rPr>
+              <a:t>Interfaces</a:t>
+            </a:r>
+            <a:endParaRPr lang="en-US" sz="900" dirty="0"/>
+          </a:p>
+        </p:txBody>
+      </p:sp>
+      <p:sp>
+        <p:nvSpPr>
+          <p:cNvPr id="23" name="Shape 21"/>
+          <p:cNvSpPr/>
+          <p:nvPr/>
+        </p:nvSpPr>
+        <p:spPr>
+          <a:xfrm>
+            <a:off x="2743200" y="2971800"/>
+            <a:ext cx="5943600" cy="475488"/>
+          </a:xfrm>
+          <a:prstGeom prst="rect">
+            <a:avLst/>
+          </a:prstGeom>
+          <a:solidFill>
+            <a:srgbClr val="E8F5E9"/>
+          </a:solidFill>
+          <a:ln/>
+        </p:spPr>
+      </p:sp>
+      <p:sp>
+        <p:nvSpPr>
+          <p:cNvPr id="24" name="Text 22"/>
+          <p:cNvSpPr/>
+          <p:nvPr/>
+        </p:nvSpPr>
+        <p:spPr>
+          <a:xfrm>
+            <a:off x="2834640" y="2971800"/>
+            <a:ext cx="5760720" cy="475488"/>
+          </a:xfrm>
+          <a:prstGeom prst="rect">
+            <a:avLst/>
+          </a:prstGeom>
+          <a:noFill/>
+          <a:ln/>
+        </p:spPr>
+        <p:txBody>
+          <a:bodyPr wrap="square" lIns="0" tIns="0" rIns="0" bIns="0" rtlCol="0" anchor="ctr"/>
+          <a:lstStyle/>
+          <a:p>
+            <a:pPr indent="0" marL="0">
+              <a:buNone/>
+            </a:pPr>
+            <a:r>
+              <a:rPr lang="en-US" sz="900" dirty="0">
+                <a:solidFill>
+                  <a:srgbClr val="333333"/>
+                </a:solidFill>
+                <a:latin typeface="Calibri" pitchFamily="34" charset="0"/>
+                <a:ea typeface="Calibri" pitchFamily="34" charset="-122"/>
+                <a:cs typeface="Calibri" pitchFamily="34" charset="-120"/>
+              </a:rPr>
+              <a:t>Maquettes avant code, dropdowns pour FK, validations formulaire</a:t>
+            </a:r>
+            <a:endParaRPr lang="en-US" sz="900" dirty="0"/>
+          </a:p>
+        </p:txBody>
+      </p:sp>
+      <p:sp>
+        <p:nvSpPr>
+          <p:cNvPr id="25" name="Shape 23"/>
+          <p:cNvSpPr/>
+          <p:nvPr/>
+        </p:nvSpPr>
+        <p:spPr>
+          <a:xfrm>
+            <a:off x="457200" y="3474720"/>
+            <a:ext cx="2286000" cy="475488"/>
+          </a:xfrm>
+          <a:prstGeom prst="rect">
+            <a:avLst/>
+          </a:prstGeom>
+          <a:solidFill>
+            <a:srgbClr val="F0F0F0"/>
+          </a:solidFill>
+          <a:ln/>
+        </p:spPr>
+      </p:sp>
+      <p:sp>
+        <p:nvSpPr>
+          <p:cNvPr id="26" name="Text 24"/>
+          <p:cNvSpPr/>
+          <p:nvPr/>
+        </p:nvSpPr>
+        <p:spPr>
+          <a:xfrm>
+            <a:off x="548640" y="3474720"/>
+            <a:ext cx="2103120" cy="475488"/>
+          </a:xfrm>
+          <a:prstGeom prst="rect">
+            <a:avLst/>
+          </a:prstGeom>
+          <a:noFill/>
+          <a:ln/>
+        </p:spPr>
+        <p:txBody>
+          <a:bodyPr wrap="square" lIns="0" tIns="0" rIns="0" bIns="0" rtlCol="0" anchor="ctr"/>
+          <a:lstStyle/>
+          <a:p>
+            <a:pPr indent="0" marL="0">
+              <a:buNone/>
+            </a:pPr>
+            <a:r>
+              <a:rPr lang="en-US" sz="900" b="1" dirty="0">
+                <a:solidFill>
+                  <a:srgbClr val="1B5E20"/>
+                </a:solidFill>
+                <a:latin typeface="Trebuchet MS" pitchFamily="34" charset="0"/>
+                <a:ea typeface="Trebuchet MS" pitchFamily="34" charset="-122"/>
+                <a:cs typeface="Trebuchet MS" pitchFamily="34" charset="-120"/>
+              </a:rPr>
+              <a:t>Sécurité</a:t>
+            </a:r>
+            <a:endParaRPr lang="en-US" sz="900" dirty="0"/>
+          </a:p>
+        </p:txBody>
+      </p:sp>
+      <p:sp>
+        <p:nvSpPr>
+          <p:cNvPr id="27" name="Shape 25"/>
+          <p:cNvSpPr/>
+          <p:nvPr/>
+        </p:nvSpPr>
+        <p:spPr>
+          <a:xfrm>
+            <a:off x="2743200" y="3474720"/>
+            <a:ext cx="5943600" cy="475488"/>
+          </a:xfrm>
+          <a:prstGeom prst="rect">
+            <a:avLst/>
+          </a:prstGeom>
+          <a:solidFill>
+            <a:srgbClr val="F0F0F0"/>
+          </a:solidFill>
+          <a:ln/>
+        </p:spPr>
+      </p:sp>
+      <p:sp>
+        <p:nvSpPr>
+          <p:cNvPr id="28" name="Text 26"/>
+          <p:cNvSpPr/>
+          <p:nvPr/>
+        </p:nvSpPr>
+        <p:spPr>
+          <a:xfrm>
+            <a:off x="2834640" y="3474720"/>
+            <a:ext cx="5760720" cy="475488"/>
+          </a:xfrm>
+          <a:prstGeom prst="rect">
+            <a:avLst/>
+          </a:prstGeom>
+          <a:noFill/>
+          <a:ln/>
+        </p:spPr>
+        <p:txBody>
+          <a:bodyPr wrap="square" lIns="0" tIns="0" rIns="0" bIns="0" rtlCol="0" anchor="ctr"/>
+          <a:lstStyle/>
+          <a:p>
+            <a:pPr indent="0" marL="0">
+              <a:buNone/>
+            </a:pPr>
+            <a:r>
+              <a:rPr lang="en-US" sz="900" dirty="0">
+                <a:solidFill>
+                  <a:srgbClr val="333333"/>
+                </a:solidFill>
+                <a:latin typeface="Calibri" pitchFamily="34" charset="0"/>
+                <a:ea typeface="Calibri" pitchFamily="34" charset="-122"/>
+                <a:cs typeface="Calibri" pitchFamily="34" charset="-120"/>
+              </a:rPr>
+              <a:t>Matrice de droits, moindre privilège, chiffrement RGPD</a:t>
+            </a:r>
+            <a:endParaRPr lang="en-US" sz="900" dirty="0"/>
+          </a:p>
+        </p:txBody>
+      </p:sp>
+      <p:sp>
+        <p:nvSpPr>
+          <p:cNvPr id="29" name="Shape 27"/>
+          <p:cNvSpPr/>
+          <p:nvPr/>
+        </p:nvSpPr>
+        <p:spPr>
+          <a:xfrm>
+            <a:off x="457200" y="3977640"/>
+            <a:ext cx="2286000" cy="475488"/>
+          </a:xfrm>
+          <a:prstGeom prst="rect">
+            <a:avLst/>
+          </a:prstGeom>
+          <a:solidFill>
+            <a:srgbClr val="E8F5E9"/>
+          </a:solidFill>
+          <a:ln/>
+        </p:spPr>
+      </p:sp>
+      <p:sp>
+        <p:nvSpPr>
+          <p:cNvPr id="30" name="Text 28"/>
+          <p:cNvSpPr/>
+          <p:nvPr/>
+        </p:nvSpPr>
+        <p:spPr>
+          <a:xfrm>
+            <a:off x="548640" y="3977640"/>
+            <a:ext cx="2103120" cy="475488"/>
+          </a:xfrm>
+          <a:prstGeom prst="rect">
+            <a:avLst/>
+          </a:prstGeom>
+          <a:noFill/>
+          <a:ln/>
+        </p:spPr>
+        <p:txBody>
+          <a:bodyPr wrap="square" lIns="0" tIns="0" rIns="0" bIns="0" rtlCol="0" anchor="ctr"/>
+          <a:lstStyle/>
+          <a:p>
+            <a:pPr indent="0" marL="0">
+              <a:buNone/>
+            </a:pPr>
+            <a:r>
+              <a:rPr lang="en-US" sz="900" b="1" dirty="0">
+                <a:solidFill>
+                  <a:srgbClr val="1B5E20"/>
+                </a:solidFill>
+                <a:latin typeface="Trebuchet MS" pitchFamily="34" charset="0"/>
+                <a:ea typeface="Trebuchet MS" pitchFamily="34" charset="-122"/>
+                <a:cs typeface="Trebuchet MS" pitchFamily="34" charset="-120"/>
+              </a:rPr>
+              <a:t>D1</a:t>
+            </a:r>
+            <a:endParaRPr lang="en-US" sz="900" dirty="0"/>
+          </a:p>
+        </p:txBody>
+      </p:sp>
+      <p:sp>
+        <p:nvSpPr>
+          <p:cNvPr id="31" name="Shape 29"/>
+          <p:cNvSpPr/>
+          <p:nvPr/>
+        </p:nvSpPr>
+        <p:spPr>
+          <a:xfrm>
+            <a:off x="2743200" y="3977640"/>
+            <a:ext cx="5943600" cy="475488"/>
+          </a:xfrm>
+          <a:prstGeom prst="rect">
+            <a:avLst/>
+          </a:prstGeom>
+          <a:solidFill>
+            <a:srgbClr val="E8F5E9"/>
+          </a:solidFill>
+          <a:ln/>
+        </p:spPr>
+      </p:sp>
+      <p:sp>
+        <p:nvSpPr>
+          <p:cNvPr id="32" name="Text 30"/>
+          <p:cNvSpPr/>
+          <p:nvPr/>
+        </p:nvSpPr>
+        <p:spPr>
+          <a:xfrm>
+            <a:off x="2834640" y="3977640"/>
+            <a:ext cx="5760720" cy="475488"/>
+          </a:xfrm>
+          <a:prstGeom prst="rect">
+            <a:avLst/>
+          </a:prstGeom>
+          <a:noFill/>
+          <a:ln/>
+        </p:spPr>
+        <p:txBody>
+          <a:bodyPr wrap="square" lIns="0" tIns="0" rIns="0" bIns="0" rtlCol="0" anchor="ctr"/>
+          <a:lstStyle/>
+          <a:p>
+            <a:pPr indent="0" marL="0">
+              <a:buNone/>
+            </a:pPr>
+            <a:r>
+              <a:rPr lang="en-US" sz="900" dirty="0">
+                <a:solidFill>
+                  <a:srgbClr val="333333"/>
+                </a:solidFill>
+                <a:latin typeface="Calibri" pitchFamily="34" charset="0"/>
+                <a:ea typeface="Calibri" pitchFamily="34" charset="-122"/>
+                <a:cs typeface="Calibri" pitchFamily="34" charset="-120"/>
+              </a:rPr>
+              <a:t>Évaluer : forces + faiblesses + améliorations du design</a:t>
+            </a:r>
+            <a:endParaRPr lang="en-US" sz="900" dirty="0"/>
           </a:p>
         </p:txBody>
       </p:sp>
@@ -1689,7 +3863,7 @@
         <p:spPr>
           <a:xfrm>
             <a:off x="0" y="0"/>
-            <a:ext cx="9144000" cy="73152"/>
+            <a:ext cx="9144000" cy="54864"/>
           </a:xfrm>
           <a:prstGeom prst="rect">
             <a:avLst/>
@@ -1708,8 +3882,8 @@
         </p:nvSpPr>
         <p:spPr>
           <a:xfrm>
-            <a:off x="457200" y="228600"/>
-            <a:ext cx="8229600" cy="640080"/>
+            <a:off x="457200" y="182880"/>
+            <a:ext cx="8229600" cy="594360"/>
           </a:xfrm>
           <a:prstGeom prst="rect">
             <a:avLst/>
@@ -1725,7 +3899,7 @@
               <a:buNone/>
             </a:pPr>
             <a:r>
-              <a:rPr lang="en-US" sz="2600" b="1" dirty="0">
+              <a:rPr lang="en-US" sz="2400" b="1" dirty="0">
                 <a:solidFill>
                   <a:srgbClr val="1B5E20"/>
                 </a:solidFill>
@@ -1735,7 +3909,7 @@
               </a:rPr>
               <a:t>Du MLD au MPD</a:t>
             </a:r>
-            <a:endParaRPr lang="en-US" sz="2600" dirty="0"/>
+            <a:endParaRPr lang="en-US" sz="2400" dirty="0"/>
           </a:p>
         </p:txBody>
       </p:sp>
@@ -1747,8 +3921,8 @@
         </p:nvSpPr>
         <p:spPr>
           <a:xfrm>
-            <a:off x="457200" y="1051560"/>
-            <a:ext cx="8229600" cy="640080"/>
+            <a:off x="457200" y="914400"/>
+            <a:ext cx="8229600" cy="521208"/>
           </a:xfrm>
           <a:prstGeom prst="rect">
             <a:avLst/>
@@ -1774,8 +3948,8 @@
         </p:nvSpPr>
         <p:spPr>
           <a:xfrm>
-            <a:off x="457200" y="1051560"/>
-            <a:ext cx="54864" cy="640080"/>
+            <a:off x="457200" y="914400"/>
+            <a:ext cx="45720" cy="521208"/>
           </a:xfrm>
           <a:prstGeom prst="rect">
             <a:avLst/>
@@ -1794,8 +3968,8 @@
         </p:nvSpPr>
         <p:spPr>
           <a:xfrm>
-            <a:off x="731520" y="1051560"/>
-            <a:ext cx="7772400" cy="640080"/>
+            <a:off x="685800" y="914400"/>
+            <a:ext cx="7818120" cy="521208"/>
           </a:xfrm>
           <a:prstGeom prst="rect">
             <a:avLst/>
@@ -1811,7 +3985,7 @@
               <a:buNone/>
             </a:pPr>
             <a:r>
-              <a:rPr lang="en-US" sz="1300" dirty="0">
+              <a:rPr lang="en-US" sz="1200" dirty="0">
                 <a:solidFill>
                   <a:srgbClr val="1A1A2E"/>
                 </a:solidFill>
@@ -1819,9 +3993,9 @@
                 <a:ea typeface="Calibri" pitchFamily="34" charset="-122"/>
                 <a:cs typeface="Calibri" pitchFamily="34" charset="-120"/>
               </a:rPr>
-              <a:t>MLD = logique (indépendant du SGBD)</a:t>
-            </a:r>
-            <a:endParaRPr lang="en-US" sz="1300" dirty="0"/>
+              <a:t>Le MLD est LOGIQUE : indépendant du SGBD</a:t>
+            </a:r>
+            <a:endParaRPr lang="en-US" sz="1200" dirty="0"/>
           </a:p>
         </p:txBody>
       </p:sp>
@@ -1833,8 +4007,8 @@
         </p:nvSpPr>
         <p:spPr>
           <a:xfrm>
-            <a:off x="457200" y="1783080"/>
-            <a:ext cx="8229600" cy="640080"/>
+            <a:off x="457200" y="1463040"/>
+            <a:ext cx="8229600" cy="521208"/>
           </a:xfrm>
           <a:prstGeom prst="rect">
             <a:avLst/>
@@ -1860,8 +4034,8 @@
         </p:nvSpPr>
         <p:spPr>
           <a:xfrm>
-            <a:off x="457200" y="1783080"/>
-            <a:ext cx="54864" cy="640080"/>
+            <a:off x="457200" y="1463040"/>
+            <a:ext cx="45720" cy="521208"/>
           </a:xfrm>
           <a:prstGeom prst="rect">
             <a:avLst/>
@@ -1880,8 +4054,8 @@
         </p:nvSpPr>
         <p:spPr>
           <a:xfrm>
-            <a:off x="731520" y="1783080"/>
-            <a:ext cx="7772400" cy="640080"/>
+            <a:off x="685800" y="1463040"/>
+            <a:ext cx="7818120" cy="521208"/>
           </a:xfrm>
           <a:prstGeom prst="rect">
             <a:avLst/>
@@ -1897,7 +4071,7 @@
               <a:buNone/>
             </a:pPr>
             <a:r>
-              <a:rPr lang="en-US" sz="1300" dirty="0">
+              <a:rPr lang="en-US" sz="1200" dirty="0">
                 <a:solidFill>
                   <a:srgbClr val="1A1A2E"/>
                 </a:solidFill>
@@ -1905,9 +4079,9 @@
                 <a:ea typeface="Calibri" pitchFamily="34" charset="-122"/>
                 <a:cs typeface="Calibri" pitchFamily="34" charset="-120"/>
               </a:rPr>
-              <a:t>MPD = physique (types MySQL précis + contraintes)</a:t>
-            </a:r>
-            <a:endParaRPr lang="en-US" sz="1300" dirty="0"/>
+              <a:t>Le MPD est PHYSIQUE : types MySQL précis + contraintes exactes</a:t>
+            </a:r>
+            <a:endParaRPr lang="en-US" sz="1200" dirty="0"/>
           </a:p>
         </p:txBody>
       </p:sp>
@@ -1919,8 +4093,8 @@
         </p:nvSpPr>
         <p:spPr>
           <a:xfrm>
-            <a:off x="457200" y="2514600"/>
-            <a:ext cx="8229600" cy="640080"/>
+            <a:off x="457200" y="2011680"/>
+            <a:ext cx="8229600" cy="521208"/>
           </a:xfrm>
           <a:prstGeom prst="rect">
             <a:avLst/>
@@ -1946,8 +4120,8 @@
         </p:nvSpPr>
         <p:spPr>
           <a:xfrm>
-            <a:off x="457200" y="2514600"/>
-            <a:ext cx="54864" cy="640080"/>
+            <a:off x="457200" y="2011680"/>
+            <a:ext cx="45720" cy="521208"/>
           </a:xfrm>
           <a:prstGeom prst="rect">
             <a:avLst/>
@@ -1966,8 +4140,8 @@
         </p:nvSpPr>
         <p:spPr>
           <a:xfrm>
-            <a:off x="731520" y="2514600"/>
-            <a:ext cx="7772400" cy="640080"/>
+            <a:off x="685800" y="2011680"/>
+            <a:ext cx="7818120" cy="521208"/>
           </a:xfrm>
           <a:prstGeom prst="rect">
             <a:avLst/>
@@ -1983,7 +4157,7 @@
               <a:buNone/>
             </a:pPr>
             <a:r>
-              <a:rPr lang="en-US" sz="1300" dirty="0">
+              <a:rPr lang="en-US" sz="1200" dirty="0">
                 <a:solidFill>
                   <a:srgbClr val="1A1A2E"/>
                 </a:solidFill>
@@ -1991,9 +4165,9 @@
                 <a:ea typeface="Calibri" pitchFamily="34" charset="-122"/>
                 <a:cs typeface="Calibri" pitchFamily="34" charset="-120"/>
               </a:rPr>
-              <a:t>Choisir le bon type : INT, VARCHAR(n), DATE, DECIMAL(p,s), ENUM, BOOLEAN, TEXT</a:t>
-            </a:r>
-            <a:endParaRPr lang="en-US" sz="1300" dirty="0"/>
+              <a:t>Chaque attribut du MLD → un type MySQL spécifique</a:t>
+            </a:r>
+            <a:endParaRPr lang="en-US" sz="1200" dirty="0"/>
           </a:p>
         </p:txBody>
       </p:sp>
@@ -2005,8 +4179,8 @@
         </p:nvSpPr>
         <p:spPr>
           <a:xfrm>
-            <a:off x="457200" y="3246120"/>
-            <a:ext cx="8229600" cy="640080"/>
+            <a:off x="457200" y="2560320"/>
+            <a:ext cx="8229600" cy="521208"/>
           </a:xfrm>
           <a:prstGeom prst="rect">
             <a:avLst/>
@@ -2032,8 +4206,8 @@
         </p:nvSpPr>
         <p:spPr>
           <a:xfrm>
-            <a:off x="457200" y="3246120"/>
-            <a:ext cx="54864" cy="640080"/>
+            <a:off x="457200" y="2560320"/>
+            <a:ext cx="45720" cy="521208"/>
           </a:xfrm>
           <a:prstGeom prst="rect">
             <a:avLst/>
@@ -2052,8 +4226,8 @@
         </p:nvSpPr>
         <p:spPr>
           <a:xfrm>
-            <a:off x="731520" y="3246120"/>
-            <a:ext cx="7772400" cy="640080"/>
+            <a:off x="685800" y="2560320"/>
+            <a:ext cx="7818120" cy="521208"/>
           </a:xfrm>
           <a:prstGeom prst="rect">
             <a:avLst/>
@@ -2069,7 +4243,7 @@
               <a:buNone/>
             </a:pPr>
             <a:r>
-              <a:rPr lang="en-US" sz="1300" dirty="0">
+              <a:rPr lang="en-US" sz="1200" dirty="0">
                 <a:solidFill>
                   <a:srgbClr val="1A1A2E"/>
                 </a:solidFill>
@@ -2077,9 +4251,9 @@
                 <a:ea typeface="Calibri" pitchFamily="34" charset="-122"/>
                 <a:cs typeface="Calibri" pitchFamily="34" charset="-120"/>
               </a:rPr>
-              <a:t>Ajouter les contraintes : NOT NULL, UNIQUE, CHECK, DEFAULT, AUTO_INCREMENT</a:t>
-            </a:r>
-            <a:endParaRPr lang="en-US" sz="1300" dirty="0"/>
+              <a:t>Chaque règle de gestion → une contrainte SQL</a:t>
+            </a:r>
+            <a:endParaRPr lang="en-US" sz="1200" dirty="0"/>
           </a:p>
         </p:txBody>
       </p:sp>
@@ -2091,8 +4265,8 @@
         </p:nvSpPr>
         <p:spPr>
           <a:xfrm>
-            <a:off x="457200" y="3977640"/>
-            <a:ext cx="8229600" cy="640080"/>
+            <a:off x="457200" y="3108960"/>
+            <a:ext cx="8229600" cy="521208"/>
           </a:xfrm>
           <a:prstGeom prst="rect">
             <a:avLst/>
@@ -2118,8 +4292,8 @@
         </p:nvSpPr>
         <p:spPr>
           <a:xfrm>
-            <a:off x="457200" y="3977640"/>
-            <a:ext cx="54864" cy="640080"/>
+            <a:off x="457200" y="3108960"/>
+            <a:ext cx="45720" cy="521208"/>
           </a:xfrm>
           <a:prstGeom prst="rect">
             <a:avLst/>
@@ -2138,8 +4312,8 @@
         </p:nvSpPr>
         <p:spPr>
           <a:xfrm>
-            <a:off x="731520" y="3977640"/>
-            <a:ext cx="7772400" cy="640080"/>
+            <a:off x="685800" y="3108960"/>
+            <a:ext cx="7818120" cy="521208"/>
           </a:xfrm>
           <a:prstGeom prst="rect">
             <a:avLst/>
@@ -2155,7 +4329,7 @@
               <a:buNone/>
             </a:pPr>
             <a:r>
-              <a:rPr lang="en-US" sz="1300" dirty="0">
+              <a:rPr lang="en-US" sz="1200" dirty="0">
                 <a:solidFill>
                   <a:srgbClr val="1A1A2E"/>
                 </a:solidFill>
@@ -2163,22 +4337,69 @@
                 <a:ea typeface="Calibri" pitchFamily="34" charset="-122"/>
                 <a:cs typeface="Calibri" pitchFamily="34" charset="-120"/>
               </a:rPr>
-              <a:t>Ajouter les FK avec comportement : CASCADE, RESTRICT, SET NULL</a:t>
-            </a:r>
-            <a:endParaRPr lang="en-US" sz="1300" dirty="0"/>
-          </a:p>
-        </p:txBody>
-      </p:sp>
-      <p:sp>
-        <p:nvSpPr>
-          <p:cNvPr id="19" name="Text 17"/>
-          <p:cNvSpPr/>
-          <p:nvPr/>
-        </p:nvSpPr>
-        <p:spPr>
-          <a:xfrm>
-            <a:off x="8229600" y="4754880"/>
-            <a:ext cx="731520" cy="274320"/>
+              <a:t>Le MPD est le dernier schéma AVANT le code SQL</a:t>
+            </a:r>
+            <a:endParaRPr lang="en-US" sz="1200" dirty="0"/>
+          </a:p>
+        </p:txBody>
+      </p:sp>
+      <p:sp>
+        <p:nvSpPr>
+          <p:cNvPr id="19" name="Shape 17"/>
+          <p:cNvSpPr/>
+          <p:nvPr/>
+        </p:nvSpPr>
+        <p:spPr>
+          <a:xfrm>
+            <a:off x="457200" y="3657600"/>
+            <a:ext cx="8229600" cy="521208"/>
+          </a:xfrm>
+          <a:prstGeom prst="rect">
+            <a:avLst/>
+          </a:prstGeom>
+          <a:solidFill>
+            <a:srgbClr val="E8F5E9"/>
+          </a:solidFill>
+          <a:ln/>
+          <a:effectLst>
+            <a:outerShdw sx="100000" sy="100000" kx="0" ky="0" algn="bl" rotWithShape="0" blurRad="50800" dist="25400" dir="8100000">
+              <a:srgbClr val="000000">
+                <a:alpha val="12000"/>
+              </a:srgbClr>
+            </a:outerShdw>
+          </a:effectLst>
+        </p:spPr>
+      </p:sp>
+      <p:sp>
+        <p:nvSpPr>
+          <p:cNvPr id="20" name="Shape 18"/>
+          <p:cNvSpPr/>
+          <p:nvPr/>
+        </p:nvSpPr>
+        <p:spPr>
+          <a:xfrm>
+            <a:off x="457200" y="3657600"/>
+            <a:ext cx="45720" cy="521208"/>
+          </a:xfrm>
+          <a:prstGeom prst="rect">
+            <a:avLst/>
+          </a:prstGeom>
+          <a:solidFill>
+            <a:srgbClr val="2E7D32"/>
+          </a:solidFill>
+          <a:ln/>
+        </p:spPr>
+      </p:sp>
+      <p:sp>
+        <p:nvSpPr>
+          <p:cNvPr id="21" name="Text 19"/>
+          <p:cNvSpPr/>
+          <p:nvPr/>
+        </p:nvSpPr>
+        <p:spPr>
+          <a:xfrm>
+            <a:off x="685800" y="3657600"/>
+            <a:ext cx="7818120" cy="521208"/>
           </a:xfrm>
           <a:prstGeom prst="rect">
             <a:avLst/>
@@ -2190,21 +4411,21 @@
           <a:bodyPr wrap="square" lIns="0" tIns="0" rIns="0" bIns="0" rtlCol="0" anchor="ctr"/>
           <a:lstStyle/>
           <a:p>
-            <a:pPr algn="r" indent="0" marL="0">
+            <a:pPr indent="0" marL="0">
               <a:buNone/>
             </a:pPr>
             <a:r>
-              <a:rPr lang="en-US" sz="900" dirty="0">
+              <a:rPr lang="en-US" sz="1200" dirty="0">
                 <a:solidFill>
-                  <a:srgbClr val="AAAAAA"/>
+                  <a:srgbClr val="1A1A2E"/>
                 </a:solidFill>
                 <a:latin typeface="Calibri" pitchFamily="34" charset="0"/>
                 <a:ea typeface="Calibri" pitchFamily="34" charset="-122"/>
                 <a:cs typeface="Calibri" pitchFamily="34" charset="-120"/>
               </a:rPr>
-              <a:t>2/6</a:t>
-            </a:r>
-            <a:endParaRPr lang="en-US" sz="900" dirty="0"/>
+              <a:t>C'est le 'plan de construction' exact de CREATE TABLE</a:t>
+            </a:r>
+            <a:endParaRPr lang="en-US" sz="1200" dirty="0"/>
           </a:p>
         </p:txBody>
       </p:sp>
@@ -2249,7 +4470,7 @@
         <p:spPr>
           <a:xfrm>
             <a:off x="0" y="0"/>
-            <a:ext cx="9144000" cy="73152"/>
+            <a:ext cx="9144000" cy="54864"/>
           </a:xfrm>
           <a:prstGeom prst="rect">
             <a:avLst/>
@@ -2268,8 +4489,8 @@
         </p:nvSpPr>
         <p:spPr>
           <a:xfrm>
-            <a:off x="457200" y="228600"/>
-            <a:ext cx="8229600" cy="640080"/>
+            <a:off x="457200" y="182880"/>
+            <a:ext cx="8229600" cy="594360"/>
           </a:xfrm>
           <a:prstGeom prst="rect">
             <a:avLst/>
@@ -2285,7 +4506,7 @@
               <a:buNone/>
             </a:pPr>
             <a:r>
-              <a:rPr lang="en-US" sz="2600" b="1" dirty="0">
+              <a:rPr lang="en-US" sz="2400" b="1" dirty="0">
                 <a:solidFill>
                   <a:srgbClr val="1B5E20"/>
                 </a:solidFill>
@@ -2293,9 +4514,9 @@
                 <a:ea typeface="Trebuchet MS" pitchFamily="34" charset="-122"/>
                 <a:cs typeface="Trebuchet MS" pitchFamily="34" charset="-120"/>
               </a:rPr>
-              <a:t>Types MySQL — aide-mémoire</a:t>
-            </a:r>
-            <a:endParaRPr lang="en-US" sz="2600" dirty="0"/>
+              <a:t>Types MySQL — choix pour SwissSound</a:t>
+            </a:r>
+            <a:endParaRPr lang="en-US" sz="2400" dirty="0"/>
           </a:p>
         </p:txBody>
       </p:sp>
@@ -2307,8 +4528,8 @@
         </p:nvSpPr>
         <p:spPr>
           <a:xfrm>
-            <a:off x="457200" y="1051560"/>
-            <a:ext cx="8229600" cy="496389"/>
+            <a:off x="457200" y="914400"/>
+            <a:ext cx="8229600" cy="464058"/>
           </a:xfrm>
           <a:prstGeom prst="rect">
             <a:avLst/>
@@ -2334,8 +4555,8 @@
         </p:nvSpPr>
         <p:spPr>
           <a:xfrm>
-            <a:off x="457200" y="1051560"/>
-            <a:ext cx="54864" cy="496389"/>
+            <a:off x="457200" y="914400"/>
+            <a:ext cx="45720" cy="464058"/>
           </a:xfrm>
           <a:prstGeom prst="rect">
             <a:avLst/>
@@ -2354,8 +4575,8 @@
         </p:nvSpPr>
         <p:spPr>
           <a:xfrm>
-            <a:off x="731520" y="1051560"/>
-            <a:ext cx="7772400" cy="496389"/>
+            <a:off x="685800" y="914400"/>
+            <a:ext cx="7818120" cy="464058"/>
           </a:xfrm>
           <a:prstGeom prst="rect">
             <a:avLst/>
@@ -2371,7 +4592,351 @@
               <a:buNone/>
             </a:pPr>
             <a:r>
-              <a:rPr lang="en-US" sz="1300" dirty="0">
+              <a:rPr lang="en-US" sz="1000" dirty="0">
+                <a:solidFill>
+                  <a:srgbClr val="1B5E20"/>
+                </a:solidFill>
+                <a:latin typeface="JetBrains Mono" pitchFamily="34" charset="0"/>
+                <a:ea typeface="JetBrains Mono" pitchFamily="34" charset="-122"/>
+                <a:cs typeface="JetBrains Mono" pitchFamily="34" charset="-120"/>
+              </a:rPr>
+              <a:t>INT + AUTO_INCREMENT : identifiants (id_artiste, id_album...)</a:t>
+            </a:r>
+            <a:endParaRPr lang="en-US" sz="1000" dirty="0"/>
+          </a:p>
+        </p:txBody>
+      </p:sp>
+      <p:sp>
+        <p:nvSpPr>
+          <p:cNvPr id="7" name="Shape 5"/>
+          <p:cNvSpPr/>
+          <p:nvPr/>
+        </p:nvSpPr>
+        <p:spPr>
+          <a:xfrm>
+            <a:off x="457200" y="1405890"/>
+            <a:ext cx="8229600" cy="464058"/>
+          </a:xfrm>
+          <a:prstGeom prst="rect">
+            <a:avLst/>
+          </a:prstGeom>
+          <a:solidFill>
+            <a:srgbClr val="E8F5E9"/>
+          </a:solidFill>
+          <a:ln/>
+          <a:effectLst>
+            <a:outerShdw sx="100000" sy="100000" kx="0" ky="0" algn="bl" rotWithShape="0" blurRad="50800" dist="25400" dir="8100000">
+              <a:srgbClr val="000000">
+                <a:alpha val="12000"/>
+              </a:srgbClr>
+            </a:outerShdw>
+          </a:effectLst>
+        </p:spPr>
+      </p:sp>
+      <p:sp>
+        <p:nvSpPr>
+          <p:cNvPr id="8" name="Shape 6"/>
+          <p:cNvSpPr/>
+          <p:nvPr/>
+        </p:nvSpPr>
+        <p:spPr>
+          <a:xfrm>
+            <a:off x="457200" y="1405890"/>
+            <a:ext cx="45720" cy="464058"/>
+          </a:xfrm>
+          <a:prstGeom prst="rect">
+            <a:avLst/>
+          </a:prstGeom>
+          <a:solidFill>
+            <a:srgbClr val="2E7D32"/>
+          </a:solidFill>
+          <a:ln/>
+        </p:spPr>
+      </p:sp>
+      <p:sp>
+        <p:nvSpPr>
+          <p:cNvPr id="9" name="Text 7"/>
+          <p:cNvSpPr/>
+          <p:nvPr/>
+        </p:nvSpPr>
+        <p:spPr>
+          <a:xfrm>
+            <a:off x="685800" y="1405890"/>
+            <a:ext cx="7818120" cy="464058"/>
+          </a:xfrm>
+          <a:prstGeom prst="rect">
+            <a:avLst/>
+          </a:prstGeom>
+          <a:noFill/>
+          <a:ln/>
+        </p:spPr>
+        <p:txBody>
+          <a:bodyPr wrap="square" lIns="0" tIns="0" rIns="0" bIns="0" rtlCol="0" anchor="ctr"/>
+          <a:lstStyle/>
+          <a:p>
+            <a:pPr indent="0" marL="0">
+              <a:buNone/>
+            </a:pPr>
+            <a:r>
+              <a:rPr lang="en-US" sz="1000" dirty="0">
+                <a:solidFill>
+                  <a:srgbClr val="1B5E20"/>
+                </a:solidFill>
+                <a:latin typeface="JetBrains Mono" pitchFamily="34" charset="0"/>
+                <a:ea typeface="JetBrains Mono" pitchFamily="34" charset="-122"/>
+                <a:cs typeface="JetBrains Mono" pitchFamily="34" charset="-120"/>
+              </a:rPr>
+              <a:t>VARCHAR(n) : textes courts (nom: 100, email: 150, tel: 20)</a:t>
+            </a:r>
+            <a:endParaRPr lang="en-US" sz="1000" dirty="0"/>
+          </a:p>
+        </p:txBody>
+      </p:sp>
+      <p:sp>
+        <p:nvSpPr>
+          <p:cNvPr id="10" name="Shape 8"/>
+          <p:cNvSpPr/>
+          <p:nvPr/>
+        </p:nvSpPr>
+        <p:spPr>
+          <a:xfrm>
+            <a:off x="457200" y="1897380"/>
+            <a:ext cx="8229600" cy="464058"/>
+          </a:xfrm>
+          <a:prstGeom prst="rect">
+            <a:avLst/>
+          </a:prstGeom>
+          <a:solidFill>
+            <a:srgbClr val="FFFFFF"/>
+          </a:solidFill>
+          <a:ln/>
+          <a:effectLst>
+            <a:outerShdw sx="100000" sy="100000" kx="0" ky="0" algn="bl" rotWithShape="0" blurRad="50800" dist="25400" dir="8100000">
+              <a:srgbClr val="000000">
+                <a:alpha val="12000"/>
+              </a:srgbClr>
+            </a:outerShdw>
+          </a:effectLst>
+        </p:spPr>
+      </p:sp>
+      <p:sp>
+        <p:nvSpPr>
+          <p:cNvPr id="11" name="Shape 9"/>
+          <p:cNvSpPr/>
+          <p:nvPr/>
+        </p:nvSpPr>
+        <p:spPr>
+          <a:xfrm>
+            <a:off x="457200" y="1897380"/>
+            <a:ext cx="45720" cy="464058"/>
+          </a:xfrm>
+          <a:prstGeom prst="rect">
+            <a:avLst/>
+          </a:prstGeom>
+          <a:solidFill>
+            <a:srgbClr val="2E7D32"/>
+          </a:solidFill>
+          <a:ln/>
+        </p:spPr>
+      </p:sp>
+      <p:sp>
+        <p:nvSpPr>
+          <p:cNvPr id="12" name="Text 10"/>
+          <p:cNvSpPr/>
+          <p:nvPr/>
+        </p:nvSpPr>
+        <p:spPr>
+          <a:xfrm>
+            <a:off x="685800" y="1897380"/>
+            <a:ext cx="7818120" cy="464058"/>
+          </a:xfrm>
+          <a:prstGeom prst="rect">
+            <a:avLst/>
+          </a:prstGeom>
+          <a:noFill/>
+          <a:ln/>
+        </p:spPr>
+        <p:txBody>
+          <a:bodyPr wrap="square" lIns="0" tIns="0" rIns="0" bIns="0" rtlCol="0" anchor="ctr"/>
+          <a:lstStyle/>
+          <a:p>
+            <a:pPr indent="0" marL="0">
+              <a:buNone/>
+            </a:pPr>
+            <a:r>
+              <a:rPr lang="en-US" sz="1000" dirty="0">
+                <a:solidFill>
+                  <a:srgbClr val="1B5E20"/>
+                </a:solidFill>
+                <a:latin typeface="JetBrains Mono" pitchFamily="34" charset="0"/>
+                <a:ea typeface="JetBrains Mono" pitchFamily="34" charset="-122"/>
+                <a:cs typeface="JetBrains Mono" pitchFamily="34" charset="-120"/>
+              </a:rPr>
+              <a:t>TEXT : textes longs (notes de session)</a:t>
+            </a:r>
+            <a:endParaRPr lang="en-US" sz="1000" dirty="0"/>
+          </a:p>
+        </p:txBody>
+      </p:sp>
+      <p:sp>
+        <p:nvSpPr>
+          <p:cNvPr id="13" name="Shape 11"/>
+          <p:cNvSpPr/>
+          <p:nvPr/>
+        </p:nvSpPr>
+        <p:spPr>
+          <a:xfrm>
+            <a:off x="457200" y="2388870"/>
+            <a:ext cx="8229600" cy="464058"/>
+          </a:xfrm>
+          <a:prstGeom prst="rect">
+            <a:avLst/>
+          </a:prstGeom>
+          <a:solidFill>
+            <a:srgbClr val="E8F5E9"/>
+          </a:solidFill>
+          <a:ln/>
+          <a:effectLst>
+            <a:outerShdw sx="100000" sy="100000" kx="0" ky="0" algn="bl" rotWithShape="0" blurRad="50800" dist="25400" dir="8100000">
+              <a:srgbClr val="000000">
+                <a:alpha val="12000"/>
+              </a:srgbClr>
+            </a:outerShdw>
+          </a:effectLst>
+        </p:spPr>
+      </p:sp>
+      <p:sp>
+        <p:nvSpPr>
+          <p:cNvPr id="14" name="Shape 12"/>
+          <p:cNvSpPr/>
+          <p:nvPr/>
+        </p:nvSpPr>
+        <p:spPr>
+          <a:xfrm>
+            <a:off x="457200" y="2388870"/>
+            <a:ext cx="45720" cy="464058"/>
+          </a:xfrm>
+          <a:prstGeom prst="rect">
+            <a:avLst/>
+          </a:prstGeom>
+          <a:solidFill>
+            <a:srgbClr val="2E7D32"/>
+          </a:solidFill>
+          <a:ln/>
+        </p:spPr>
+      </p:sp>
+      <p:sp>
+        <p:nvSpPr>
+          <p:cNvPr id="15" name="Text 13"/>
+          <p:cNvSpPr/>
+          <p:nvPr/>
+        </p:nvSpPr>
+        <p:spPr>
+          <a:xfrm>
+            <a:off x="685800" y="2388870"/>
+            <a:ext cx="7818120" cy="464058"/>
+          </a:xfrm>
+          <a:prstGeom prst="rect">
+            <a:avLst/>
+          </a:prstGeom>
+          <a:noFill/>
+          <a:ln/>
+        </p:spPr>
+        <p:txBody>
+          <a:bodyPr wrap="square" lIns="0" tIns="0" rIns="0" bIns="0" rtlCol="0" anchor="ctr"/>
+          <a:lstStyle/>
+          <a:p>
+            <a:pPr indent="0" marL="0">
+              <a:buNone/>
+            </a:pPr>
+            <a:r>
+              <a:rPr lang="en-US" sz="1000" dirty="0">
+                <a:solidFill>
+                  <a:srgbClr val="1B5E20"/>
+                </a:solidFill>
+                <a:latin typeface="JetBrains Mono" pitchFamily="34" charset="0"/>
+                <a:ea typeface="JetBrains Mono" pitchFamily="34" charset="-122"/>
+                <a:cs typeface="JetBrains Mono" pitchFamily="34" charset="-120"/>
+              </a:rPr>
+              <a:t>DATE : dates (date_inscription, date_sortie, date_facture)</a:t>
+            </a:r>
+            <a:endParaRPr lang="en-US" sz="1000" dirty="0"/>
+          </a:p>
+        </p:txBody>
+      </p:sp>
+      <p:sp>
+        <p:nvSpPr>
+          <p:cNvPr id="16" name="Shape 14"/>
+          <p:cNvSpPr/>
+          <p:nvPr/>
+        </p:nvSpPr>
+        <p:spPr>
+          <a:xfrm>
+            <a:off x="457200" y="2880360"/>
+            <a:ext cx="8229600" cy="464058"/>
+          </a:xfrm>
+          <a:prstGeom prst="rect">
+            <a:avLst/>
+          </a:prstGeom>
+          <a:solidFill>
+            <a:srgbClr val="FFFFFF"/>
+          </a:solidFill>
+          <a:ln/>
+          <a:effectLst>
+            <a:outerShdw sx="100000" sy="100000" kx="0" ky="0" algn="bl" rotWithShape="0" blurRad="50800" dist="25400" dir="8100000">
+              <a:srgbClr val="000000">
+                <a:alpha val="12000"/>
+              </a:srgbClr>
+            </a:outerShdw>
+          </a:effectLst>
+        </p:spPr>
+      </p:sp>
+      <p:sp>
+        <p:nvSpPr>
+          <p:cNvPr id="17" name="Shape 15"/>
+          <p:cNvSpPr/>
+          <p:nvPr/>
+        </p:nvSpPr>
+        <p:spPr>
+          <a:xfrm>
+            <a:off x="457200" y="2880360"/>
+            <a:ext cx="45720" cy="464058"/>
+          </a:xfrm>
+          <a:prstGeom prst="rect">
+            <a:avLst/>
+          </a:prstGeom>
+          <a:solidFill>
+            <a:srgbClr val="2E7D32"/>
+          </a:solidFill>
+          <a:ln/>
+        </p:spPr>
+      </p:sp>
+      <p:sp>
+        <p:nvSpPr>
+          <p:cNvPr id="18" name="Text 16"/>
+          <p:cNvSpPr/>
+          <p:nvPr/>
+        </p:nvSpPr>
+        <p:spPr>
+          <a:xfrm>
+            <a:off x="685800" y="2880360"/>
+            <a:ext cx="7818120" cy="464058"/>
+          </a:xfrm>
+          <a:prstGeom prst="rect">
+            <a:avLst/>
+          </a:prstGeom>
+          <a:noFill/>
+          <a:ln/>
+        </p:spPr>
+        <p:txBody>
+          <a:bodyPr wrap="square" lIns="0" tIns="0" rIns="0" bIns="0" rtlCol="0" anchor="ctr"/>
+          <a:lstStyle/>
+          <a:p>
+            <a:pPr indent="0" marL="0">
+              <a:buNone/>
+            </a:pPr>
+            <a:r>
+              <a:rPr lang="en-US" sz="1200" dirty="0">
                 <a:solidFill>
                   <a:srgbClr val="1A1A2E"/>
                 </a:solidFill>
@@ -2379,22 +4944,22 @@
                 <a:ea typeface="Calibri" pitchFamily="34" charset="-122"/>
                 <a:cs typeface="Calibri" pitchFamily="34" charset="-120"/>
               </a:rPr>
-              <a:t>INT / BIGINT : nombres entiers (id, quantité, capacité)</a:t>
-            </a:r>
-            <a:endParaRPr lang="en-US" sz="1300" dirty="0"/>
-          </a:p>
-        </p:txBody>
-      </p:sp>
-      <p:sp>
-        <p:nvSpPr>
-          <p:cNvPr id="7" name="Shape 5"/>
-          <p:cNvSpPr/>
-          <p:nvPr/>
-        </p:nvSpPr>
-        <p:spPr>
-          <a:xfrm>
-            <a:off x="457200" y="1574074"/>
-            <a:ext cx="8229600" cy="496389"/>
+              <a:t>TIME : heures (heure_debut, heure_fin)</a:t>
+            </a:r>
+            <a:endParaRPr lang="en-US" sz="1200" dirty="0"/>
+          </a:p>
+        </p:txBody>
+      </p:sp>
+      <p:sp>
+        <p:nvSpPr>
+          <p:cNvPr id="19" name="Shape 17"/>
+          <p:cNvSpPr/>
+          <p:nvPr/>
+        </p:nvSpPr>
+        <p:spPr>
+          <a:xfrm>
+            <a:off x="457200" y="3371850"/>
+            <a:ext cx="8229600" cy="464058"/>
           </a:xfrm>
           <a:prstGeom prst="rect">
             <a:avLst/>
@@ -2414,14 +4979,14 @@
       </p:sp>
       <p:sp>
         <p:nvSpPr>
-          <p:cNvPr id="8" name="Shape 6"/>
-          <p:cNvSpPr/>
-          <p:nvPr/>
-        </p:nvSpPr>
-        <p:spPr>
-          <a:xfrm>
-            <a:off x="457200" y="1574074"/>
-            <a:ext cx="54864" cy="496389"/>
+          <p:cNvPr id="20" name="Shape 18"/>
+          <p:cNvSpPr/>
+          <p:nvPr/>
+        </p:nvSpPr>
+        <p:spPr>
+          <a:xfrm>
+            <a:off x="457200" y="3371850"/>
+            <a:ext cx="45720" cy="464058"/>
           </a:xfrm>
           <a:prstGeom prst="rect">
             <a:avLst/>
@@ -2434,14 +4999,14 @@
       </p:sp>
       <p:sp>
         <p:nvSpPr>
-          <p:cNvPr id="9" name="Text 7"/>
-          <p:cNvSpPr/>
-          <p:nvPr/>
-        </p:nvSpPr>
-        <p:spPr>
-          <a:xfrm>
-            <a:off x="731520" y="1574074"/>
-            <a:ext cx="7772400" cy="496389"/>
+          <p:cNvPr id="21" name="Text 19"/>
+          <p:cNvSpPr/>
+          <p:nvPr/>
+        </p:nvSpPr>
+        <p:spPr>
+          <a:xfrm>
+            <a:off x="685800" y="3371850"/>
+            <a:ext cx="7818120" cy="464058"/>
           </a:xfrm>
           <a:prstGeom prst="rect">
             <a:avLst/>
@@ -2457,30 +5022,30 @@
               <a:buNone/>
             </a:pPr>
             <a:r>
-              <a:rPr lang="en-US" sz="1300" dirty="0">
+              <a:rPr lang="en-US" sz="1000" dirty="0">
                 <a:solidFill>
-                  <a:srgbClr val="1A1A2E"/>
+                  <a:srgbClr val="1B5E20"/>
                 </a:solidFill>
-                <a:latin typeface="Calibri" pitchFamily="34" charset="0"/>
-                <a:ea typeface="Calibri" pitchFamily="34" charset="-122"/>
-                <a:cs typeface="Calibri" pitchFamily="34" charset="-120"/>
+                <a:latin typeface="JetBrains Mono" pitchFamily="34" charset="0"/>
+                <a:ea typeface="JetBrains Mono" pitchFamily="34" charset="-122"/>
+                <a:cs typeface="JetBrains Mono" pitchFamily="34" charset="-120"/>
               </a:rPr>
-              <a:t>VARCHAR(n) : texte variable max n caractères (nom, email)</a:t>
-            </a:r>
-            <a:endParaRPr lang="en-US" sz="1300" dirty="0"/>
-          </a:p>
-        </p:txBody>
-      </p:sp>
-      <p:sp>
-        <p:nvSpPr>
-          <p:cNvPr id="10" name="Shape 8"/>
-          <p:cNvSpPr/>
-          <p:nvPr/>
-        </p:nvSpPr>
-        <p:spPr>
-          <a:xfrm>
-            <a:off x="457200" y="2096589"/>
-            <a:ext cx="8229600" cy="496389"/>
+              <a:t>DECIMAL(10,2) : montants en CHF (prix, tarifs, montant_facture)</a:t>
+            </a:r>
+            <a:endParaRPr lang="en-US" sz="1000" dirty="0"/>
+          </a:p>
+        </p:txBody>
+      </p:sp>
+      <p:sp>
+        <p:nvSpPr>
+          <p:cNvPr id="22" name="Shape 20"/>
+          <p:cNvSpPr/>
+          <p:nvPr/>
+        </p:nvSpPr>
+        <p:spPr>
+          <a:xfrm>
+            <a:off x="457200" y="3863340"/>
+            <a:ext cx="8229600" cy="464058"/>
           </a:xfrm>
           <a:prstGeom prst="rect">
             <a:avLst/>
@@ -2500,14 +5065,14 @@
       </p:sp>
       <p:sp>
         <p:nvSpPr>
-          <p:cNvPr id="11" name="Shape 9"/>
-          <p:cNvSpPr/>
-          <p:nvPr/>
-        </p:nvSpPr>
-        <p:spPr>
-          <a:xfrm>
-            <a:off x="457200" y="2096589"/>
-            <a:ext cx="54864" cy="496389"/>
+          <p:cNvPr id="23" name="Shape 21"/>
+          <p:cNvSpPr/>
+          <p:nvPr/>
+        </p:nvSpPr>
+        <p:spPr>
+          <a:xfrm>
+            <a:off x="457200" y="3863340"/>
+            <a:ext cx="45720" cy="464058"/>
           </a:xfrm>
           <a:prstGeom prst="rect">
             <a:avLst/>
@@ -2520,14 +5085,14 @@
       </p:sp>
       <p:sp>
         <p:nvSpPr>
-          <p:cNvPr id="12" name="Text 10"/>
-          <p:cNvSpPr/>
-          <p:nvPr/>
-        </p:nvSpPr>
-        <p:spPr>
-          <a:xfrm>
-            <a:off x="731520" y="2096589"/>
-            <a:ext cx="7772400" cy="496389"/>
+          <p:cNvPr id="24" name="Text 22"/>
+          <p:cNvSpPr/>
+          <p:nvPr/>
+        </p:nvSpPr>
+        <p:spPr>
+          <a:xfrm>
+            <a:off x="685800" y="3863340"/>
+            <a:ext cx="7818120" cy="464058"/>
           </a:xfrm>
           <a:prstGeom prst="rect">
             <a:avLst/>
@@ -2543,30 +5108,30 @@
               <a:buNone/>
             </a:pPr>
             <a:r>
-              <a:rPr lang="en-US" sz="1300" dirty="0">
+              <a:rPr lang="en-US" sz="1000" dirty="0">
                 <a:solidFill>
-                  <a:srgbClr val="1A1A2E"/>
+                  <a:srgbClr val="1B5E20"/>
                 </a:solidFill>
-                <a:latin typeface="Calibri" pitchFamily="34" charset="0"/>
-                <a:ea typeface="Calibri" pitchFamily="34" charset="-122"/>
-                <a:cs typeface="Calibri" pitchFamily="34" charset="-120"/>
+                <a:latin typeface="JetBrains Mono" pitchFamily="34" charset="0"/>
+                <a:ea typeface="JetBrains Mono" pitchFamily="34" charset="-122"/>
+                <a:cs typeface="JetBrains Mono" pitchFamily="34" charset="-120"/>
               </a:rPr>
-              <a:t>DECIMAL(p,s) : nombre exact p chiffres dont s décimales (prix : 10,2)</a:t>
-            </a:r>
-            <a:endParaRPr lang="en-US" sz="1300" dirty="0"/>
-          </a:p>
-        </p:txBody>
-      </p:sp>
-      <p:sp>
-        <p:nvSpPr>
-          <p:cNvPr id="13" name="Shape 11"/>
-          <p:cNvSpPr/>
-          <p:nvPr/>
-        </p:nvSpPr>
-        <p:spPr>
-          <a:xfrm>
-            <a:off x="457200" y="2619103"/>
-            <a:ext cx="8229600" cy="496389"/>
+              <a:t>BOOLEAN : vrai/faux (actif, equipee_isolation)</a:t>
+            </a:r>
+            <a:endParaRPr lang="en-US" sz="1000" dirty="0"/>
+          </a:p>
+        </p:txBody>
+      </p:sp>
+      <p:sp>
+        <p:nvSpPr>
+          <p:cNvPr id="25" name="Shape 23"/>
+          <p:cNvSpPr/>
+          <p:nvPr/>
+        </p:nvSpPr>
+        <p:spPr>
+          <a:xfrm>
+            <a:off x="457200" y="4354830"/>
+            <a:ext cx="8229600" cy="464058"/>
           </a:xfrm>
           <a:prstGeom prst="rect">
             <a:avLst/>
@@ -2586,14 +5151,14 @@
       </p:sp>
       <p:sp>
         <p:nvSpPr>
-          <p:cNvPr id="14" name="Shape 12"/>
-          <p:cNvSpPr/>
-          <p:nvPr/>
-        </p:nvSpPr>
-        <p:spPr>
-          <a:xfrm>
-            <a:off x="457200" y="2619103"/>
-            <a:ext cx="54864" cy="496389"/>
+          <p:cNvPr id="26" name="Shape 24"/>
+          <p:cNvSpPr/>
+          <p:nvPr/>
+        </p:nvSpPr>
+        <p:spPr>
+          <a:xfrm>
+            <a:off x="457200" y="4354830"/>
+            <a:ext cx="45720" cy="464058"/>
           </a:xfrm>
           <a:prstGeom prst="rect">
             <a:avLst/>
@@ -2606,14 +5171,14 @@
       </p:sp>
       <p:sp>
         <p:nvSpPr>
-          <p:cNvPr id="15" name="Text 13"/>
-          <p:cNvSpPr/>
-          <p:nvPr/>
-        </p:nvSpPr>
-        <p:spPr>
-          <a:xfrm>
-            <a:off x="731520" y="2619103"/>
-            <a:ext cx="7772400" cy="496389"/>
+          <p:cNvPr id="27" name="Text 25"/>
+          <p:cNvSpPr/>
+          <p:nvPr/>
+        </p:nvSpPr>
+        <p:spPr>
+          <a:xfrm>
+            <a:off x="685800" y="4354830"/>
+            <a:ext cx="7818120" cy="464058"/>
           </a:xfrm>
           <a:prstGeom prst="rect">
             <a:avLst/>
@@ -2629,314 +5194,17 @@
               <a:buNone/>
             </a:pPr>
             <a:r>
-              <a:rPr lang="en-US" sz="1300" dirty="0">
+              <a:rPr lang="en-US" sz="1000" dirty="0">
                 <a:solidFill>
-                  <a:srgbClr val="1A1A2E"/>
+                  <a:srgbClr val="1B5E20"/>
                 </a:solidFill>
-                <a:latin typeface="Calibri" pitchFamily="34" charset="0"/>
-                <a:ea typeface="Calibri" pitchFamily="34" charset="-122"/>
-                <a:cs typeface="Calibri" pitchFamily="34" charset="-120"/>
+                <a:latin typeface="JetBrains Mono" pitchFamily="34" charset="0"/>
+                <a:ea typeface="JetBrains Mono" pitchFamily="34" charset="-122"/>
+                <a:cs typeface="JetBrains Mono" pitchFamily="34" charset="-120"/>
               </a:rPr>
-              <a:t>DATE / TIME / DATETIME : dates et heures</a:t>
-            </a:r>
-            <a:endParaRPr lang="en-US" sz="1300" dirty="0"/>
-          </a:p>
-        </p:txBody>
-      </p:sp>
-      <p:sp>
-        <p:nvSpPr>
-          <p:cNvPr id="16" name="Shape 14"/>
-          <p:cNvSpPr/>
-          <p:nvPr/>
-        </p:nvSpPr>
-        <p:spPr>
-          <a:xfrm>
-            <a:off x="457200" y="3141617"/>
-            <a:ext cx="8229600" cy="496389"/>
-          </a:xfrm>
-          <a:prstGeom prst="rect">
-            <a:avLst/>
-          </a:prstGeom>
-          <a:solidFill>
-            <a:srgbClr val="FFFFFF"/>
-          </a:solidFill>
-          <a:ln/>
-          <a:effectLst>
-            <a:outerShdw sx="100000" sy="100000" kx="0" ky="0" algn="bl" rotWithShape="0" blurRad="50800" dist="25400" dir="8100000">
-              <a:srgbClr val="000000">
-                <a:alpha val="12000"/>
-              </a:srgbClr>
-            </a:outerShdw>
-          </a:effectLst>
-        </p:spPr>
-      </p:sp>
-      <p:sp>
-        <p:nvSpPr>
-          <p:cNvPr id="17" name="Shape 15"/>
-          <p:cNvSpPr/>
-          <p:nvPr/>
-        </p:nvSpPr>
-        <p:spPr>
-          <a:xfrm>
-            <a:off x="457200" y="3141617"/>
-            <a:ext cx="54864" cy="496389"/>
-          </a:xfrm>
-          <a:prstGeom prst="rect">
-            <a:avLst/>
-          </a:prstGeom>
-          <a:solidFill>
-            <a:srgbClr val="2E7D32"/>
-          </a:solidFill>
-          <a:ln/>
-        </p:spPr>
-      </p:sp>
-      <p:sp>
-        <p:nvSpPr>
-          <p:cNvPr id="18" name="Text 16"/>
-          <p:cNvSpPr/>
-          <p:nvPr/>
-        </p:nvSpPr>
-        <p:spPr>
-          <a:xfrm>
-            <a:off x="731520" y="3141617"/>
-            <a:ext cx="7772400" cy="496389"/>
-          </a:xfrm>
-          <a:prstGeom prst="rect">
-            <a:avLst/>
-          </a:prstGeom>
-          <a:noFill/>
-          <a:ln/>
-        </p:spPr>
-        <p:txBody>
-          <a:bodyPr wrap="square" lIns="0" tIns="0" rIns="0" bIns="0" rtlCol="0" anchor="ctr"/>
-          <a:lstStyle/>
-          <a:p>
-            <a:pPr indent="0" marL="0">
-              <a:buNone/>
-            </a:pPr>
-            <a:r>
-              <a:rPr lang="en-US" sz="1300" dirty="0">
-                <a:solidFill>
-                  <a:srgbClr val="1A1A2E"/>
-                </a:solidFill>
-                <a:latin typeface="Calibri" pitchFamily="34" charset="0"/>
-                <a:ea typeface="Calibri" pitchFamily="34" charset="-122"/>
-                <a:cs typeface="Calibri" pitchFamily="34" charset="-120"/>
-              </a:rPr>
-              <a:t>ENUM('a','b','c') : valeur parmi une liste fixe (statut)</a:t>
-            </a:r>
-            <a:endParaRPr lang="en-US" sz="1300" dirty="0"/>
-          </a:p>
-        </p:txBody>
-      </p:sp>
-      <p:sp>
-        <p:nvSpPr>
-          <p:cNvPr id="19" name="Shape 17"/>
-          <p:cNvSpPr/>
-          <p:nvPr/>
-        </p:nvSpPr>
-        <p:spPr>
-          <a:xfrm>
-            <a:off x="457200" y="3664131"/>
-            <a:ext cx="8229600" cy="496389"/>
-          </a:xfrm>
-          <a:prstGeom prst="rect">
-            <a:avLst/>
-          </a:prstGeom>
-          <a:solidFill>
-            <a:srgbClr val="E8F5E9"/>
-          </a:solidFill>
-          <a:ln/>
-          <a:effectLst>
-            <a:outerShdw sx="100000" sy="100000" kx="0" ky="0" algn="bl" rotWithShape="0" blurRad="50800" dist="25400" dir="8100000">
-              <a:srgbClr val="000000">
-                <a:alpha val="12000"/>
-              </a:srgbClr>
-            </a:outerShdw>
-          </a:effectLst>
-        </p:spPr>
-      </p:sp>
-      <p:sp>
-        <p:nvSpPr>
-          <p:cNvPr id="20" name="Shape 18"/>
-          <p:cNvSpPr/>
-          <p:nvPr/>
-        </p:nvSpPr>
-        <p:spPr>
-          <a:xfrm>
-            <a:off x="457200" y="3664131"/>
-            <a:ext cx="54864" cy="496389"/>
-          </a:xfrm>
-          <a:prstGeom prst="rect">
-            <a:avLst/>
-          </a:prstGeom>
-          <a:solidFill>
-            <a:srgbClr val="2E7D32"/>
-          </a:solidFill>
-          <a:ln/>
-        </p:spPr>
-      </p:sp>
-      <p:sp>
-        <p:nvSpPr>
-          <p:cNvPr id="21" name="Text 19"/>
-          <p:cNvSpPr/>
-          <p:nvPr/>
-        </p:nvSpPr>
-        <p:spPr>
-          <a:xfrm>
-            <a:off x="731520" y="3664131"/>
-            <a:ext cx="7772400" cy="496389"/>
-          </a:xfrm>
-          <a:prstGeom prst="rect">
-            <a:avLst/>
-          </a:prstGeom>
-          <a:noFill/>
-          <a:ln/>
-        </p:spPr>
-        <p:txBody>
-          <a:bodyPr wrap="square" lIns="0" tIns="0" rIns="0" bIns="0" rtlCol="0" anchor="ctr"/>
-          <a:lstStyle/>
-          <a:p>
-            <a:pPr indent="0" marL="0">
-              <a:buNone/>
-            </a:pPr>
-            <a:r>
-              <a:rPr lang="en-US" sz="1300" dirty="0">
-                <a:solidFill>
-                  <a:srgbClr val="1A1A2E"/>
-                </a:solidFill>
-                <a:latin typeface="Calibri" pitchFamily="34" charset="0"/>
-                <a:ea typeface="Calibri" pitchFamily="34" charset="-122"/>
-                <a:cs typeface="Calibri" pitchFamily="34" charset="-120"/>
-              </a:rPr>
-              <a:t>BOOLEAN : vrai/faux (actif, isolation)</a:t>
-            </a:r>
-            <a:endParaRPr lang="en-US" sz="1300" dirty="0"/>
-          </a:p>
-        </p:txBody>
-      </p:sp>
-      <p:sp>
-        <p:nvSpPr>
-          <p:cNvPr id="22" name="Shape 20"/>
-          <p:cNvSpPr/>
-          <p:nvPr/>
-        </p:nvSpPr>
-        <p:spPr>
-          <a:xfrm>
-            <a:off x="457200" y="4186646"/>
-            <a:ext cx="8229600" cy="496389"/>
-          </a:xfrm>
-          <a:prstGeom prst="rect">
-            <a:avLst/>
-          </a:prstGeom>
-          <a:solidFill>
-            <a:srgbClr val="FFFFFF"/>
-          </a:solidFill>
-          <a:ln/>
-          <a:effectLst>
-            <a:outerShdw sx="100000" sy="100000" kx="0" ky="0" algn="bl" rotWithShape="0" blurRad="50800" dist="25400" dir="8100000">
-              <a:srgbClr val="000000">
-                <a:alpha val="12000"/>
-              </a:srgbClr>
-            </a:outerShdw>
-          </a:effectLst>
-        </p:spPr>
-      </p:sp>
-      <p:sp>
-        <p:nvSpPr>
-          <p:cNvPr id="23" name="Shape 21"/>
-          <p:cNvSpPr/>
-          <p:nvPr/>
-        </p:nvSpPr>
-        <p:spPr>
-          <a:xfrm>
-            <a:off x="457200" y="4186646"/>
-            <a:ext cx="54864" cy="496389"/>
-          </a:xfrm>
-          <a:prstGeom prst="rect">
-            <a:avLst/>
-          </a:prstGeom>
-          <a:solidFill>
-            <a:srgbClr val="2E7D32"/>
-          </a:solidFill>
-          <a:ln/>
-        </p:spPr>
-      </p:sp>
-      <p:sp>
-        <p:nvSpPr>
-          <p:cNvPr id="24" name="Text 22"/>
-          <p:cNvSpPr/>
-          <p:nvPr/>
-        </p:nvSpPr>
-        <p:spPr>
-          <a:xfrm>
-            <a:off x="731520" y="4186646"/>
-            <a:ext cx="7772400" cy="496389"/>
-          </a:xfrm>
-          <a:prstGeom prst="rect">
-            <a:avLst/>
-          </a:prstGeom>
-          <a:noFill/>
-          <a:ln/>
-        </p:spPr>
-        <p:txBody>
-          <a:bodyPr wrap="square" lIns="0" tIns="0" rIns="0" bIns="0" rtlCol="0" anchor="ctr"/>
-          <a:lstStyle/>
-          <a:p>
-            <a:pPr indent="0" marL="0">
-              <a:buNone/>
-            </a:pPr>
-            <a:r>
-              <a:rPr lang="en-US" sz="1300" dirty="0">
-                <a:solidFill>
-                  <a:srgbClr val="1A1A2E"/>
-                </a:solidFill>
-                <a:latin typeface="Calibri" pitchFamily="34" charset="0"/>
-                <a:ea typeface="Calibri" pitchFamily="34" charset="-122"/>
-                <a:cs typeface="Calibri" pitchFamily="34" charset="-120"/>
-              </a:rPr>
-              <a:t>TEXT : texte long (notes, descriptions)</a:t>
-            </a:r>
-            <a:endParaRPr lang="en-US" sz="1300" dirty="0"/>
-          </a:p>
-        </p:txBody>
-      </p:sp>
-      <p:sp>
-        <p:nvSpPr>
-          <p:cNvPr id="25" name="Text 23"/>
-          <p:cNvSpPr/>
-          <p:nvPr/>
-        </p:nvSpPr>
-        <p:spPr>
-          <a:xfrm>
-            <a:off x="8229600" y="4754880"/>
-            <a:ext cx="731520" cy="274320"/>
-          </a:xfrm>
-          <a:prstGeom prst="rect">
-            <a:avLst/>
-          </a:prstGeom>
-          <a:noFill/>
-          <a:ln/>
-        </p:spPr>
-        <p:txBody>
-          <a:bodyPr wrap="square" lIns="0" tIns="0" rIns="0" bIns="0" rtlCol="0" anchor="ctr"/>
-          <a:lstStyle/>
-          <a:p>
-            <a:pPr algn="r" indent="0" marL="0">
-              <a:buNone/>
-            </a:pPr>
-            <a:r>
-              <a:rPr lang="en-US" sz="900" dirty="0">
-                <a:solidFill>
-                  <a:srgbClr val="AAAAAA"/>
-                </a:solidFill>
-                <a:latin typeface="Calibri" pitchFamily="34" charset="0"/>
-                <a:ea typeface="Calibri" pitchFamily="34" charset="-122"/>
-                <a:cs typeface="Calibri" pitchFamily="34" charset="-120"/>
-              </a:rPr>
-              <a:t>3/6</a:t>
-            </a:r>
-            <a:endParaRPr lang="en-US" sz="900" dirty="0"/>
+              <a:t>ENUM('a','b','c') : listes fermées (statut, catégorie, état)</a:t>
+            </a:r>
+            <a:endParaRPr lang="en-US" sz="1000" dirty="0"/>
           </a:p>
         </p:txBody>
       </p:sp>
@@ -2981,7 +5249,7 @@
         <p:spPr>
           <a:xfrm>
             <a:off x="0" y="0"/>
-            <a:ext cx="9144000" cy="73152"/>
+            <a:ext cx="9144000" cy="54864"/>
           </a:xfrm>
           <a:prstGeom prst="rect">
             <a:avLst/>
@@ -3000,8 +5268,8 @@
         </p:nvSpPr>
         <p:spPr>
           <a:xfrm>
-            <a:off x="457200" y="228600"/>
-            <a:ext cx="8229600" cy="640080"/>
+            <a:off x="457200" y="182880"/>
+            <a:ext cx="8229600" cy="594360"/>
           </a:xfrm>
           <a:prstGeom prst="rect">
             <a:avLst/>
@@ -3017,7 +5285,7 @@
               <a:buNone/>
             </a:pPr>
             <a:r>
-              <a:rPr lang="en-US" sz="2600" b="1" dirty="0">
+              <a:rPr lang="en-US" sz="2400" b="1" dirty="0">
                 <a:solidFill>
                   <a:srgbClr val="1B5E20"/>
                 </a:solidFill>
@@ -3025,9 +5293,9 @@
                 <a:ea typeface="Trebuchet MS" pitchFamily="34" charset="-122"/>
                 <a:cs typeface="Trebuchet MS" pitchFamily="34" charset="-120"/>
               </a:rPr>
-              <a:t>Conception d'interfaces</a:t>
-            </a:r>
-            <a:endParaRPr lang="en-US" sz="2600" dirty="0"/>
+              <a:t>⚠️ Erreurs de types fréquentes</a:t>
+            </a:r>
+            <a:endParaRPr lang="en-US" sz="2400" dirty="0"/>
           </a:p>
         </p:txBody>
       </p:sp>
@@ -3039,8 +5307,8 @@
         </p:nvSpPr>
         <p:spPr>
           <a:xfrm>
-            <a:off x="457200" y="1051560"/>
-            <a:ext cx="8229600" cy="640080"/>
+            <a:off x="457200" y="914400"/>
+            <a:ext cx="8229600" cy="521208"/>
           </a:xfrm>
           <a:prstGeom prst="rect">
             <a:avLst/>
@@ -3066,8 +5334,8 @@
         </p:nvSpPr>
         <p:spPr>
           <a:xfrm>
-            <a:off x="457200" y="1051560"/>
-            <a:ext cx="54864" cy="640080"/>
+            <a:off x="457200" y="914400"/>
+            <a:ext cx="45720" cy="521208"/>
           </a:xfrm>
           <a:prstGeom prst="rect">
             <a:avLst/>
@@ -3086,8 +5354,8 @@
         </p:nvSpPr>
         <p:spPr>
           <a:xfrm>
-            <a:off x="731520" y="1051560"/>
-            <a:ext cx="7772400" cy="640080"/>
+            <a:off x="685800" y="914400"/>
+            <a:ext cx="7818120" cy="521208"/>
           </a:xfrm>
           <a:prstGeom prst="rect">
             <a:avLst/>
@@ -3103,7 +5371,7 @@
               <a:buNone/>
             </a:pPr>
             <a:r>
-              <a:rPr lang="en-US" sz="1300" dirty="0">
+              <a:rPr lang="en-US" sz="1200" dirty="0">
                 <a:solidFill>
                   <a:srgbClr val="1A1A2E"/>
                 </a:solidFill>
@@ -3111,9 +5379,9 @@
                 <a:ea typeface="Calibri" pitchFamily="34" charset="-122"/>
                 <a:cs typeface="Calibri" pitchFamily="34" charset="-120"/>
               </a:rPr>
-              <a:t>Maquetter les formulaires AVANT de coder</a:t>
-            </a:r>
-            <a:endParaRPr lang="en-US" sz="1300" dirty="0"/>
+              <a:t>❌ email TEXT → ✅ email VARCHAR(150) (TEXT pas indexable efficacement)</a:t>
+            </a:r>
+            <a:endParaRPr lang="en-US" sz="1200" dirty="0"/>
           </a:p>
         </p:txBody>
       </p:sp>
@@ -3125,8 +5393,8 @@
         </p:nvSpPr>
         <p:spPr>
           <a:xfrm>
-            <a:off x="457200" y="1783080"/>
-            <a:ext cx="8229600" cy="640080"/>
+            <a:off x="457200" y="1463040"/>
+            <a:ext cx="8229600" cy="521208"/>
           </a:xfrm>
           <a:prstGeom prst="rect">
             <a:avLst/>
@@ -3152,8 +5420,8 @@
         </p:nvSpPr>
         <p:spPr>
           <a:xfrm>
-            <a:off x="457200" y="1783080"/>
-            <a:ext cx="54864" cy="640080"/>
+            <a:off x="457200" y="1463040"/>
+            <a:ext cx="45720" cy="521208"/>
           </a:xfrm>
           <a:prstGeom prst="rect">
             <a:avLst/>
@@ -3172,8 +5440,8 @@
         </p:nvSpPr>
         <p:spPr>
           <a:xfrm>
-            <a:off x="731520" y="1783080"/>
-            <a:ext cx="7772400" cy="640080"/>
+            <a:off x="685800" y="1463040"/>
+            <a:ext cx="7818120" cy="521208"/>
           </a:xfrm>
           <a:prstGeom prst="rect">
             <a:avLst/>
@@ -3189,7 +5457,7 @@
               <a:buNone/>
             </a:pPr>
             <a:r>
-              <a:rPr lang="en-US" sz="1300" dirty="0">
+              <a:rPr lang="en-US" sz="1200" dirty="0">
                 <a:solidFill>
                   <a:srgbClr val="1A1A2E"/>
                 </a:solidFill>
@@ -3197,9 +5465,9 @@
                 <a:ea typeface="Calibri" pitchFamily="34" charset="-122"/>
                 <a:cs typeface="Calibri" pitchFamily="34" charset="-120"/>
               </a:rPr>
-              <a:t>Formulaire ajout artiste : champs + validations</a:t>
-            </a:r>
-            <a:endParaRPr lang="en-US" sz="1300" dirty="0"/>
+              <a:t>❌ age INT → ✅ date_naissance DATE (on calcule l'âge, on ne le stocke pas)</a:t>
+            </a:r>
+            <a:endParaRPr lang="en-US" sz="1200" dirty="0"/>
           </a:p>
         </p:txBody>
       </p:sp>
@@ -3211,8 +5479,8 @@
         </p:nvSpPr>
         <p:spPr>
           <a:xfrm>
-            <a:off x="457200" y="2514600"/>
-            <a:ext cx="8229600" cy="640080"/>
+            <a:off x="457200" y="2011680"/>
+            <a:ext cx="8229600" cy="521208"/>
           </a:xfrm>
           <a:prstGeom prst="rect">
             <a:avLst/>
@@ -3238,8 +5506,8 @@
         </p:nvSpPr>
         <p:spPr>
           <a:xfrm>
-            <a:off x="457200" y="2514600"/>
-            <a:ext cx="54864" cy="640080"/>
+            <a:off x="457200" y="2011680"/>
+            <a:ext cx="45720" cy="521208"/>
           </a:xfrm>
           <a:prstGeom prst="rect">
             <a:avLst/>
@@ -3258,8 +5526,8 @@
         </p:nvSpPr>
         <p:spPr>
           <a:xfrm>
-            <a:off x="731520" y="2514600"/>
-            <a:ext cx="7772400" cy="640080"/>
+            <a:off x="685800" y="2011680"/>
+            <a:ext cx="7818120" cy="521208"/>
           </a:xfrm>
           <a:prstGeom prst="rect">
             <a:avLst/>
@@ -3275,7 +5543,7 @@
               <a:buNone/>
             </a:pPr>
             <a:r>
-              <a:rPr lang="en-US" sz="1300" dirty="0">
+              <a:rPr lang="en-US" sz="1200" dirty="0">
                 <a:solidFill>
                   <a:srgbClr val="1A1A2E"/>
                 </a:solidFill>
@@ -3283,9 +5551,9 @@
                 <a:ea typeface="Calibri" pitchFamily="34" charset="-122"/>
                 <a:cs typeface="Calibri" pitchFamily="34" charset="-120"/>
               </a:rPr>
-              <a:t>Formulaire réservation session : dropdown salles/ingénieurs</a:t>
-            </a:r>
-            <a:endParaRPr lang="en-US" sz="1300" dirty="0"/>
+              <a:t>❌ telephone INT → ✅ telephone VARCHAR(20) (+41 n'est pas un nombre !)</a:t>
+            </a:r>
+            <a:endParaRPr lang="en-US" sz="1200" dirty="0"/>
           </a:p>
         </p:txBody>
       </p:sp>
@@ -3297,8 +5565,8 @@
         </p:nvSpPr>
         <p:spPr>
           <a:xfrm>
-            <a:off x="457200" y="3246120"/>
-            <a:ext cx="8229600" cy="640080"/>
+            <a:off x="457200" y="2560320"/>
+            <a:ext cx="8229600" cy="521208"/>
           </a:xfrm>
           <a:prstGeom prst="rect">
             <a:avLst/>
@@ -3324,8 +5592,8 @@
         </p:nvSpPr>
         <p:spPr>
           <a:xfrm>
-            <a:off x="457200" y="3246120"/>
-            <a:ext cx="54864" cy="640080"/>
+            <a:off x="457200" y="2560320"/>
+            <a:ext cx="45720" cy="521208"/>
           </a:xfrm>
           <a:prstGeom prst="rect">
             <a:avLst/>
@@ -3344,8 +5612,8 @@
         </p:nvSpPr>
         <p:spPr>
           <a:xfrm>
-            <a:off x="731520" y="3246120"/>
-            <a:ext cx="7772400" cy="640080"/>
+            <a:off x="685800" y="2560320"/>
+            <a:ext cx="7818120" cy="521208"/>
           </a:xfrm>
           <a:prstGeom prst="rect">
             <a:avLst/>
@@ -3361,7 +5629,7 @@
               <a:buNone/>
             </a:pPr>
             <a:r>
-              <a:rPr lang="en-US" sz="1300" dirty="0">
+              <a:rPr lang="en-US" sz="1200" dirty="0">
                 <a:solidFill>
                   <a:srgbClr val="1A1A2E"/>
                 </a:solidFill>
@@ -3369,9 +5637,9 @@
                 <a:ea typeface="Calibri" pitchFamily="34" charset="-122"/>
                 <a:cs typeface="Calibri" pitchFamily="34" charset="-120"/>
               </a:rPr>
-              <a:t>Règles de validation : email valide, téléphone format suisse</a:t>
-            </a:r>
-            <a:endParaRPr lang="en-US" sz="1300" dirty="0"/>
+              <a:t>❌ prix FLOAT → ✅ prix DECIMAL(10,2) (FLOAT a des imprécisions)</a:t>
+            </a:r>
+            <a:endParaRPr lang="en-US" sz="1200" dirty="0"/>
           </a:p>
         </p:txBody>
       </p:sp>
@@ -3383,8 +5651,8 @@
         </p:nvSpPr>
         <p:spPr>
           <a:xfrm>
-            <a:off x="457200" y="3977640"/>
-            <a:ext cx="8229600" cy="640080"/>
+            <a:off x="457200" y="3108960"/>
+            <a:ext cx="8229600" cy="521208"/>
           </a:xfrm>
           <a:prstGeom prst="rect">
             <a:avLst/>
@@ -3410,8 +5678,8 @@
         </p:nvSpPr>
         <p:spPr>
           <a:xfrm>
-            <a:off x="457200" y="3977640"/>
-            <a:ext cx="54864" cy="640080"/>
+            <a:off x="457200" y="3108960"/>
+            <a:ext cx="45720" cy="521208"/>
           </a:xfrm>
           <a:prstGeom prst="rect">
             <a:avLst/>
@@ -3430,8 +5698,8 @@
         </p:nvSpPr>
         <p:spPr>
           <a:xfrm>
-            <a:off x="731520" y="3977640"/>
-            <a:ext cx="7772400" cy="640080"/>
+            <a:off x="685800" y="3108960"/>
+            <a:ext cx="7818120" cy="521208"/>
           </a:xfrm>
           <a:prstGeom prst="rect">
             <a:avLst/>
@@ -3447,7 +5715,7 @@
               <a:buNone/>
             </a:pPr>
             <a:r>
-              <a:rPr lang="en-US" sz="1300" dirty="0">
+              <a:rPr lang="en-US" sz="1200" dirty="0">
                 <a:solidFill>
                   <a:srgbClr val="1A1A2E"/>
                 </a:solidFill>
@@ -3455,22 +5723,69 @@
                 <a:ea typeface="Calibri" pitchFamily="34" charset="-122"/>
                 <a:cs typeface="Calibri" pitchFamily="34" charset="-120"/>
               </a:rPr>
-              <a:t>Listes déroulantes pour les clés étrangères</a:t>
-            </a:r>
-            <a:endParaRPr lang="en-US" sz="1300" dirty="0"/>
-          </a:p>
-        </p:txBody>
-      </p:sp>
-      <p:sp>
-        <p:nvSpPr>
-          <p:cNvPr id="19" name="Text 17"/>
-          <p:cNvSpPr/>
-          <p:nvPr/>
-        </p:nvSpPr>
-        <p:spPr>
-          <a:xfrm>
-            <a:off x="8229600" y="4754880"/>
-            <a:ext cx="731520" cy="274320"/>
+              <a:t>❌ description VARCHAR(10) → ✅ description TEXT (10 car. c'est trop court)</a:t>
+            </a:r>
+            <a:endParaRPr lang="en-US" sz="1200" dirty="0"/>
+          </a:p>
+        </p:txBody>
+      </p:sp>
+      <p:sp>
+        <p:nvSpPr>
+          <p:cNvPr id="19" name="Shape 17"/>
+          <p:cNvSpPr/>
+          <p:nvPr/>
+        </p:nvSpPr>
+        <p:spPr>
+          <a:xfrm>
+            <a:off x="457200" y="3657600"/>
+            <a:ext cx="8229600" cy="521208"/>
+          </a:xfrm>
+          <a:prstGeom prst="rect">
+            <a:avLst/>
+          </a:prstGeom>
+          <a:solidFill>
+            <a:srgbClr val="E8F5E9"/>
+          </a:solidFill>
+          <a:ln/>
+          <a:effectLst>
+            <a:outerShdw sx="100000" sy="100000" kx="0" ky="0" algn="bl" rotWithShape="0" blurRad="50800" dist="25400" dir="8100000">
+              <a:srgbClr val="000000">
+                <a:alpha val="12000"/>
+              </a:srgbClr>
+            </a:outerShdw>
+          </a:effectLst>
+        </p:spPr>
+      </p:sp>
+      <p:sp>
+        <p:nvSpPr>
+          <p:cNvPr id="20" name="Shape 18"/>
+          <p:cNvSpPr/>
+          <p:nvPr/>
+        </p:nvSpPr>
+        <p:spPr>
+          <a:xfrm>
+            <a:off x="457200" y="3657600"/>
+            <a:ext cx="45720" cy="521208"/>
+          </a:xfrm>
+          <a:prstGeom prst="rect">
+            <a:avLst/>
+          </a:prstGeom>
+          <a:solidFill>
+            <a:srgbClr val="2E7D32"/>
+          </a:solidFill>
+          <a:ln/>
+        </p:spPr>
+      </p:sp>
+      <p:sp>
+        <p:nvSpPr>
+          <p:cNvPr id="21" name="Text 19"/>
+          <p:cNvSpPr/>
+          <p:nvPr/>
+        </p:nvSpPr>
+        <p:spPr>
+          <a:xfrm>
+            <a:off x="685800" y="3657600"/>
+            <a:ext cx="7818120" cy="521208"/>
           </a:xfrm>
           <a:prstGeom prst="rect">
             <a:avLst/>
@@ -3482,21 +5797,21 @@
           <a:bodyPr wrap="square" lIns="0" tIns="0" rIns="0" bIns="0" rtlCol="0" anchor="ctr"/>
           <a:lstStyle/>
           <a:p>
-            <a:pPr algn="r" indent="0" marL="0">
+            <a:pPr indent="0" marL="0">
               <a:buNone/>
             </a:pPr>
             <a:r>
-              <a:rPr lang="en-US" sz="900" dirty="0">
+              <a:rPr lang="en-US" sz="1200" dirty="0">
                 <a:solidFill>
-                  <a:srgbClr val="AAAAAA"/>
+                  <a:srgbClr val="1A1A2E"/>
                 </a:solidFill>
                 <a:latin typeface="Calibri" pitchFamily="34" charset="0"/>
                 <a:ea typeface="Calibri" pitchFamily="34" charset="-122"/>
                 <a:cs typeface="Calibri" pitchFamily="34" charset="-120"/>
               </a:rPr>
-              <a:t>4/6</a:t>
-            </a:r>
-            <a:endParaRPr lang="en-US" sz="900" dirty="0"/>
+              <a:t>❌ montant FLOAT → ✅ montant DECIMAL(10,2) (CHF = montant exact)</a:t>
+            </a:r>
+            <a:endParaRPr lang="en-US" sz="1200" dirty="0"/>
           </a:p>
         </p:txBody>
       </p:sp>
@@ -3541,7 +5856,7 @@
         <p:spPr>
           <a:xfrm>
             <a:off x="0" y="0"/>
-            <a:ext cx="9144000" cy="73152"/>
+            <a:ext cx="9144000" cy="54864"/>
           </a:xfrm>
           <a:prstGeom prst="rect">
             <a:avLst/>
@@ -3560,8 +5875,8 @@
         </p:nvSpPr>
         <p:spPr>
           <a:xfrm>
-            <a:off x="457200" y="228600"/>
-            <a:ext cx="8229600" cy="640080"/>
+            <a:off x="457200" y="182880"/>
+            <a:ext cx="8229600" cy="594360"/>
           </a:xfrm>
           <a:prstGeom prst="rect">
             <a:avLst/>
@@ -3577,7 +5892,7 @@
               <a:buNone/>
             </a:pPr>
             <a:r>
-              <a:rPr lang="en-US" sz="2600" b="1" dirty="0">
+              <a:rPr lang="en-US" sz="2400" b="1" dirty="0">
                 <a:solidFill>
                   <a:srgbClr val="1B5E20"/>
                 </a:solidFill>
@@ -3585,9 +5900,9 @@
                 <a:ea typeface="Trebuchet MS" pitchFamily="34" charset="-122"/>
                 <a:cs typeface="Trebuchet MS" pitchFamily="34" charset="-120"/>
               </a:rPr>
-              <a:t>Sécurité dès la conception + BDD OO</a:t>
-            </a:r>
-            <a:endParaRPr lang="en-US" sz="2600" dirty="0"/>
+              <a:t>Contraintes à prévoir dans le MPD</a:t>
+            </a:r>
+            <a:endParaRPr lang="en-US" sz="2400" dirty="0"/>
           </a:p>
         </p:txBody>
       </p:sp>
@@ -3599,8 +5914,8 @@
         </p:nvSpPr>
         <p:spPr>
           <a:xfrm>
-            <a:off x="457200" y="1051560"/>
-            <a:ext cx="8229600" cy="640080"/>
+            <a:off x="457200" y="914400"/>
+            <a:ext cx="8229600" cy="521208"/>
           </a:xfrm>
           <a:prstGeom prst="rect">
             <a:avLst/>
@@ -3626,8 +5941,8 @@
         </p:nvSpPr>
         <p:spPr>
           <a:xfrm>
-            <a:off x="457200" y="1051560"/>
-            <a:ext cx="54864" cy="640080"/>
+            <a:off x="457200" y="914400"/>
+            <a:ext cx="45720" cy="521208"/>
           </a:xfrm>
           <a:prstGeom prst="rect">
             <a:avLst/>
@@ -3646,8 +5961,8 @@
         </p:nvSpPr>
         <p:spPr>
           <a:xfrm>
-            <a:off x="731520" y="1051560"/>
-            <a:ext cx="7772400" cy="640080"/>
+            <a:off x="685800" y="914400"/>
+            <a:ext cx="7818120" cy="521208"/>
           </a:xfrm>
           <a:prstGeom prst="rect">
             <a:avLst/>
@@ -3663,7 +5978,437 @@
               <a:buNone/>
             </a:pPr>
             <a:r>
-              <a:rPr lang="en-US" sz="1300" dirty="0">
+              <a:rPr lang="en-US" sz="1000" dirty="0">
+                <a:solidFill>
+                  <a:srgbClr val="1B5E20"/>
+                </a:solidFill>
+                <a:latin typeface="JetBrains Mono" pitchFamily="34" charset="0"/>
+                <a:ea typeface="JetBrains Mono" pitchFamily="34" charset="-122"/>
+                <a:cs typeface="JetBrains Mono" pitchFamily="34" charset="-120"/>
+              </a:rPr>
+              <a:t>NOT NULL : nom, email, date_inscription (obligatoires)</a:t>
+            </a:r>
+            <a:endParaRPr lang="en-US" sz="1000" dirty="0"/>
+          </a:p>
+        </p:txBody>
+      </p:sp>
+      <p:sp>
+        <p:nvSpPr>
+          <p:cNvPr id="7" name="Shape 5"/>
+          <p:cNvSpPr/>
+          <p:nvPr/>
+        </p:nvSpPr>
+        <p:spPr>
+          <a:xfrm>
+            <a:off x="457200" y="1463040"/>
+            <a:ext cx="8229600" cy="521208"/>
+          </a:xfrm>
+          <a:prstGeom prst="rect">
+            <a:avLst/>
+          </a:prstGeom>
+          <a:solidFill>
+            <a:srgbClr val="E8F5E9"/>
+          </a:solidFill>
+          <a:ln/>
+          <a:effectLst>
+            <a:outerShdw sx="100000" sy="100000" kx="0" ky="0" algn="bl" rotWithShape="0" blurRad="50800" dist="25400" dir="8100000">
+              <a:srgbClr val="000000">
+                <a:alpha val="12000"/>
+              </a:srgbClr>
+            </a:outerShdw>
+          </a:effectLst>
+        </p:spPr>
+      </p:sp>
+      <p:sp>
+        <p:nvSpPr>
+          <p:cNvPr id="8" name="Shape 6"/>
+          <p:cNvSpPr/>
+          <p:nvPr/>
+        </p:nvSpPr>
+        <p:spPr>
+          <a:xfrm>
+            <a:off x="457200" y="1463040"/>
+            <a:ext cx="45720" cy="521208"/>
+          </a:xfrm>
+          <a:prstGeom prst="rect">
+            <a:avLst/>
+          </a:prstGeom>
+          <a:solidFill>
+            <a:srgbClr val="2E7D32"/>
+          </a:solidFill>
+          <a:ln/>
+        </p:spPr>
+      </p:sp>
+      <p:sp>
+        <p:nvSpPr>
+          <p:cNvPr id="9" name="Text 7"/>
+          <p:cNvSpPr/>
+          <p:nvPr/>
+        </p:nvSpPr>
+        <p:spPr>
+          <a:xfrm>
+            <a:off x="685800" y="1463040"/>
+            <a:ext cx="7818120" cy="521208"/>
+          </a:xfrm>
+          <a:prstGeom prst="rect">
+            <a:avLst/>
+          </a:prstGeom>
+          <a:noFill/>
+          <a:ln/>
+        </p:spPr>
+        <p:txBody>
+          <a:bodyPr wrap="square" lIns="0" tIns="0" rIns="0" bIns="0" rtlCol="0" anchor="ctr"/>
+          <a:lstStyle/>
+          <a:p>
+            <a:pPr indent="0" marL="0">
+              <a:buNone/>
+            </a:pPr>
+            <a:r>
+              <a:rPr lang="en-US" sz="1000" dirty="0">
+                <a:solidFill>
+                  <a:srgbClr val="1B5E20"/>
+                </a:solidFill>
+                <a:latin typeface="JetBrains Mono" pitchFamily="34" charset="0"/>
+                <a:ea typeface="JetBrains Mono" pitchFamily="34" charset="-122"/>
+                <a:cs typeface="JetBrains Mono" pitchFamily="34" charset="-120"/>
+              </a:rPr>
+              <a:t>UNIQUE : email (pas de doublon)</a:t>
+            </a:r>
+            <a:endParaRPr lang="en-US" sz="1000" dirty="0"/>
+          </a:p>
+        </p:txBody>
+      </p:sp>
+      <p:sp>
+        <p:nvSpPr>
+          <p:cNvPr id="10" name="Shape 8"/>
+          <p:cNvSpPr/>
+          <p:nvPr/>
+        </p:nvSpPr>
+        <p:spPr>
+          <a:xfrm>
+            <a:off x="457200" y="2011680"/>
+            <a:ext cx="8229600" cy="521208"/>
+          </a:xfrm>
+          <a:prstGeom prst="rect">
+            <a:avLst/>
+          </a:prstGeom>
+          <a:solidFill>
+            <a:srgbClr val="FFFFFF"/>
+          </a:solidFill>
+          <a:ln/>
+          <a:effectLst>
+            <a:outerShdw sx="100000" sy="100000" kx="0" ky="0" algn="bl" rotWithShape="0" blurRad="50800" dist="25400" dir="8100000">
+              <a:srgbClr val="000000">
+                <a:alpha val="12000"/>
+              </a:srgbClr>
+            </a:outerShdw>
+          </a:effectLst>
+        </p:spPr>
+      </p:sp>
+      <p:sp>
+        <p:nvSpPr>
+          <p:cNvPr id="11" name="Shape 9"/>
+          <p:cNvSpPr/>
+          <p:nvPr/>
+        </p:nvSpPr>
+        <p:spPr>
+          <a:xfrm>
+            <a:off x="457200" y="2011680"/>
+            <a:ext cx="45720" cy="521208"/>
+          </a:xfrm>
+          <a:prstGeom prst="rect">
+            <a:avLst/>
+          </a:prstGeom>
+          <a:solidFill>
+            <a:srgbClr val="2E7D32"/>
+          </a:solidFill>
+          <a:ln/>
+        </p:spPr>
+      </p:sp>
+      <p:sp>
+        <p:nvSpPr>
+          <p:cNvPr id="12" name="Text 10"/>
+          <p:cNvSpPr/>
+          <p:nvPr/>
+        </p:nvSpPr>
+        <p:spPr>
+          <a:xfrm>
+            <a:off x="685800" y="2011680"/>
+            <a:ext cx="7818120" cy="521208"/>
+          </a:xfrm>
+          <a:prstGeom prst="rect">
+            <a:avLst/>
+          </a:prstGeom>
+          <a:noFill/>
+          <a:ln/>
+        </p:spPr>
+        <p:txBody>
+          <a:bodyPr wrap="square" lIns="0" tIns="0" rIns="0" bIns="0" rtlCol="0" anchor="ctr"/>
+          <a:lstStyle/>
+          <a:p>
+            <a:pPr indent="0" marL="0">
+              <a:buNone/>
+            </a:pPr>
+            <a:r>
+              <a:rPr lang="en-US" sz="1000" dirty="0">
+                <a:solidFill>
+                  <a:srgbClr val="1B5E20"/>
+                </a:solidFill>
+                <a:latin typeface="JetBrains Mono" pitchFamily="34" charset="0"/>
+                <a:ea typeface="JetBrains Mono" pitchFamily="34" charset="-122"/>
+                <a:cs typeface="JetBrains Mono" pitchFamily="34" charset="-120"/>
+              </a:rPr>
+              <a:t>CHECK : prix &gt;= 0, capacite &gt; 0, tarif &gt; 0, heure_fin &gt; heure_debut</a:t>
+            </a:r>
+            <a:endParaRPr lang="en-US" sz="1000" dirty="0"/>
+          </a:p>
+        </p:txBody>
+      </p:sp>
+      <p:sp>
+        <p:nvSpPr>
+          <p:cNvPr id="13" name="Shape 11"/>
+          <p:cNvSpPr/>
+          <p:nvPr/>
+        </p:nvSpPr>
+        <p:spPr>
+          <a:xfrm>
+            <a:off x="457200" y="2560320"/>
+            <a:ext cx="8229600" cy="521208"/>
+          </a:xfrm>
+          <a:prstGeom prst="rect">
+            <a:avLst/>
+          </a:prstGeom>
+          <a:solidFill>
+            <a:srgbClr val="E8F5E9"/>
+          </a:solidFill>
+          <a:ln/>
+          <a:effectLst>
+            <a:outerShdw sx="100000" sy="100000" kx="0" ky="0" algn="bl" rotWithShape="0" blurRad="50800" dist="25400" dir="8100000">
+              <a:srgbClr val="000000">
+                <a:alpha val="12000"/>
+              </a:srgbClr>
+            </a:outerShdw>
+          </a:effectLst>
+        </p:spPr>
+      </p:sp>
+      <p:sp>
+        <p:nvSpPr>
+          <p:cNvPr id="14" name="Shape 12"/>
+          <p:cNvSpPr/>
+          <p:nvPr/>
+        </p:nvSpPr>
+        <p:spPr>
+          <a:xfrm>
+            <a:off x="457200" y="2560320"/>
+            <a:ext cx="45720" cy="521208"/>
+          </a:xfrm>
+          <a:prstGeom prst="rect">
+            <a:avLst/>
+          </a:prstGeom>
+          <a:solidFill>
+            <a:srgbClr val="2E7D32"/>
+          </a:solidFill>
+          <a:ln/>
+        </p:spPr>
+      </p:sp>
+      <p:sp>
+        <p:nvSpPr>
+          <p:cNvPr id="15" name="Text 13"/>
+          <p:cNvSpPr/>
+          <p:nvPr/>
+        </p:nvSpPr>
+        <p:spPr>
+          <a:xfrm>
+            <a:off x="685800" y="2560320"/>
+            <a:ext cx="7818120" cy="521208"/>
+          </a:xfrm>
+          <a:prstGeom prst="rect">
+            <a:avLst/>
+          </a:prstGeom>
+          <a:noFill/>
+          <a:ln/>
+        </p:spPr>
+        <p:txBody>
+          <a:bodyPr wrap="square" lIns="0" tIns="0" rIns="0" bIns="0" rtlCol="0" anchor="ctr"/>
+          <a:lstStyle/>
+          <a:p>
+            <a:pPr indent="0" marL="0">
+              <a:buNone/>
+            </a:pPr>
+            <a:r>
+              <a:rPr lang="en-US" sz="1000" dirty="0">
+                <a:solidFill>
+                  <a:srgbClr val="1B5E20"/>
+                </a:solidFill>
+                <a:latin typeface="JetBrains Mono" pitchFamily="34" charset="0"/>
+                <a:ea typeface="JetBrains Mono" pitchFamily="34" charset="-122"/>
+                <a:cs typeface="JetBrains Mono" pitchFamily="34" charset="-120"/>
+              </a:rPr>
+              <a:t>DEFAULT : actif = TRUE, date_inscription = CURDATE(), statut = 'planifiee'</a:t>
+            </a:r>
+            <a:endParaRPr lang="en-US" sz="1000" dirty="0"/>
+          </a:p>
+        </p:txBody>
+      </p:sp>
+      <p:sp>
+        <p:nvSpPr>
+          <p:cNvPr id="16" name="Shape 14"/>
+          <p:cNvSpPr/>
+          <p:nvPr/>
+        </p:nvSpPr>
+        <p:spPr>
+          <a:xfrm>
+            <a:off x="457200" y="3108960"/>
+            <a:ext cx="8229600" cy="521208"/>
+          </a:xfrm>
+          <a:prstGeom prst="rect">
+            <a:avLst/>
+          </a:prstGeom>
+          <a:solidFill>
+            <a:srgbClr val="FFFFFF"/>
+          </a:solidFill>
+          <a:ln/>
+          <a:effectLst>
+            <a:outerShdw sx="100000" sy="100000" kx="0" ky="0" algn="bl" rotWithShape="0" blurRad="50800" dist="25400" dir="8100000">
+              <a:srgbClr val="000000">
+                <a:alpha val="12000"/>
+              </a:srgbClr>
+            </a:outerShdw>
+          </a:effectLst>
+        </p:spPr>
+      </p:sp>
+      <p:sp>
+        <p:nvSpPr>
+          <p:cNvPr id="17" name="Shape 15"/>
+          <p:cNvSpPr/>
+          <p:nvPr/>
+        </p:nvSpPr>
+        <p:spPr>
+          <a:xfrm>
+            <a:off x="457200" y="3108960"/>
+            <a:ext cx="45720" cy="521208"/>
+          </a:xfrm>
+          <a:prstGeom prst="rect">
+            <a:avLst/>
+          </a:prstGeom>
+          <a:solidFill>
+            <a:srgbClr val="2E7D32"/>
+          </a:solidFill>
+          <a:ln/>
+        </p:spPr>
+      </p:sp>
+      <p:sp>
+        <p:nvSpPr>
+          <p:cNvPr id="18" name="Text 16"/>
+          <p:cNvSpPr/>
+          <p:nvPr/>
+        </p:nvSpPr>
+        <p:spPr>
+          <a:xfrm>
+            <a:off x="685800" y="3108960"/>
+            <a:ext cx="7818120" cy="521208"/>
+          </a:xfrm>
+          <a:prstGeom prst="rect">
+            <a:avLst/>
+          </a:prstGeom>
+          <a:noFill/>
+          <a:ln/>
+        </p:spPr>
+        <p:txBody>
+          <a:bodyPr wrap="square" lIns="0" tIns="0" rIns="0" bIns="0" rtlCol="0" anchor="ctr"/>
+          <a:lstStyle/>
+          <a:p>
+            <a:pPr indent="0" marL="0">
+              <a:buNone/>
+            </a:pPr>
+            <a:r>
+              <a:rPr lang="en-US" sz="1000" dirty="0">
+                <a:solidFill>
+                  <a:srgbClr val="1B5E20"/>
+                </a:solidFill>
+                <a:latin typeface="JetBrains Mono" pitchFamily="34" charset="0"/>
+                <a:ea typeface="JetBrains Mono" pitchFamily="34" charset="-122"/>
+                <a:cs typeface="JetBrains Mono" pitchFamily="34" charset="-120"/>
+              </a:rPr>
+              <a:t>AUTO_INCREMENT : tous les id</a:t>
+            </a:r>
+            <a:endParaRPr lang="en-US" sz="1000" dirty="0"/>
+          </a:p>
+        </p:txBody>
+      </p:sp>
+      <p:sp>
+        <p:nvSpPr>
+          <p:cNvPr id="19" name="Shape 17"/>
+          <p:cNvSpPr/>
+          <p:nvPr/>
+        </p:nvSpPr>
+        <p:spPr>
+          <a:xfrm>
+            <a:off x="457200" y="3657600"/>
+            <a:ext cx="8229600" cy="521208"/>
+          </a:xfrm>
+          <a:prstGeom prst="rect">
+            <a:avLst/>
+          </a:prstGeom>
+          <a:solidFill>
+            <a:srgbClr val="E8F5E9"/>
+          </a:solidFill>
+          <a:ln/>
+          <a:effectLst>
+            <a:outerShdw sx="100000" sy="100000" kx="0" ky="0" algn="bl" rotWithShape="0" blurRad="50800" dist="25400" dir="8100000">
+              <a:srgbClr val="000000">
+                <a:alpha val="12000"/>
+              </a:srgbClr>
+            </a:outerShdw>
+          </a:effectLst>
+        </p:spPr>
+      </p:sp>
+      <p:sp>
+        <p:nvSpPr>
+          <p:cNvPr id="20" name="Shape 18"/>
+          <p:cNvSpPr/>
+          <p:nvPr/>
+        </p:nvSpPr>
+        <p:spPr>
+          <a:xfrm>
+            <a:off x="457200" y="3657600"/>
+            <a:ext cx="45720" cy="521208"/>
+          </a:xfrm>
+          <a:prstGeom prst="rect">
+            <a:avLst/>
+          </a:prstGeom>
+          <a:solidFill>
+            <a:srgbClr val="2E7D32"/>
+          </a:solidFill>
+          <a:ln/>
+        </p:spPr>
+      </p:sp>
+      <p:sp>
+        <p:nvSpPr>
+          <p:cNvPr id="21" name="Text 19"/>
+          <p:cNvSpPr/>
+          <p:nvPr/>
+        </p:nvSpPr>
+        <p:spPr>
+          <a:xfrm>
+            <a:off x="685800" y="3657600"/>
+            <a:ext cx="7818120" cy="521208"/>
+          </a:xfrm>
+          <a:prstGeom prst="rect">
+            <a:avLst/>
+          </a:prstGeom>
+          <a:noFill/>
+          <a:ln/>
+        </p:spPr>
+        <p:txBody>
+          <a:bodyPr wrap="square" lIns="0" tIns="0" rIns="0" bIns="0" rtlCol="0" anchor="ctr"/>
+          <a:lstStyle/>
+          <a:p>
+            <a:pPr indent="0" marL="0">
+              <a:buNone/>
+            </a:pPr>
+            <a:r>
+              <a:rPr lang="en-US" sz="1200" dirty="0">
                 <a:solidFill>
                   <a:srgbClr val="1A1A2E"/>
                 </a:solidFill>
@@ -3671,28 +6416,28 @@
                 <a:ea typeface="Calibri" pitchFamily="34" charset="-122"/>
                 <a:cs typeface="Calibri" pitchFamily="34" charset="-120"/>
               </a:rPr>
-              <a:t>Qui accède à quoi ? Matrice de droits (admin, ingénieur, comptable, réception)</a:t>
-            </a:r>
-            <a:endParaRPr lang="en-US" sz="1300" dirty="0"/>
-          </a:p>
-        </p:txBody>
-      </p:sp>
-      <p:sp>
-        <p:nvSpPr>
-          <p:cNvPr id="7" name="Shape 5"/>
-          <p:cNvSpPr/>
-          <p:nvPr/>
-        </p:nvSpPr>
-        <p:spPr>
-          <a:xfrm>
-            <a:off x="457200" y="1783080"/>
-            <a:ext cx="8229600" cy="640080"/>
-          </a:xfrm>
-          <a:prstGeom prst="rect">
-            <a:avLst/>
-          </a:prstGeom>
-          <a:solidFill>
-            <a:srgbClr val="E8F5E9"/>
+              <a:t>FK + CASCADE : album→artiste (RESTRICT), equipement→salle (SET NULL)</a:t>
+            </a:r>
+            <a:endParaRPr lang="en-US" sz="1200" dirty="0"/>
+          </a:p>
+        </p:txBody>
+      </p:sp>
+      <p:sp>
+        <p:nvSpPr>
+          <p:cNvPr id="22" name="Shape 20"/>
+          <p:cNvSpPr/>
+          <p:nvPr/>
+        </p:nvSpPr>
+        <p:spPr>
+          <a:xfrm>
+            <a:off x="457200" y="4206240"/>
+            <a:ext cx="8229600" cy="521208"/>
+          </a:xfrm>
+          <a:prstGeom prst="rect">
+            <a:avLst/>
+          </a:prstGeom>
+          <a:solidFill>
+            <a:srgbClr val="FFFFFF"/>
           </a:solidFill>
           <a:ln/>
           <a:effectLst>
@@ -3706,14 +6451,14 @@
       </p:sp>
       <p:sp>
         <p:nvSpPr>
-          <p:cNvPr id="8" name="Shape 6"/>
-          <p:cNvSpPr/>
-          <p:nvPr/>
-        </p:nvSpPr>
-        <p:spPr>
-          <a:xfrm>
-            <a:off x="457200" y="1783080"/>
-            <a:ext cx="54864" cy="640080"/>
+          <p:cNvPr id="23" name="Shape 21"/>
+          <p:cNvSpPr/>
+          <p:nvPr/>
+        </p:nvSpPr>
+        <p:spPr>
+          <a:xfrm>
+            <a:off x="457200" y="4206240"/>
+            <a:ext cx="45720" cy="521208"/>
           </a:xfrm>
           <a:prstGeom prst="rect">
             <a:avLst/>
@@ -3726,14 +6471,14 @@
       </p:sp>
       <p:sp>
         <p:nvSpPr>
-          <p:cNvPr id="9" name="Text 7"/>
-          <p:cNvSpPr/>
-          <p:nvPr/>
-        </p:nvSpPr>
-        <p:spPr>
-          <a:xfrm>
-            <a:off x="731520" y="1783080"/>
-            <a:ext cx="7772400" cy="640080"/>
+          <p:cNvPr id="24" name="Text 22"/>
+          <p:cNvSpPr/>
+          <p:nvPr/>
+        </p:nvSpPr>
+        <p:spPr>
+          <a:xfrm>
+            <a:off x="685800" y="4206240"/>
+            <a:ext cx="7818120" cy="521208"/>
           </a:xfrm>
           <a:prstGeom prst="rect">
             <a:avLst/>
@@ -3749,93 +6494,7 @@
               <a:buNone/>
             </a:pPr>
             <a:r>
-              <a:rPr lang="en-US" sz="1100" dirty="0">
-                <a:solidFill>
-                  <a:srgbClr val="1B5E20"/>
-                </a:solidFill>
-                <a:latin typeface="JetBrains Mono" pitchFamily="34" charset="0"/>
-                <a:ea typeface="JetBrains Mono" pitchFamily="34" charset="-122"/>
-                <a:cs typeface="JetBrains Mono" pitchFamily="34" charset="-120"/>
-              </a:rPr>
-              <a:t>Données sensibles : emails, téléphones → chiffrement possible</a:t>
-            </a:r>
-            <a:endParaRPr lang="en-US" sz="1100" dirty="0"/>
-          </a:p>
-        </p:txBody>
-      </p:sp>
-      <p:sp>
-        <p:nvSpPr>
-          <p:cNvPr id="10" name="Shape 8"/>
-          <p:cNvSpPr/>
-          <p:nvPr/>
-        </p:nvSpPr>
-        <p:spPr>
-          <a:xfrm>
-            <a:off x="457200" y="2514600"/>
-            <a:ext cx="8229600" cy="640080"/>
-          </a:xfrm>
-          <a:prstGeom prst="rect">
-            <a:avLst/>
-          </a:prstGeom>
-          <a:solidFill>
-            <a:srgbClr val="FFFFFF"/>
-          </a:solidFill>
-          <a:ln/>
-          <a:effectLst>
-            <a:outerShdw sx="100000" sy="100000" kx="0" ky="0" algn="bl" rotWithShape="0" blurRad="50800" dist="25400" dir="8100000">
-              <a:srgbClr val="000000">
-                <a:alpha val="12000"/>
-              </a:srgbClr>
-            </a:outerShdw>
-          </a:effectLst>
-        </p:spPr>
-      </p:sp>
-      <p:sp>
-        <p:nvSpPr>
-          <p:cNvPr id="11" name="Shape 9"/>
-          <p:cNvSpPr/>
-          <p:nvPr/>
-        </p:nvSpPr>
-        <p:spPr>
-          <a:xfrm>
-            <a:off x="457200" y="2514600"/>
-            <a:ext cx="54864" cy="640080"/>
-          </a:xfrm>
-          <a:prstGeom prst="rect">
-            <a:avLst/>
-          </a:prstGeom>
-          <a:solidFill>
-            <a:srgbClr val="2E7D32"/>
-          </a:solidFill>
-          <a:ln/>
-        </p:spPr>
-      </p:sp>
-      <p:sp>
-        <p:nvSpPr>
-          <p:cNvPr id="12" name="Text 10"/>
-          <p:cNvSpPr/>
-          <p:nvPr/>
-        </p:nvSpPr>
-        <p:spPr>
-          <a:xfrm>
-            <a:off x="731520" y="2514600"/>
-            <a:ext cx="7772400" cy="640080"/>
-          </a:xfrm>
-          <a:prstGeom prst="rect">
-            <a:avLst/>
-          </a:prstGeom>
-          <a:noFill/>
-          <a:ln/>
-        </p:spPr>
-        <p:txBody>
-          <a:bodyPr wrap="square" lIns="0" tIns="0" rIns="0" bIns="0" rtlCol="0" anchor="ctr"/>
-          <a:lstStyle/>
-          <a:p>
-            <a:pPr indent="0" marL="0">
-              <a:buNone/>
-            </a:pPr>
-            <a:r>
-              <a:rPr lang="en-US" sz="1300" dirty="0">
+              <a:rPr lang="en-US" sz="1200" dirty="0">
                 <a:solidFill>
                   <a:srgbClr val="1A1A2E"/>
                 </a:solidFill>
@@ -3843,220 +6502,9 @@
                 <a:ea typeface="Calibri" pitchFamily="34" charset="-122"/>
                 <a:cs typeface="Calibri" pitchFamily="34" charset="-120"/>
               </a:rPr>
-              <a:t>Aperçu BDD orientées objet : objets avec attributs + méthodes</a:t>
-            </a:r>
-            <a:endParaRPr lang="en-US" sz="1300" dirty="0"/>
-          </a:p>
-        </p:txBody>
-      </p:sp>
-      <p:sp>
-        <p:nvSpPr>
-          <p:cNvPr id="13" name="Shape 11"/>
-          <p:cNvSpPr/>
-          <p:nvPr/>
-        </p:nvSpPr>
-        <p:spPr>
-          <a:xfrm>
-            <a:off x="457200" y="3246120"/>
-            <a:ext cx="8229600" cy="640080"/>
-          </a:xfrm>
-          <a:prstGeom prst="rect">
-            <a:avLst/>
-          </a:prstGeom>
-          <a:solidFill>
-            <a:srgbClr val="E8F5E9"/>
-          </a:solidFill>
-          <a:ln/>
-          <a:effectLst>
-            <a:outerShdw sx="100000" sy="100000" kx="0" ky="0" algn="bl" rotWithShape="0" blurRad="50800" dist="25400" dir="8100000">
-              <a:srgbClr val="000000">
-                <a:alpha val="12000"/>
-              </a:srgbClr>
-            </a:outerShdw>
-          </a:effectLst>
-        </p:spPr>
-      </p:sp>
-      <p:sp>
-        <p:nvSpPr>
-          <p:cNvPr id="14" name="Shape 12"/>
-          <p:cNvSpPr/>
-          <p:nvPr/>
-        </p:nvSpPr>
-        <p:spPr>
-          <a:xfrm>
-            <a:off x="457200" y="3246120"/>
-            <a:ext cx="54864" cy="640080"/>
-          </a:xfrm>
-          <a:prstGeom prst="rect">
-            <a:avLst/>
-          </a:prstGeom>
-          <a:solidFill>
-            <a:srgbClr val="2E7D32"/>
-          </a:solidFill>
-          <a:ln/>
-        </p:spPr>
-      </p:sp>
-      <p:sp>
-        <p:nvSpPr>
-          <p:cNvPr id="15" name="Text 13"/>
-          <p:cNvSpPr/>
-          <p:nvPr/>
-        </p:nvSpPr>
-        <p:spPr>
-          <a:xfrm>
-            <a:off x="731520" y="3246120"/>
-            <a:ext cx="7772400" cy="640080"/>
-          </a:xfrm>
-          <a:prstGeom prst="rect">
-            <a:avLst/>
-          </a:prstGeom>
-          <a:noFill/>
-          <a:ln/>
-        </p:spPr>
-        <p:txBody>
-          <a:bodyPr wrap="square" lIns="0" tIns="0" rIns="0" bIns="0" rtlCol="0" anchor="ctr"/>
-          <a:lstStyle/>
-          <a:p>
-            <a:pPr indent="0" marL="0">
-              <a:buNone/>
-            </a:pPr>
-            <a:r>
-              <a:rPr lang="en-US" sz="1300" dirty="0">
-                <a:solidFill>
-                  <a:srgbClr val="1A1A2E"/>
-                </a:solidFill>
-                <a:latin typeface="Calibri" pitchFamily="34" charset="0"/>
-                <a:ea typeface="Calibri" pitchFamily="34" charset="-122"/>
-                <a:cs typeface="Calibri" pitchFamily="34" charset="-120"/>
-              </a:rPr>
-              <a:t>UML class diagrams : plus proches de l'OO que Merise</a:t>
-            </a:r>
-            <a:endParaRPr lang="en-US" sz="1300" dirty="0"/>
-          </a:p>
-        </p:txBody>
-      </p:sp>
-      <p:sp>
-        <p:nvSpPr>
-          <p:cNvPr id="16" name="Shape 14"/>
-          <p:cNvSpPr/>
-          <p:nvPr/>
-        </p:nvSpPr>
-        <p:spPr>
-          <a:xfrm>
-            <a:off x="457200" y="3977640"/>
-            <a:ext cx="8229600" cy="640080"/>
-          </a:xfrm>
-          <a:prstGeom prst="rect">
-            <a:avLst/>
-          </a:prstGeom>
-          <a:solidFill>
-            <a:srgbClr val="FFFFFF"/>
-          </a:solidFill>
-          <a:ln/>
-          <a:effectLst>
-            <a:outerShdw sx="100000" sy="100000" kx="0" ky="0" algn="bl" rotWithShape="0" blurRad="50800" dist="25400" dir="8100000">
-              <a:srgbClr val="000000">
-                <a:alpha val="12000"/>
-              </a:srgbClr>
-            </a:outerShdw>
-          </a:effectLst>
-        </p:spPr>
-      </p:sp>
-      <p:sp>
-        <p:nvSpPr>
-          <p:cNvPr id="17" name="Shape 15"/>
-          <p:cNvSpPr/>
-          <p:nvPr/>
-        </p:nvSpPr>
-        <p:spPr>
-          <a:xfrm>
-            <a:off x="457200" y="3977640"/>
-            <a:ext cx="54864" cy="640080"/>
-          </a:xfrm>
-          <a:prstGeom prst="rect">
-            <a:avLst/>
-          </a:prstGeom>
-          <a:solidFill>
-            <a:srgbClr val="2E7D32"/>
-          </a:solidFill>
-          <a:ln/>
-        </p:spPr>
-      </p:sp>
-      <p:sp>
-        <p:nvSpPr>
-          <p:cNvPr id="18" name="Text 16"/>
-          <p:cNvSpPr/>
-          <p:nvPr/>
-        </p:nvSpPr>
-        <p:spPr>
-          <a:xfrm>
-            <a:off x="731520" y="3977640"/>
-            <a:ext cx="7772400" cy="640080"/>
-          </a:xfrm>
-          <a:prstGeom prst="rect">
-            <a:avLst/>
-          </a:prstGeom>
-          <a:noFill/>
-          <a:ln/>
-        </p:spPr>
-        <p:txBody>
-          <a:bodyPr wrap="square" lIns="0" tIns="0" rIns="0" bIns="0" rtlCol="0" anchor="ctr"/>
-          <a:lstStyle/>
-          <a:p>
-            <a:pPr indent="0" marL="0">
-              <a:buNone/>
-            </a:pPr>
-            <a:r>
-              <a:rPr lang="en-US" sz="1300" dirty="0">
-                <a:solidFill>
-                  <a:srgbClr val="1A1A2E"/>
-                </a:solidFill>
-                <a:latin typeface="Calibri" pitchFamily="34" charset="0"/>
-                <a:ea typeface="Calibri" pitchFamily="34" charset="-122"/>
-                <a:cs typeface="Calibri" pitchFamily="34" charset="-120"/>
-              </a:rPr>
-              <a:t>D1 : évaluer l'efficacité du design complet de SwissSound</a:t>
-            </a:r>
-            <a:endParaRPr lang="en-US" sz="1300" dirty="0"/>
-          </a:p>
-        </p:txBody>
-      </p:sp>
-      <p:sp>
-        <p:nvSpPr>
-          <p:cNvPr id="19" name="Text 17"/>
-          <p:cNvSpPr/>
-          <p:nvPr/>
-        </p:nvSpPr>
-        <p:spPr>
-          <a:xfrm>
-            <a:off x="8229600" y="4754880"/>
-            <a:ext cx="731520" cy="274320"/>
-          </a:xfrm>
-          <a:prstGeom prst="rect">
-            <a:avLst/>
-          </a:prstGeom>
-          <a:noFill/>
-          <a:ln/>
-        </p:spPr>
-        <p:txBody>
-          <a:bodyPr wrap="square" lIns="0" tIns="0" rIns="0" bIns="0" rtlCol="0" anchor="ctr"/>
-          <a:lstStyle/>
-          <a:p>
-            <a:pPr algn="r" indent="0" marL="0">
-              <a:buNone/>
-            </a:pPr>
-            <a:r>
-              <a:rPr lang="en-US" sz="900" dirty="0">
-                <a:solidFill>
-                  <a:srgbClr val="AAAAAA"/>
-                </a:solidFill>
-                <a:latin typeface="Calibri" pitchFamily="34" charset="0"/>
-                <a:ea typeface="Calibri" pitchFamily="34" charset="-122"/>
-                <a:cs typeface="Calibri" pitchFamily="34" charset="-120"/>
-              </a:rPr>
-              <a:t>5/6</a:t>
-            </a:r>
-            <a:endParaRPr lang="en-US" sz="900" dirty="0"/>
+              <a:t>FK + RESTRICT : session→artiste (empêcher suppression si sessions)</a:t>
+            </a:r>
+            <a:endParaRPr lang="en-US" sz="1200" dirty="0"/>
           </a:p>
         </p:txBody>
       </p:sp>
@@ -4074,7 +6522,7 @@
     <p:bg>
       <p:bgPr>
         <a:solidFill>
-          <a:srgbClr val="1B5E20"/>
+          <a:srgbClr val="F5F7FA"/>
         </a:solidFill>
       </p:bgPr>
     </p:bg>
@@ -4092,40 +6540,36 @@
           <a:chExt cx="0" cy="0"/>
         </a:xfrm>
       </p:grpSpPr>
-      <p:pic>
-        <p:nvPicPr>
-          <p:cNvPr id="2" name="Image 0" descr="preencoded.png">    </p:cNvPr>
-          <p:cNvPicPr>
-            <a:picLocks noChangeAspect="1"/>
-          </p:cNvPicPr>
-          <p:nvPr/>
-        </p:nvPicPr>
-        <p:blipFill>
-          <a:blip r:embed="rId1"/>
-          <a:stretch>
-            <a:fillRect/>
-          </a:stretch>
-        </p:blipFill>
-        <p:spPr>
-          <a:xfrm>
-            <a:off x="4023360" y="457200"/>
-            <a:ext cx="1097280" cy="1097280"/>
-          </a:xfrm>
-          <a:prstGeom prst="rect">
-            <a:avLst/>
-          </a:prstGeom>
-        </p:spPr>
-      </p:pic>
-      <p:sp>
-        <p:nvSpPr>
-          <p:cNvPr id="3" name="Text 0"/>
-          <p:cNvSpPr/>
-          <p:nvPr/>
-        </p:nvSpPr>
-        <p:spPr>
-          <a:xfrm>
-            <a:off x="457200" y="1737360"/>
-            <a:ext cx="8229600" cy="548640"/>
+      <p:sp>
+        <p:nvSpPr>
+          <p:cNvPr id="2" name="Shape 0"/>
+          <p:cNvSpPr/>
+          <p:nvPr/>
+        </p:nvSpPr>
+        <p:spPr>
+          <a:xfrm>
+            <a:off x="0" y="0"/>
+            <a:ext cx="9144000" cy="54864"/>
+          </a:xfrm>
+          <a:prstGeom prst="rect">
+            <a:avLst/>
+          </a:prstGeom>
+          <a:solidFill>
+            <a:srgbClr val="2E7D32"/>
+          </a:solidFill>
+          <a:ln/>
+        </p:spPr>
+      </p:sp>
+      <p:sp>
+        <p:nvSpPr>
+          <p:cNvPr id="3" name="Text 1"/>
+          <p:cNvSpPr/>
+          <p:nvPr/>
+        </p:nvSpPr>
+        <p:spPr>
+          <a:xfrm>
+            <a:off x="457200" y="182880"/>
+            <a:ext cx="8229600" cy="594360"/>
           </a:xfrm>
           <a:prstGeom prst="rect">
             <a:avLst/>
@@ -4137,34 +6581,81 @@
           <a:bodyPr wrap="square" lIns="0" tIns="0" rIns="0" bIns="0" rtlCol="0" anchor="ctr"/>
           <a:lstStyle/>
           <a:p>
-            <a:pPr algn="ctr" indent="0" marL="0">
+            <a:pPr indent="0" marL="0">
               <a:buNone/>
             </a:pPr>
             <a:r>
-              <a:rPr lang="en-US" sz="2600" b="1" dirty="0">
+              <a:rPr lang="en-US" sz="2400" b="1" dirty="0">
                 <a:solidFill>
-                  <a:srgbClr val="FFFFFF"/>
+                  <a:srgbClr val="1B5E20"/>
                 </a:solidFill>
                 <a:latin typeface="Trebuchet MS" pitchFamily="34" charset="0"/>
                 <a:ea typeface="Trebuchet MS" pitchFamily="34" charset="-122"/>
                 <a:cs typeface="Trebuchet MS" pitchFamily="34" charset="-120"/>
               </a:rPr>
-              <a:t>🎮 Mini-jeu : Module 8</a:t>
-            </a:r>
-            <a:endParaRPr lang="en-US" sz="2600" dirty="0"/>
-          </a:p>
-        </p:txBody>
-      </p:sp>
-      <p:sp>
-        <p:nvSpPr>
-          <p:cNvPr id="4" name="Text 1"/>
-          <p:cNvSpPr/>
-          <p:nvPr/>
-        </p:nvSpPr>
-        <p:spPr>
-          <a:xfrm>
-            <a:off x="914400" y="2377440"/>
-            <a:ext cx="7315200" cy="457200"/>
+              <a:t>Conception d'interfaces pour SwissSound</a:t>
+            </a:r>
+            <a:endParaRPr lang="en-US" sz="2400" dirty="0"/>
+          </a:p>
+        </p:txBody>
+      </p:sp>
+      <p:sp>
+        <p:nvSpPr>
+          <p:cNvPr id="4" name="Shape 2"/>
+          <p:cNvSpPr/>
+          <p:nvPr/>
+        </p:nvSpPr>
+        <p:spPr>
+          <a:xfrm>
+            <a:off x="457200" y="914400"/>
+            <a:ext cx="8229600" cy="521208"/>
+          </a:xfrm>
+          <a:prstGeom prst="rect">
+            <a:avLst/>
+          </a:prstGeom>
+          <a:solidFill>
+            <a:srgbClr val="FFFFFF"/>
+          </a:solidFill>
+          <a:ln/>
+          <a:effectLst>
+            <a:outerShdw sx="100000" sy="100000" kx="0" ky="0" algn="bl" rotWithShape="0" blurRad="50800" dist="25400" dir="8100000">
+              <a:srgbClr val="000000">
+                <a:alpha val="12000"/>
+              </a:srgbClr>
+            </a:outerShdw>
+          </a:effectLst>
+        </p:spPr>
+      </p:sp>
+      <p:sp>
+        <p:nvSpPr>
+          <p:cNvPr id="5" name="Shape 3"/>
+          <p:cNvSpPr/>
+          <p:nvPr/>
+        </p:nvSpPr>
+        <p:spPr>
+          <a:xfrm>
+            <a:off x="457200" y="914400"/>
+            <a:ext cx="45720" cy="521208"/>
+          </a:xfrm>
+          <a:prstGeom prst="rect">
+            <a:avLst/>
+          </a:prstGeom>
+          <a:solidFill>
+            <a:srgbClr val="2E7D32"/>
+          </a:solidFill>
+          <a:ln/>
+        </p:spPr>
+      </p:sp>
+      <p:sp>
+        <p:nvSpPr>
+          <p:cNvPr id="6" name="Text 4"/>
+          <p:cNvSpPr/>
+          <p:nvPr/>
+        </p:nvSpPr>
+        <p:spPr>
+          <a:xfrm>
+            <a:off x="685800" y="914400"/>
+            <a:ext cx="7818120" cy="521208"/>
           </a:xfrm>
           <a:prstGeom prst="rect">
             <a:avLst/>
@@ -4176,54 +6667,81 @@
           <a:bodyPr wrap="square" lIns="0" tIns="0" rIns="0" bIns="0" rtlCol="0" anchor="ctr"/>
           <a:lstStyle/>
           <a:p>
-            <a:pPr algn="ctr" indent="0" marL="0">
+            <a:pPr indent="0" marL="0">
               <a:buNone/>
             </a:pPr>
             <a:r>
-              <a:rPr lang="en-US" sz="1400" dirty="0">
+              <a:rPr lang="en-US" sz="1200" dirty="0">
                 <a:solidFill>
-                  <a:srgbClr val="CCCCCC"/>
+                  <a:srgbClr val="1A1A2E"/>
                 </a:solidFill>
                 <a:latin typeface="Calibri" pitchFamily="34" charset="0"/>
                 <a:ea typeface="Calibri" pitchFamily="34" charset="-122"/>
                 <a:cs typeface="Calibri" pitchFamily="34" charset="-120"/>
               </a:rPr>
-              <a:t>Quiz interactif + Score + Correction automatique</a:t>
-            </a:r>
-            <a:endParaRPr lang="en-US" sz="1400" dirty="0"/>
-          </a:p>
-        </p:txBody>
-      </p:sp>
-      <p:sp>
-        <p:nvSpPr>
-          <p:cNvPr id="5" name="Shape 2"/>
-          <p:cNvSpPr/>
-          <p:nvPr/>
-        </p:nvSpPr>
-        <p:spPr>
-          <a:xfrm>
-            <a:off x="2286000" y="3200400"/>
-            <a:ext cx="4572000" cy="548640"/>
-          </a:xfrm>
-          <a:prstGeom prst="rect">
-            <a:avLst/>
-          </a:prstGeom>
-          <a:solidFill>
-            <a:srgbClr val="FF6F00"/>
-          </a:solidFill>
-          <a:ln/>
-        </p:spPr>
-      </p:sp>
-      <p:sp>
-        <p:nvSpPr>
-          <p:cNvPr id="6" name="Text 3"/>
-          <p:cNvSpPr/>
-          <p:nvPr/>
-        </p:nvSpPr>
-        <p:spPr>
-          <a:xfrm>
-            <a:off x="2286000" y="3200400"/>
-            <a:ext cx="4572000" cy="548640"/>
+              <a:t>Maquetter les formulaires AVANT de coder (Draw.io ou papier)</a:t>
+            </a:r>
+            <a:endParaRPr lang="en-US" sz="1200" dirty="0"/>
+          </a:p>
+        </p:txBody>
+      </p:sp>
+      <p:sp>
+        <p:nvSpPr>
+          <p:cNvPr id="7" name="Shape 5"/>
+          <p:cNvSpPr/>
+          <p:nvPr/>
+        </p:nvSpPr>
+        <p:spPr>
+          <a:xfrm>
+            <a:off x="457200" y="1463040"/>
+            <a:ext cx="8229600" cy="521208"/>
+          </a:xfrm>
+          <a:prstGeom prst="rect">
+            <a:avLst/>
+          </a:prstGeom>
+          <a:solidFill>
+            <a:srgbClr val="E8F5E9"/>
+          </a:solidFill>
+          <a:ln/>
+          <a:effectLst>
+            <a:outerShdw sx="100000" sy="100000" kx="0" ky="0" algn="bl" rotWithShape="0" blurRad="50800" dist="25400" dir="8100000">
+              <a:srgbClr val="000000">
+                <a:alpha val="12000"/>
+              </a:srgbClr>
+            </a:outerShdw>
+          </a:effectLst>
+        </p:spPr>
+      </p:sp>
+      <p:sp>
+        <p:nvSpPr>
+          <p:cNvPr id="8" name="Shape 6"/>
+          <p:cNvSpPr/>
+          <p:nvPr/>
+        </p:nvSpPr>
+        <p:spPr>
+          <a:xfrm>
+            <a:off x="457200" y="1463040"/>
+            <a:ext cx="45720" cy="521208"/>
+          </a:xfrm>
+          <a:prstGeom prst="rect">
+            <a:avLst/>
+          </a:prstGeom>
+          <a:solidFill>
+            <a:srgbClr val="2E7D32"/>
+          </a:solidFill>
+          <a:ln/>
+        </p:spPr>
+      </p:sp>
+      <p:sp>
+        <p:nvSpPr>
+          <p:cNvPr id="9" name="Text 7"/>
+          <p:cNvSpPr/>
+          <p:nvPr/>
+        </p:nvSpPr>
+        <p:spPr>
+          <a:xfrm>
+            <a:off x="685800" y="1463040"/>
+            <a:ext cx="7818120" cy="521208"/>
           </a:xfrm>
           <a:prstGeom prst="rect">
             <a:avLst/>
@@ -4235,21 +6753,365 @@
           <a:bodyPr wrap="square" lIns="0" tIns="0" rIns="0" bIns="0" rtlCol="0" anchor="ctr"/>
           <a:lstStyle/>
           <a:p>
-            <a:pPr algn="ctr" indent="0" marL="0">
+            <a:pPr indent="0" marL="0">
               <a:buNone/>
             </a:pPr>
             <a:r>
-              <a:rPr lang="en-US" sz="1800" b="1" dirty="0">
+              <a:rPr lang="en-US" sz="1200" dirty="0">
                 <a:solidFill>
-                  <a:srgbClr val="FFFFFF"/>
+                  <a:srgbClr val="1A1A2E"/>
                 </a:solidFill>
-                <a:latin typeface="Trebuchet MS" pitchFamily="34" charset="0"/>
-                <a:ea typeface="Trebuchet MS" pitchFamily="34" charset="-122"/>
-                <a:cs typeface="Trebuchet MS" pitchFamily="34" charset="-120"/>
+                <a:latin typeface="Calibri" pitchFamily="34" charset="0"/>
+                <a:ea typeface="Calibri" pitchFamily="34" charset="-122"/>
+                <a:cs typeface="Calibri" pitchFamily="34" charset="-120"/>
               </a:rPr>
-              <a:t>▶  Lancer le jeu sur Vercel</a:t>
-            </a:r>
-            <a:endParaRPr lang="en-US" sz="1800" dirty="0"/>
+              <a:t>Formulaire 'Ajout Artiste' : nom*, prénom, email*, tel, genre (dropdown multi)</a:t>
+            </a:r>
+            <a:endParaRPr lang="en-US" sz="1200" dirty="0"/>
+          </a:p>
+        </p:txBody>
+      </p:sp>
+      <p:sp>
+        <p:nvSpPr>
+          <p:cNvPr id="10" name="Shape 8"/>
+          <p:cNvSpPr/>
+          <p:nvPr/>
+        </p:nvSpPr>
+        <p:spPr>
+          <a:xfrm>
+            <a:off x="457200" y="2011680"/>
+            <a:ext cx="8229600" cy="521208"/>
+          </a:xfrm>
+          <a:prstGeom prst="rect">
+            <a:avLst/>
+          </a:prstGeom>
+          <a:solidFill>
+            <a:srgbClr val="FFFFFF"/>
+          </a:solidFill>
+          <a:ln/>
+          <a:effectLst>
+            <a:outerShdw sx="100000" sy="100000" kx="0" ky="0" algn="bl" rotWithShape="0" blurRad="50800" dist="25400" dir="8100000">
+              <a:srgbClr val="000000">
+                <a:alpha val="12000"/>
+              </a:srgbClr>
+            </a:outerShdw>
+          </a:effectLst>
+        </p:spPr>
+      </p:sp>
+      <p:sp>
+        <p:nvSpPr>
+          <p:cNvPr id="11" name="Shape 9"/>
+          <p:cNvSpPr/>
+          <p:nvPr/>
+        </p:nvSpPr>
+        <p:spPr>
+          <a:xfrm>
+            <a:off x="457200" y="2011680"/>
+            <a:ext cx="45720" cy="521208"/>
+          </a:xfrm>
+          <a:prstGeom prst="rect">
+            <a:avLst/>
+          </a:prstGeom>
+          <a:solidFill>
+            <a:srgbClr val="2E7D32"/>
+          </a:solidFill>
+          <a:ln/>
+        </p:spPr>
+      </p:sp>
+      <p:sp>
+        <p:nvSpPr>
+          <p:cNvPr id="12" name="Text 10"/>
+          <p:cNvSpPr/>
+          <p:nvPr/>
+        </p:nvSpPr>
+        <p:spPr>
+          <a:xfrm>
+            <a:off x="685800" y="2011680"/>
+            <a:ext cx="7818120" cy="521208"/>
+          </a:xfrm>
+          <a:prstGeom prst="rect">
+            <a:avLst/>
+          </a:prstGeom>
+          <a:noFill/>
+          <a:ln/>
+        </p:spPr>
+        <p:txBody>
+          <a:bodyPr wrap="square" lIns="0" tIns="0" rIns="0" bIns="0" rtlCol="0" anchor="ctr"/>
+          <a:lstStyle/>
+          <a:p>
+            <a:pPr indent="0" marL="0">
+              <a:buNone/>
+            </a:pPr>
+            <a:r>
+              <a:rPr lang="en-US" sz="1200" dirty="0">
+                <a:solidFill>
+                  <a:srgbClr val="1A1A2E"/>
+                </a:solidFill>
+                <a:latin typeface="Calibri" pitchFamily="34" charset="0"/>
+                <a:ea typeface="Calibri" pitchFamily="34" charset="-122"/>
+                <a:cs typeface="Calibri" pitchFamily="34" charset="-120"/>
+              </a:rPr>
+              <a:t>Formulaire 'Réservation Session' : date, heure, salle (dropdown), ingénieur (dropdown)</a:t>
+            </a:r>
+            <a:endParaRPr lang="en-US" sz="1200" dirty="0"/>
+          </a:p>
+        </p:txBody>
+      </p:sp>
+      <p:sp>
+        <p:nvSpPr>
+          <p:cNvPr id="13" name="Shape 11"/>
+          <p:cNvSpPr/>
+          <p:nvPr/>
+        </p:nvSpPr>
+        <p:spPr>
+          <a:xfrm>
+            <a:off x="457200" y="2560320"/>
+            <a:ext cx="8229600" cy="521208"/>
+          </a:xfrm>
+          <a:prstGeom prst="rect">
+            <a:avLst/>
+          </a:prstGeom>
+          <a:solidFill>
+            <a:srgbClr val="E8F5E9"/>
+          </a:solidFill>
+          <a:ln/>
+          <a:effectLst>
+            <a:outerShdw sx="100000" sy="100000" kx="0" ky="0" algn="bl" rotWithShape="0" blurRad="50800" dist="25400" dir="8100000">
+              <a:srgbClr val="000000">
+                <a:alpha val="12000"/>
+              </a:srgbClr>
+            </a:outerShdw>
+          </a:effectLst>
+        </p:spPr>
+      </p:sp>
+      <p:sp>
+        <p:nvSpPr>
+          <p:cNvPr id="14" name="Shape 12"/>
+          <p:cNvSpPr/>
+          <p:nvPr/>
+        </p:nvSpPr>
+        <p:spPr>
+          <a:xfrm>
+            <a:off x="457200" y="2560320"/>
+            <a:ext cx="45720" cy="521208"/>
+          </a:xfrm>
+          <a:prstGeom prst="rect">
+            <a:avLst/>
+          </a:prstGeom>
+          <a:solidFill>
+            <a:srgbClr val="2E7D32"/>
+          </a:solidFill>
+          <a:ln/>
+        </p:spPr>
+      </p:sp>
+      <p:sp>
+        <p:nvSpPr>
+          <p:cNvPr id="15" name="Text 13"/>
+          <p:cNvSpPr/>
+          <p:nvPr/>
+        </p:nvSpPr>
+        <p:spPr>
+          <a:xfrm>
+            <a:off x="685800" y="2560320"/>
+            <a:ext cx="7818120" cy="521208"/>
+          </a:xfrm>
+          <a:prstGeom prst="rect">
+            <a:avLst/>
+          </a:prstGeom>
+          <a:noFill/>
+          <a:ln/>
+        </p:spPr>
+        <p:txBody>
+          <a:bodyPr wrap="square" lIns="0" tIns="0" rIns="0" bIns="0" rtlCol="0" anchor="ctr"/>
+          <a:lstStyle/>
+          <a:p>
+            <a:pPr indent="0" marL="0">
+              <a:buNone/>
+            </a:pPr>
+            <a:r>
+              <a:rPr lang="en-US" sz="1200" dirty="0">
+                <a:solidFill>
+                  <a:srgbClr val="1A1A2E"/>
+                </a:solidFill>
+                <a:latin typeface="Calibri" pitchFamily="34" charset="0"/>
+                <a:ea typeface="Calibri" pitchFamily="34" charset="-122"/>
+                <a:cs typeface="Calibri" pitchFamily="34" charset="-120"/>
+              </a:rPr>
+              <a:t>Formulaire 'Facture' : artiste (dropdown), session (dropdown), montant</a:t>
+            </a:r>
+            <a:endParaRPr lang="en-US" sz="1200" dirty="0"/>
+          </a:p>
+        </p:txBody>
+      </p:sp>
+      <p:sp>
+        <p:nvSpPr>
+          <p:cNvPr id="16" name="Shape 14"/>
+          <p:cNvSpPr/>
+          <p:nvPr/>
+        </p:nvSpPr>
+        <p:spPr>
+          <a:xfrm>
+            <a:off x="457200" y="3108960"/>
+            <a:ext cx="8229600" cy="521208"/>
+          </a:xfrm>
+          <a:prstGeom prst="rect">
+            <a:avLst/>
+          </a:prstGeom>
+          <a:solidFill>
+            <a:srgbClr val="FFFFFF"/>
+          </a:solidFill>
+          <a:ln/>
+          <a:effectLst>
+            <a:outerShdw sx="100000" sy="100000" kx="0" ky="0" algn="bl" rotWithShape="0" blurRad="50800" dist="25400" dir="8100000">
+              <a:srgbClr val="000000">
+                <a:alpha val="12000"/>
+              </a:srgbClr>
+            </a:outerShdw>
+          </a:effectLst>
+        </p:spPr>
+      </p:sp>
+      <p:sp>
+        <p:nvSpPr>
+          <p:cNvPr id="17" name="Shape 15"/>
+          <p:cNvSpPr/>
+          <p:nvPr/>
+        </p:nvSpPr>
+        <p:spPr>
+          <a:xfrm>
+            <a:off x="457200" y="3108960"/>
+            <a:ext cx="45720" cy="521208"/>
+          </a:xfrm>
+          <a:prstGeom prst="rect">
+            <a:avLst/>
+          </a:prstGeom>
+          <a:solidFill>
+            <a:srgbClr val="2E7D32"/>
+          </a:solidFill>
+          <a:ln/>
+        </p:spPr>
+      </p:sp>
+      <p:sp>
+        <p:nvSpPr>
+          <p:cNvPr id="18" name="Text 16"/>
+          <p:cNvSpPr/>
+          <p:nvPr/>
+        </p:nvSpPr>
+        <p:spPr>
+          <a:xfrm>
+            <a:off x="685800" y="3108960"/>
+            <a:ext cx="7818120" cy="521208"/>
+          </a:xfrm>
+          <a:prstGeom prst="rect">
+            <a:avLst/>
+          </a:prstGeom>
+          <a:noFill/>
+          <a:ln/>
+        </p:spPr>
+        <p:txBody>
+          <a:bodyPr wrap="square" lIns="0" tIns="0" rIns="0" bIns="0" rtlCol="0" anchor="ctr"/>
+          <a:lstStyle/>
+          <a:p>
+            <a:pPr indent="0" marL="0">
+              <a:buNone/>
+            </a:pPr>
+            <a:r>
+              <a:rPr lang="en-US" sz="1200" dirty="0">
+                <a:solidFill>
+                  <a:srgbClr val="1A1A2E"/>
+                </a:solidFill>
+                <a:latin typeface="Calibri" pitchFamily="34" charset="0"/>
+                <a:ea typeface="Calibri" pitchFamily="34" charset="-122"/>
+                <a:cs typeface="Calibri" pitchFamily="34" charset="-120"/>
+              </a:rPr>
+              <a:t>Validations côté interface : email format, téléphone suisse, date future</a:t>
+            </a:r>
+            <a:endParaRPr lang="en-US" sz="1200" dirty="0"/>
+          </a:p>
+        </p:txBody>
+      </p:sp>
+      <p:sp>
+        <p:nvSpPr>
+          <p:cNvPr id="19" name="Shape 17"/>
+          <p:cNvSpPr/>
+          <p:nvPr/>
+        </p:nvSpPr>
+        <p:spPr>
+          <a:xfrm>
+            <a:off x="457200" y="3657600"/>
+            <a:ext cx="8229600" cy="521208"/>
+          </a:xfrm>
+          <a:prstGeom prst="rect">
+            <a:avLst/>
+          </a:prstGeom>
+          <a:solidFill>
+            <a:srgbClr val="E8F5E9"/>
+          </a:solidFill>
+          <a:ln/>
+          <a:effectLst>
+            <a:outerShdw sx="100000" sy="100000" kx="0" ky="0" algn="bl" rotWithShape="0" blurRad="50800" dist="25400" dir="8100000">
+              <a:srgbClr val="000000">
+                <a:alpha val="12000"/>
+              </a:srgbClr>
+            </a:outerShdw>
+          </a:effectLst>
+        </p:spPr>
+      </p:sp>
+      <p:sp>
+        <p:nvSpPr>
+          <p:cNvPr id="20" name="Shape 18"/>
+          <p:cNvSpPr/>
+          <p:nvPr/>
+        </p:nvSpPr>
+        <p:spPr>
+          <a:xfrm>
+            <a:off x="457200" y="3657600"/>
+            <a:ext cx="45720" cy="521208"/>
+          </a:xfrm>
+          <a:prstGeom prst="rect">
+            <a:avLst/>
+          </a:prstGeom>
+          <a:solidFill>
+            <a:srgbClr val="2E7D32"/>
+          </a:solidFill>
+          <a:ln/>
+        </p:spPr>
+      </p:sp>
+      <p:sp>
+        <p:nvSpPr>
+          <p:cNvPr id="21" name="Text 19"/>
+          <p:cNvSpPr/>
+          <p:nvPr/>
+        </p:nvSpPr>
+        <p:spPr>
+          <a:xfrm>
+            <a:off x="685800" y="3657600"/>
+            <a:ext cx="7818120" cy="521208"/>
+          </a:xfrm>
+          <a:prstGeom prst="rect">
+            <a:avLst/>
+          </a:prstGeom>
+          <a:noFill/>
+          <a:ln/>
+        </p:spPr>
+        <p:txBody>
+          <a:bodyPr wrap="square" lIns="0" tIns="0" rIns="0" bIns="0" rtlCol="0" anchor="ctr"/>
+          <a:lstStyle/>
+          <a:p>
+            <a:pPr indent="0" marL="0">
+              <a:buNone/>
+            </a:pPr>
+            <a:r>
+              <a:rPr lang="en-US" sz="1200" dirty="0">
+                <a:solidFill>
+                  <a:srgbClr val="1A1A2E"/>
+                </a:solidFill>
+                <a:latin typeface="Calibri" pitchFamily="34" charset="0"/>
+                <a:ea typeface="Calibri" pitchFamily="34" charset="-122"/>
+                <a:cs typeface="Calibri" pitchFamily="34" charset="-120"/>
+              </a:rPr>
+              <a:t>Listes déroulantes pour TOUTES les clés étrangères (pas de saisie libre)</a:t>
+            </a:r>
+            <a:endParaRPr lang="en-US" sz="1200" dirty="0"/>
           </a:p>
         </p:txBody>
       </p:sp>
@@ -4287,14 +7149,34 @@
       </p:grpSpPr>
       <p:sp>
         <p:nvSpPr>
-          <p:cNvPr id="2" name="Text 0"/>
-          <p:cNvSpPr/>
-          <p:nvPr/>
-        </p:nvSpPr>
-        <p:spPr>
-          <a:xfrm>
-            <a:off x="457200" y="228600"/>
-            <a:ext cx="8229600" cy="457200"/>
+          <p:cNvPr id="2" name="Shape 0"/>
+          <p:cNvSpPr/>
+          <p:nvPr/>
+        </p:nvSpPr>
+        <p:spPr>
+          <a:xfrm>
+            <a:off x="0" y="0"/>
+            <a:ext cx="9144000" cy="54864"/>
+          </a:xfrm>
+          <a:prstGeom prst="rect">
+            <a:avLst/>
+          </a:prstGeom>
+          <a:solidFill>
+            <a:srgbClr val="2E7D32"/>
+          </a:solidFill>
+          <a:ln/>
+        </p:spPr>
+      </p:sp>
+      <p:sp>
+        <p:nvSpPr>
+          <p:cNvPr id="3" name="Text 1"/>
+          <p:cNvSpPr/>
+          <p:nvPr/>
+        </p:nvSpPr>
+        <p:spPr>
+          <a:xfrm>
+            <a:off x="457200" y="182880"/>
+            <a:ext cx="8229600" cy="594360"/>
           </a:xfrm>
           <a:prstGeom prst="rect">
             <a:avLst/>
@@ -4310,7 +7192,7 @@
               <a:buNone/>
             </a:pPr>
             <a:r>
-              <a:rPr lang="en-US" sz="2000" b="1" dirty="0">
+              <a:rPr lang="en-US" sz="2400" b="1" dirty="0">
                 <a:solidFill>
                   <a:srgbClr val="1B5E20"/>
                 </a:solidFill>
@@ -4318,42 +7200,69 @@
                 <a:ea typeface="Trebuchet MS" pitchFamily="34" charset="-122"/>
                 <a:cs typeface="Trebuchet MS" pitchFamily="34" charset="-120"/>
               </a:rPr>
-              <a:t>📋 Mémo Module 8 — MPD + Interfaces + BDD OO</a:t>
-            </a:r>
-            <a:endParaRPr lang="en-US" sz="2000" dirty="0"/>
-          </a:p>
-        </p:txBody>
-      </p:sp>
-      <p:sp>
-        <p:nvSpPr>
-          <p:cNvPr id="3" name="Shape 1"/>
-          <p:cNvSpPr/>
-          <p:nvPr/>
-        </p:nvSpPr>
-        <p:spPr>
-          <a:xfrm>
-            <a:off x="457200" y="731520"/>
-            <a:ext cx="8229600" cy="320040"/>
-          </a:xfrm>
-          <a:prstGeom prst="rect">
-            <a:avLst/>
-          </a:prstGeom>
-          <a:solidFill>
-            <a:srgbClr val="FFF3E0"/>
-          </a:solidFill>
-          <a:ln/>
-        </p:spPr>
-      </p:sp>
-      <p:sp>
-        <p:nvSpPr>
-          <p:cNvPr id="4" name="Text 2"/>
-          <p:cNvSpPr/>
-          <p:nvPr/>
-        </p:nvSpPr>
-        <p:spPr>
-          <a:xfrm>
-            <a:off x="640080" y="731520"/>
-            <a:ext cx="7772400" cy="320040"/>
+              <a:t>Sécurité dès la conception</a:t>
+            </a:r>
+            <a:endParaRPr lang="en-US" sz="2400" dirty="0"/>
+          </a:p>
+        </p:txBody>
+      </p:sp>
+      <p:sp>
+        <p:nvSpPr>
+          <p:cNvPr id="4" name="Shape 2"/>
+          <p:cNvSpPr/>
+          <p:nvPr/>
+        </p:nvSpPr>
+        <p:spPr>
+          <a:xfrm>
+            <a:off x="457200" y="914400"/>
+            <a:ext cx="8229600" cy="521208"/>
+          </a:xfrm>
+          <a:prstGeom prst="rect">
+            <a:avLst/>
+          </a:prstGeom>
+          <a:solidFill>
+            <a:srgbClr val="FFFFFF"/>
+          </a:solidFill>
+          <a:ln/>
+          <a:effectLst>
+            <a:outerShdw sx="100000" sy="100000" kx="0" ky="0" algn="bl" rotWithShape="0" blurRad="50800" dist="25400" dir="8100000">
+              <a:srgbClr val="000000">
+                <a:alpha val="12000"/>
+              </a:srgbClr>
+            </a:outerShdw>
+          </a:effectLst>
+        </p:spPr>
+      </p:sp>
+      <p:sp>
+        <p:nvSpPr>
+          <p:cNvPr id="5" name="Shape 3"/>
+          <p:cNvSpPr/>
+          <p:nvPr/>
+        </p:nvSpPr>
+        <p:spPr>
+          <a:xfrm>
+            <a:off x="457200" y="914400"/>
+            <a:ext cx="45720" cy="521208"/>
+          </a:xfrm>
+          <a:prstGeom prst="rect">
+            <a:avLst/>
+          </a:prstGeom>
+          <a:solidFill>
+            <a:srgbClr val="2E7D32"/>
+          </a:solidFill>
+          <a:ln/>
+        </p:spPr>
+      </p:sp>
+      <p:sp>
+        <p:nvSpPr>
+          <p:cNvPr id="6" name="Text 4"/>
+          <p:cNvSpPr/>
+          <p:nvPr/>
+        </p:nvSpPr>
+        <p:spPr>
+          <a:xfrm>
+            <a:off x="685800" y="914400"/>
+            <a:ext cx="7818120" cy="521208"/>
           </a:xfrm>
           <a:prstGeom prst="rect">
             <a:avLst/>
@@ -4369,30 +7278,30 @@
               <a:buNone/>
             </a:pPr>
             <a:r>
-              <a:rPr lang="en-US" sz="1000" b="1" dirty="0">
+              <a:rPr lang="en-US" sz="1200" dirty="0">
                 <a:solidFill>
-                  <a:srgbClr val="E65100"/>
+                  <a:srgbClr val="1A1A2E"/>
                 </a:solidFill>
                 <a:latin typeface="Calibri" pitchFamily="34" charset="0"/>
                 <a:ea typeface="Calibri" pitchFamily="34" charset="-122"/>
                 <a:cs typeface="Calibri" pitchFamily="34" charset="-120"/>
               </a:rPr>
-              <a:t>🔒 Ce mémo se débloque quand toutes les phases du module sont terminées !</a:t>
-            </a:r>
-            <a:endParaRPr lang="en-US" sz="1000" dirty="0"/>
-          </a:p>
-        </p:txBody>
-      </p:sp>
-      <p:sp>
-        <p:nvSpPr>
-          <p:cNvPr id="5" name="Shape 3"/>
-          <p:cNvSpPr/>
-          <p:nvPr/>
-        </p:nvSpPr>
-        <p:spPr>
-          <a:xfrm>
-            <a:off x="457200" y="1188720"/>
-            <a:ext cx="8229600" cy="713232"/>
+              <a:t>Matrice de droits : qui accède à quoi ?</a:t>
+            </a:r>
+            <a:endParaRPr lang="en-US" sz="1200" dirty="0"/>
+          </a:p>
+        </p:txBody>
+      </p:sp>
+      <p:sp>
+        <p:nvSpPr>
+          <p:cNvPr id="7" name="Shape 5"/>
+          <p:cNvSpPr/>
+          <p:nvPr/>
+        </p:nvSpPr>
+        <p:spPr>
+          <a:xfrm>
+            <a:off x="457200" y="1463040"/>
+            <a:ext cx="8229600" cy="521208"/>
           </a:xfrm>
           <a:prstGeom prst="rect">
             <a:avLst/>
@@ -4401,18 +7310,45 @@
             <a:srgbClr val="E8F5E9"/>
           </a:solidFill>
           <a:ln/>
-        </p:spPr>
-      </p:sp>
-      <p:sp>
-        <p:nvSpPr>
-          <p:cNvPr id="6" name="Text 4"/>
-          <p:cNvSpPr/>
-          <p:nvPr/>
-        </p:nvSpPr>
-        <p:spPr>
-          <a:xfrm>
-            <a:off x="640080" y="1188720"/>
-            <a:ext cx="2560320" cy="713232"/>
+          <a:effectLst>
+            <a:outerShdw sx="100000" sy="100000" kx="0" ky="0" algn="bl" rotWithShape="0" blurRad="50800" dist="25400" dir="8100000">
+              <a:srgbClr val="000000">
+                <a:alpha val="12000"/>
+              </a:srgbClr>
+            </a:outerShdw>
+          </a:effectLst>
+        </p:spPr>
+      </p:sp>
+      <p:sp>
+        <p:nvSpPr>
+          <p:cNvPr id="8" name="Shape 6"/>
+          <p:cNvSpPr/>
+          <p:nvPr/>
+        </p:nvSpPr>
+        <p:spPr>
+          <a:xfrm>
+            <a:off x="457200" y="1463040"/>
+            <a:ext cx="45720" cy="521208"/>
+          </a:xfrm>
+          <a:prstGeom prst="rect">
+            <a:avLst/>
+          </a:prstGeom>
+          <a:solidFill>
+            <a:srgbClr val="2E7D32"/>
+          </a:solidFill>
+          <a:ln/>
+        </p:spPr>
+      </p:sp>
+      <p:sp>
+        <p:nvSpPr>
+          <p:cNvPr id="9" name="Text 7"/>
+          <p:cNvSpPr/>
+          <p:nvPr/>
+        </p:nvSpPr>
+        <p:spPr>
+          <a:xfrm>
+            <a:off x="685800" y="1463040"/>
+            <a:ext cx="7818120" cy="521208"/>
           </a:xfrm>
           <a:prstGeom prst="rect">
             <a:avLst/>
@@ -4428,7 +7364,528 @@
               <a:buNone/>
             </a:pPr>
             <a:r>
-              <a:rPr lang="en-US" sz="1000" b="1" dirty="0">
+              <a:rPr lang="en-US" sz="1200" dirty="0">
+                <a:solidFill>
+                  <a:srgbClr val="1A1A2E"/>
+                </a:solidFill>
+                <a:latin typeface="Calibri" pitchFamily="34" charset="0"/>
+                <a:ea typeface="Calibri" pitchFamily="34" charset="-122"/>
+                <a:cs typeface="Calibri" pitchFamily="34" charset="-120"/>
+              </a:rPr>
+              <a:t>admin_studio : TOUT (seul compte avec DELETE)</a:t>
+            </a:r>
+            <a:endParaRPr lang="en-US" sz="1200" dirty="0"/>
+          </a:p>
+        </p:txBody>
+      </p:sp>
+      <p:sp>
+        <p:nvSpPr>
+          <p:cNvPr id="10" name="Shape 8"/>
+          <p:cNvSpPr/>
+          <p:nvPr/>
+        </p:nvSpPr>
+        <p:spPr>
+          <a:xfrm>
+            <a:off x="457200" y="2011680"/>
+            <a:ext cx="8229600" cy="521208"/>
+          </a:xfrm>
+          <a:prstGeom prst="rect">
+            <a:avLst/>
+          </a:prstGeom>
+          <a:solidFill>
+            <a:srgbClr val="FFFFFF"/>
+          </a:solidFill>
+          <a:ln/>
+          <a:effectLst>
+            <a:outerShdw sx="100000" sy="100000" kx="0" ky="0" algn="bl" rotWithShape="0" blurRad="50800" dist="25400" dir="8100000">
+              <a:srgbClr val="000000">
+                <a:alpha val="12000"/>
+              </a:srgbClr>
+            </a:outerShdw>
+          </a:effectLst>
+        </p:spPr>
+      </p:sp>
+      <p:sp>
+        <p:nvSpPr>
+          <p:cNvPr id="11" name="Shape 9"/>
+          <p:cNvSpPr/>
+          <p:nvPr/>
+        </p:nvSpPr>
+        <p:spPr>
+          <a:xfrm>
+            <a:off x="457200" y="2011680"/>
+            <a:ext cx="45720" cy="521208"/>
+          </a:xfrm>
+          <a:prstGeom prst="rect">
+            <a:avLst/>
+          </a:prstGeom>
+          <a:solidFill>
+            <a:srgbClr val="2E7D32"/>
+          </a:solidFill>
+          <a:ln/>
+        </p:spPr>
+      </p:sp>
+      <p:sp>
+        <p:nvSpPr>
+          <p:cNvPr id="12" name="Text 10"/>
+          <p:cNvSpPr/>
+          <p:nvPr/>
+        </p:nvSpPr>
+        <p:spPr>
+          <a:xfrm>
+            <a:off x="685800" y="2011680"/>
+            <a:ext cx="7818120" cy="521208"/>
+          </a:xfrm>
+          <a:prstGeom prst="rect">
+            <a:avLst/>
+          </a:prstGeom>
+          <a:noFill/>
+          <a:ln/>
+        </p:spPr>
+        <p:txBody>
+          <a:bodyPr wrap="square" lIns="0" tIns="0" rIns="0" bIns="0" rtlCol="0" anchor="ctr"/>
+          <a:lstStyle/>
+          <a:p>
+            <a:pPr indent="0" marL="0">
+              <a:buNone/>
+            </a:pPr>
+            <a:r>
+              <a:rPr lang="en-US" sz="1200" dirty="0">
+                <a:solidFill>
+                  <a:srgbClr val="1A1A2E"/>
+                </a:solidFill>
+                <a:latin typeface="Calibri" pitchFamily="34" charset="0"/>
+                <a:ea typeface="Calibri" pitchFamily="34" charset="-122"/>
+                <a:cs typeface="Calibri" pitchFamily="34" charset="-120"/>
+              </a:rPr>
+              <a:t>ingenieur_son : SELECT/INSERT/UPDATE sessions + SELECT salles</a:t>
+            </a:r>
+            <a:endParaRPr lang="en-US" sz="1200" dirty="0"/>
+          </a:p>
+        </p:txBody>
+      </p:sp>
+      <p:sp>
+        <p:nvSpPr>
+          <p:cNvPr id="13" name="Shape 11"/>
+          <p:cNvSpPr/>
+          <p:nvPr/>
+        </p:nvSpPr>
+        <p:spPr>
+          <a:xfrm>
+            <a:off x="457200" y="2560320"/>
+            <a:ext cx="8229600" cy="521208"/>
+          </a:xfrm>
+          <a:prstGeom prst="rect">
+            <a:avLst/>
+          </a:prstGeom>
+          <a:solidFill>
+            <a:srgbClr val="E8F5E9"/>
+          </a:solidFill>
+          <a:ln/>
+          <a:effectLst>
+            <a:outerShdw sx="100000" sy="100000" kx="0" ky="0" algn="bl" rotWithShape="0" blurRad="50800" dist="25400" dir="8100000">
+              <a:srgbClr val="000000">
+                <a:alpha val="12000"/>
+              </a:srgbClr>
+            </a:outerShdw>
+          </a:effectLst>
+        </p:spPr>
+      </p:sp>
+      <p:sp>
+        <p:nvSpPr>
+          <p:cNvPr id="14" name="Shape 12"/>
+          <p:cNvSpPr/>
+          <p:nvPr/>
+        </p:nvSpPr>
+        <p:spPr>
+          <a:xfrm>
+            <a:off x="457200" y="2560320"/>
+            <a:ext cx="45720" cy="521208"/>
+          </a:xfrm>
+          <a:prstGeom prst="rect">
+            <a:avLst/>
+          </a:prstGeom>
+          <a:solidFill>
+            <a:srgbClr val="2E7D32"/>
+          </a:solidFill>
+          <a:ln/>
+        </p:spPr>
+      </p:sp>
+      <p:sp>
+        <p:nvSpPr>
+          <p:cNvPr id="15" name="Text 13"/>
+          <p:cNvSpPr/>
+          <p:nvPr/>
+        </p:nvSpPr>
+        <p:spPr>
+          <a:xfrm>
+            <a:off x="685800" y="2560320"/>
+            <a:ext cx="7818120" cy="521208"/>
+          </a:xfrm>
+          <a:prstGeom prst="rect">
+            <a:avLst/>
+          </a:prstGeom>
+          <a:noFill/>
+          <a:ln/>
+        </p:spPr>
+        <p:txBody>
+          <a:bodyPr wrap="square" lIns="0" tIns="0" rIns="0" bIns="0" rtlCol="0" anchor="ctr"/>
+          <a:lstStyle/>
+          <a:p>
+            <a:pPr indent="0" marL="0">
+              <a:buNone/>
+            </a:pPr>
+            <a:r>
+              <a:rPr lang="en-US" sz="1200" dirty="0">
+                <a:solidFill>
+                  <a:srgbClr val="1A1A2E"/>
+                </a:solidFill>
+                <a:latin typeface="Calibri" pitchFamily="34" charset="0"/>
+                <a:ea typeface="Calibri" pitchFamily="34" charset="-122"/>
+                <a:cs typeface="Calibri" pitchFamily="34" charset="-120"/>
+              </a:rPr>
+              <a:t>comptable : SELECT/INSERT/UPDATE factures + SELECT artistes/sessions</a:t>
+            </a:r>
+            <a:endParaRPr lang="en-US" sz="1200" dirty="0"/>
+          </a:p>
+        </p:txBody>
+      </p:sp>
+      <p:sp>
+        <p:nvSpPr>
+          <p:cNvPr id="16" name="Shape 14"/>
+          <p:cNvSpPr/>
+          <p:nvPr/>
+        </p:nvSpPr>
+        <p:spPr>
+          <a:xfrm>
+            <a:off x="457200" y="3108960"/>
+            <a:ext cx="8229600" cy="521208"/>
+          </a:xfrm>
+          <a:prstGeom prst="rect">
+            <a:avLst/>
+          </a:prstGeom>
+          <a:solidFill>
+            <a:srgbClr val="FFFFFF"/>
+          </a:solidFill>
+          <a:ln/>
+          <a:effectLst>
+            <a:outerShdw sx="100000" sy="100000" kx="0" ky="0" algn="bl" rotWithShape="0" blurRad="50800" dist="25400" dir="8100000">
+              <a:srgbClr val="000000">
+                <a:alpha val="12000"/>
+              </a:srgbClr>
+            </a:outerShdw>
+          </a:effectLst>
+        </p:spPr>
+      </p:sp>
+      <p:sp>
+        <p:nvSpPr>
+          <p:cNvPr id="17" name="Shape 15"/>
+          <p:cNvSpPr/>
+          <p:nvPr/>
+        </p:nvSpPr>
+        <p:spPr>
+          <a:xfrm>
+            <a:off x="457200" y="3108960"/>
+            <a:ext cx="45720" cy="521208"/>
+          </a:xfrm>
+          <a:prstGeom prst="rect">
+            <a:avLst/>
+          </a:prstGeom>
+          <a:solidFill>
+            <a:srgbClr val="2E7D32"/>
+          </a:solidFill>
+          <a:ln/>
+        </p:spPr>
+      </p:sp>
+      <p:sp>
+        <p:nvSpPr>
+          <p:cNvPr id="18" name="Text 16"/>
+          <p:cNvSpPr/>
+          <p:nvPr/>
+        </p:nvSpPr>
+        <p:spPr>
+          <a:xfrm>
+            <a:off x="685800" y="3108960"/>
+            <a:ext cx="7818120" cy="521208"/>
+          </a:xfrm>
+          <a:prstGeom prst="rect">
+            <a:avLst/>
+          </a:prstGeom>
+          <a:noFill/>
+          <a:ln/>
+        </p:spPr>
+        <p:txBody>
+          <a:bodyPr wrap="square" lIns="0" tIns="0" rIns="0" bIns="0" rtlCol="0" anchor="ctr"/>
+          <a:lstStyle/>
+          <a:p>
+            <a:pPr indent="0" marL="0">
+              <a:buNone/>
+            </a:pPr>
+            <a:r>
+              <a:rPr lang="en-US" sz="1200" dirty="0">
+                <a:solidFill>
+                  <a:srgbClr val="1A1A2E"/>
+                </a:solidFill>
+                <a:latin typeface="Calibri" pitchFamily="34" charset="0"/>
+                <a:ea typeface="Calibri" pitchFamily="34" charset="-122"/>
+                <a:cs typeface="Calibri" pitchFamily="34" charset="-120"/>
+              </a:rPr>
+              <a:t>reception : SELECT/INSERT/UPDATE artistes + SELECT genres</a:t>
+            </a:r>
+            <a:endParaRPr lang="en-US" sz="1200" dirty="0"/>
+          </a:p>
+        </p:txBody>
+      </p:sp>
+      <p:sp>
+        <p:nvSpPr>
+          <p:cNvPr id="19" name="Shape 17"/>
+          <p:cNvSpPr/>
+          <p:nvPr/>
+        </p:nvSpPr>
+        <p:spPr>
+          <a:xfrm>
+            <a:off x="457200" y="3657600"/>
+            <a:ext cx="8229600" cy="521208"/>
+          </a:xfrm>
+          <a:prstGeom prst="rect">
+            <a:avLst/>
+          </a:prstGeom>
+          <a:solidFill>
+            <a:srgbClr val="E8F5E9"/>
+          </a:solidFill>
+          <a:ln/>
+          <a:effectLst>
+            <a:outerShdw sx="100000" sy="100000" kx="0" ky="0" algn="bl" rotWithShape="0" blurRad="50800" dist="25400" dir="8100000">
+              <a:srgbClr val="000000">
+                <a:alpha val="12000"/>
+              </a:srgbClr>
+            </a:outerShdw>
+          </a:effectLst>
+        </p:spPr>
+      </p:sp>
+      <p:sp>
+        <p:nvSpPr>
+          <p:cNvPr id="20" name="Shape 18"/>
+          <p:cNvSpPr/>
+          <p:nvPr/>
+        </p:nvSpPr>
+        <p:spPr>
+          <a:xfrm>
+            <a:off x="457200" y="3657600"/>
+            <a:ext cx="45720" cy="521208"/>
+          </a:xfrm>
+          <a:prstGeom prst="rect">
+            <a:avLst/>
+          </a:prstGeom>
+          <a:solidFill>
+            <a:srgbClr val="2E7D32"/>
+          </a:solidFill>
+          <a:ln/>
+        </p:spPr>
+      </p:sp>
+      <p:sp>
+        <p:nvSpPr>
+          <p:cNvPr id="21" name="Text 19"/>
+          <p:cNvSpPr/>
+          <p:nvPr/>
+        </p:nvSpPr>
+        <p:spPr>
+          <a:xfrm>
+            <a:off x="685800" y="3657600"/>
+            <a:ext cx="7818120" cy="521208"/>
+          </a:xfrm>
+          <a:prstGeom prst="rect">
+            <a:avLst/>
+          </a:prstGeom>
+          <a:noFill/>
+          <a:ln/>
+        </p:spPr>
+        <p:txBody>
+          <a:bodyPr wrap="square" lIns="0" tIns="0" rIns="0" bIns="0" rtlCol="0" anchor="ctr"/>
+          <a:lstStyle/>
+          <a:p>
+            <a:pPr indent="0" marL="0">
+              <a:buNone/>
+            </a:pPr>
+            <a:r>
+              <a:rPr lang="en-US" sz="1200" dirty="0">
+                <a:solidFill>
+                  <a:srgbClr val="1A1A2E"/>
+                </a:solidFill>
+                <a:latin typeface="Calibri" pitchFamily="34" charset="0"/>
+                <a:ea typeface="Calibri" pitchFamily="34" charset="-122"/>
+                <a:cs typeface="Calibri" pitchFamily="34" charset="-120"/>
+              </a:rPr>
+              <a:t>Chiffrement : emails des artistes (données personnelles RGPD)</a:t>
+            </a:r>
+            <a:endParaRPr lang="en-US" sz="1200" dirty="0"/>
+          </a:p>
+        </p:txBody>
+      </p:sp>
+      <p:sp>
+        <p:nvSpPr>
+          <p:cNvPr id="22" name="Shape 20"/>
+          <p:cNvSpPr/>
+          <p:nvPr/>
+        </p:nvSpPr>
+        <p:spPr>
+          <a:xfrm>
+            <a:off x="457200" y="4206240"/>
+            <a:ext cx="8229600" cy="521208"/>
+          </a:xfrm>
+          <a:prstGeom prst="rect">
+            <a:avLst/>
+          </a:prstGeom>
+          <a:solidFill>
+            <a:srgbClr val="FFFFFF"/>
+          </a:solidFill>
+          <a:ln/>
+          <a:effectLst>
+            <a:outerShdw sx="100000" sy="100000" kx="0" ky="0" algn="bl" rotWithShape="0" blurRad="50800" dist="25400" dir="8100000">
+              <a:srgbClr val="000000">
+                <a:alpha val="12000"/>
+              </a:srgbClr>
+            </a:outerShdw>
+          </a:effectLst>
+        </p:spPr>
+      </p:sp>
+      <p:sp>
+        <p:nvSpPr>
+          <p:cNvPr id="23" name="Shape 21"/>
+          <p:cNvSpPr/>
+          <p:nvPr/>
+        </p:nvSpPr>
+        <p:spPr>
+          <a:xfrm>
+            <a:off x="457200" y="4206240"/>
+            <a:ext cx="45720" cy="521208"/>
+          </a:xfrm>
+          <a:prstGeom prst="rect">
+            <a:avLst/>
+          </a:prstGeom>
+          <a:solidFill>
+            <a:srgbClr val="2E7D32"/>
+          </a:solidFill>
+          <a:ln/>
+        </p:spPr>
+      </p:sp>
+      <p:sp>
+        <p:nvSpPr>
+          <p:cNvPr id="24" name="Text 22"/>
+          <p:cNvSpPr/>
+          <p:nvPr/>
+        </p:nvSpPr>
+        <p:spPr>
+          <a:xfrm>
+            <a:off x="685800" y="4206240"/>
+            <a:ext cx="7818120" cy="521208"/>
+          </a:xfrm>
+          <a:prstGeom prst="rect">
+            <a:avLst/>
+          </a:prstGeom>
+          <a:noFill/>
+          <a:ln/>
+        </p:spPr>
+        <p:txBody>
+          <a:bodyPr wrap="square" lIns="0" tIns="0" rIns="0" bIns="0" rtlCol="0" anchor="ctr"/>
+          <a:lstStyle/>
+          <a:p>
+            <a:pPr indent="0" marL="0">
+              <a:buNone/>
+            </a:pPr>
+            <a:r>
+              <a:rPr lang="en-US" sz="1200" dirty="0">
+                <a:solidFill>
+                  <a:srgbClr val="1A1A2E"/>
+                </a:solidFill>
+                <a:latin typeface="Calibri" pitchFamily="34" charset="0"/>
+                <a:ea typeface="Calibri" pitchFamily="34" charset="-122"/>
+                <a:cs typeface="Calibri" pitchFamily="34" charset="-120"/>
+              </a:rPr>
+              <a:t>Mots de passe : JAMAIS en clair → SHA2 ou bcrypt</a:t>
+            </a:r>
+            <a:endParaRPr lang="en-US" sz="1200" dirty="0"/>
+          </a:p>
+        </p:txBody>
+      </p:sp>
+    </p:spTree>
+  </p:cSld>
+  <p:clrMapOvr>
+    <a:masterClrMapping/>
+  </p:clrMapOvr>
+</p:sld>
+</file>
+
+<file path=ppt/slides/slide8.xml><?xml version="1.0" encoding="utf-8"?>
+<p:sld xmlns:a="http://schemas.openxmlformats.org/drawingml/2006/main" xmlns:r="http://schemas.openxmlformats.org/officeDocument/2006/relationships" xmlns:p="http://schemas.openxmlformats.org/presentationml/2006/main">
+  <p:cSld name="Slide 8">
+    <p:bg>
+      <p:bgPr>
+        <a:solidFill>
+          <a:srgbClr val="F5F7FA"/>
+        </a:solidFill>
+      </p:bgPr>
+    </p:bg>
+    <p:spTree>
+      <p:nvGrpSpPr>
+        <p:cNvPr id="1" name=""/>
+        <p:cNvGrpSpPr/>
+        <p:nvPr/>
+      </p:nvGrpSpPr>
+      <p:grpSpPr>
+        <a:xfrm>
+          <a:off x="0" y="0"/>
+          <a:ext cx="0" cy="0"/>
+          <a:chOff x="0" y="0"/>
+          <a:chExt cx="0" cy="0"/>
+        </a:xfrm>
+      </p:grpSpPr>
+      <p:sp>
+        <p:nvSpPr>
+          <p:cNvPr id="2" name="Shape 0"/>
+          <p:cNvSpPr/>
+          <p:nvPr/>
+        </p:nvSpPr>
+        <p:spPr>
+          <a:xfrm>
+            <a:off x="0" y="0"/>
+            <a:ext cx="9144000" cy="54864"/>
+          </a:xfrm>
+          <a:prstGeom prst="rect">
+            <a:avLst/>
+          </a:prstGeom>
+          <a:solidFill>
+            <a:srgbClr val="2E7D32"/>
+          </a:solidFill>
+          <a:ln/>
+        </p:spPr>
+      </p:sp>
+      <p:sp>
+        <p:nvSpPr>
+          <p:cNvPr id="3" name="Text 1"/>
+          <p:cNvSpPr/>
+          <p:nvPr/>
+        </p:nvSpPr>
+        <p:spPr>
+          <a:xfrm>
+            <a:off x="457200" y="182880"/>
+            <a:ext cx="8229600" cy="594360"/>
+          </a:xfrm>
+          <a:prstGeom prst="rect">
+            <a:avLst/>
+          </a:prstGeom>
+          <a:noFill/>
+          <a:ln/>
+        </p:spPr>
+        <p:txBody>
+          <a:bodyPr wrap="square" lIns="0" tIns="0" rIns="0" bIns="0" rtlCol="0" anchor="ctr"/>
+          <a:lstStyle/>
+          <a:p>
+            <a:pPr indent="0" marL="0">
+              <a:buNone/>
+            </a:pPr>
+            <a:r>
+              <a:rPr lang="en-US" sz="2400" b="1" dirty="0">
                 <a:solidFill>
                   <a:srgbClr val="1B5E20"/>
                 </a:solidFill>
@@ -4436,22 +7893,69 @@
                 <a:ea typeface="Trebuchet MS" pitchFamily="34" charset="-122"/>
                 <a:cs typeface="Trebuchet MS" pitchFamily="34" charset="-120"/>
               </a:rPr>
-              <a:t>Du MLD au MPD</a:t>
-            </a:r>
-            <a:endParaRPr lang="en-US" sz="1000" dirty="0"/>
-          </a:p>
-        </p:txBody>
-      </p:sp>
-      <p:sp>
-        <p:nvSpPr>
-          <p:cNvPr id="7" name="Text 5"/>
-          <p:cNvSpPr/>
-          <p:nvPr/>
-        </p:nvSpPr>
-        <p:spPr>
-          <a:xfrm>
-            <a:off x="3291840" y="1188720"/>
-            <a:ext cx="5212080" cy="713232"/>
+              <a:t>Aperçu : BDD orientées objet</a:t>
+            </a:r>
+            <a:endParaRPr lang="en-US" sz="2400" dirty="0"/>
+          </a:p>
+        </p:txBody>
+      </p:sp>
+      <p:sp>
+        <p:nvSpPr>
+          <p:cNvPr id="4" name="Shape 2"/>
+          <p:cNvSpPr/>
+          <p:nvPr/>
+        </p:nvSpPr>
+        <p:spPr>
+          <a:xfrm>
+            <a:off x="457200" y="914400"/>
+            <a:ext cx="8229600" cy="521208"/>
+          </a:xfrm>
+          <a:prstGeom prst="rect">
+            <a:avLst/>
+          </a:prstGeom>
+          <a:solidFill>
+            <a:srgbClr val="FFFFFF"/>
+          </a:solidFill>
+          <a:ln/>
+          <a:effectLst>
+            <a:outerShdw sx="100000" sy="100000" kx="0" ky="0" algn="bl" rotWithShape="0" blurRad="50800" dist="25400" dir="8100000">
+              <a:srgbClr val="000000">
+                <a:alpha val="12000"/>
+              </a:srgbClr>
+            </a:outerShdw>
+          </a:effectLst>
+        </p:spPr>
+      </p:sp>
+      <p:sp>
+        <p:nvSpPr>
+          <p:cNvPr id="5" name="Shape 3"/>
+          <p:cNvSpPr/>
+          <p:nvPr/>
+        </p:nvSpPr>
+        <p:spPr>
+          <a:xfrm>
+            <a:off x="457200" y="914400"/>
+            <a:ext cx="45720" cy="521208"/>
+          </a:xfrm>
+          <a:prstGeom prst="rect">
+            <a:avLst/>
+          </a:prstGeom>
+          <a:solidFill>
+            <a:srgbClr val="2E7D32"/>
+          </a:solidFill>
+          <a:ln/>
+        </p:spPr>
+      </p:sp>
+      <p:sp>
+        <p:nvSpPr>
+          <p:cNvPr id="6" name="Text 4"/>
+          <p:cNvSpPr/>
+          <p:nvPr/>
+        </p:nvSpPr>
+        <p:spPr>
+          <a:xfrm>
+            <a:off x="685800" y="914400"/>
+            <a:ext cx="7818120" cy="521208"/>
           </a:xfrm>
           <a:prstGeom prst="rect">
             <a:avLst/>
@@ -4467,19 +7971,46 @@
               <a:buNone/>
             </a:pPr>
             <a:r>
-              <a:rPr lang="en-US" sz="900" dirty="0">
+              <a:rPr lang="en-US" sz="1200" dirty="0">
                 <a:solidFill>
-                  <a:srgbClr val="333333"/>
+                  <a:srgbClr val="1A1A2E"/>
                 </a:solidFill>
                 <a:latin typeface="Calibri" pitchFamily="34" charset="0"/>
                 <a:ea typeface="Calibri" pitchFamily="34" charset="-122"/>
                 <a:cs typeface="Calibri" pitchFamily="34" charset="-120"/>
               </a:rPr>
-              <a:t>MLD = logique (indépendant du SGBD) | MPD = physique (types MySQL précis + contraintes) | Choisir le bon type : INT, VAR...</a:t>
-            </a:r>
-            <a:endParaRPr lang="en-US" sz="900" dirty="0"/>
-          </a:p>
-        </p:txBody>
+              <a:t>Les BDD OO stockent des OBJETS (attributs + méthodes)</a:t>
+            </a:r>
+            <a:endParaRPr lang="en-US" sz="1200" dirty="0"/>
+          </a:p>
+        </p:txBody>
+      </p:sp>
+      <p:sp>
+        <p:nvSpPr>
+          <p:cNvPr id="7" name="Shape 5"/>
+          <p:cNvSpPr/>
+          <p:nvPr/>
+        </p:nvSpPr>
+        <p:spPr>
+          <a:xfrm>
+            <a:off x="457200" y="1463040"/>
+            <a:ext cx="8229600" cy="521208"/>
+          </a:xfrm>
+          <a:prstGeom prst="rect">
+            <a:avLst/>
+          </a:prstGeom>
+          <a:solidFill>
+            <a:srgbClr val="E8F5E9"/>
+          </a:solidFill>
+          <a:ln/>
+          <a:effectLst>
+            <a:outerShdw sx="100000" sy="100000" kx="0" ky="0" algn="bl" rotWithShape="0" blurRad="50800" dist="25400" dir="8100000">
+              <a:srgbClr val="000000">
+                <a:alpha val="12000"/>
+              </a:srgbClr>
+            </a:outerShdw>
+          </a:effectLst>
+        </p:spPr>
       </p:sp>
       <p:sp>
         <p:nvSpPr>
@@ -4489,14 +8020,14 @@
         </p:nvSpPr>
         <p:spPr>
           <a:xfrm>
-            <a:off x="457200" y="1965960"/>
-            <a:ext cx="8229600" cy="713232"/>
-          </a:xfrm>
-          <a:prstGeom prst="rect">
-            <a:avLst/>
-          </a:prstGeom>
-          <a:solidFill>
-            <a:srgbClr val="FFFFFF"/>
+            <a:off x="457200" y="1463040"/>
+            <a:ext cx="45720" cy="521208"/>
+          </a:xfrm>
+          <a:prstGeom prst="rect">
+            <a:avLst/>
+          </a:prstGeom>
+          <a:solidFill>
+            <a:srgbClr val="2E7D32"/>
           </a:solidFill>
           <a:ln/>
         </p:spPr>
@@ -4509,8 +8040,8 @@
         </p:nvSpPr>
         <p:spPr>
           <a:xfrm>
-            <a:off x="640080" y="1965960"/>
-            <a:ext cx="2560320" cy="713232"/>
+            <a:off x="685800" y="1463040"/>
+            <a:ext cx="7818120" cy="521208"/>
           </a:xfrm>
           <a:prstGeom prst="rect">
             <a:avLst/>
@@ -4526,7 +8057,528 @@
               <a:buNone/>
             </a:pPr>
             <a:r>
-              <a:rPr lang="en-US" sz="1000" b="1" dirty="0">
+              <a:rPr lang="en-US" sz="1200" dirty="0">
+                <a:solidFill>
+                  <a:srgbClr val="1A1A2E"/>
+                </a:solidFill>
+                <a:latin typeface="Calibri" pitchFamily="34" charset="0"/>
+                <a:ea typeface="Calibri" pitchFamily="34" charset="-122"/>
+                <a:cs typeface="Calibri" pitchFamily="34" charset="-120"/>
+              </a:rPr>
+              <a:t>Pas de tables plates : chaque objet a un état et un comportement</a:t>
+            </a:r>
+            <a:endParaRPr lang="en-US" sz="1200" dirty="0"/>
+          </a:p>
+        </p:txBody>
+      </p:sp>
+      <p:sp>
+        <p:nvSpPr>
+          <p:cNvPr id="10" name="Shape 8"/>
+          <p:cNvSpPr/>
+          <p:nvPr/>
+        </p:nvSpPr>
+        <p:spPr>
+          <a:xfrm>
+            <a:off x="457200" y="2011680"/>
+            <a:ext cx="8229600" cy="521208"/>
+          </a:xfrm>
+          <a:prstGeom prst="rect">
+            <a:avLst/>
+          </a:prstGeom>
+          <a:solidFill>
+            <a:srgbClr val="FFFFFF"/>
+          </a:solidFill>
+          <a:ln/>
+          <a:effectLst>
+            <a:outerShdw sx="100000" sy="100000" kx="0" ky="0" algn="bl" rotWithShape="0" blurRad="50800" dist="25400" dir="8100000">
+              <a:srgbClr val="000000">
+                <a:alpha val="12000"/>
+              </a:srgbClr>
+            </a:outerShdw>
+          </a:effectLst>
+        </p:spPr>
+      </p:sp>
+      <p:sp>
+        <p:nvSpPr>
+          <p:cNvPr id="11" name="Shape 9"/>
+          <p:cNvSpPr/>
+          <p:nvPr/>
+        </p:nvSpPr>
+        <p:spPr>
+          <a:xfrm>
+            <a:off x="457200" y="2011680"/>
+            <a:ext cx="45720" cy="521208"/>
+          </a:xfrm>
+          <a:prstGeom prst="rect">
+            <a:avLst/>
+          </a:prstGeom>
+          <a:solidFill>
+            <a:srgbClr val="2E7D32"/>
+          </a:solidFill>
+          <a:ln/>
+        </p:spPr>
+      </p:sp>
+      <p:sp>
+        <p:nvSpPr>
+          <p:cNvPr id="12" name="Text 10"/>
+          <p:cNvSpPr/>
+          <p:nvPr/>
+        </p:nvSpPr>
+        <p:spPr>
+          <a:xfrm>
+            <a:off x="685800" y="2011680"/>
+            <a:ext cx="7818120" cy="521208"/>
+          </a:xfrm>
+          <a:prstGeom prst="rect">
+            <a:avLst/>
+          </a:prstGeom>
+          <a:noFill/>
+          <a:ln/>
+        </p:spPr>
+        <p:txBody>
+          <a:bodyPr wrap="square" lIns="0" tIns="0" rIns="0" bIns="0" rtlCol="0" anchor="ctr"/>
+          <a:lstStyle/>
+          <a:p>
+            <a:pPr indent="0" marL="0">
+              <a:buNone/>
+            </a:pPr>
+            <a:r>
+              <a:rPr lang="en-US" sz="1200" dirty="0">
+                <a:solidFill>
+                  <a:srgbClr val="1A1A2E"/>
+                </a:solidFill>
+                <a:latin typeface="Calibri" pitchFamily="34" charset="0"/>
+                <a:ea typeface="Calibri" pitchFamily="34" charset="-122"/>
+                <a:cs typeface="Calibri" pitchFamily="34" charset="-120"/>
+              </a:rPr>
+              <a:t>UML class diagrams : plus proches de l'OO que Merise</a:t>
+            </a:r>
+            <a:endParaRPr lang="en-US" sz="1200" dirty="0"/>
+          </a:p>
+        </p:txBody>
+      </p:sp>
+      <p:sp>
+        <p:nvSpPr>
+          <p:cNvPr id="13" name="Shape 11"/>
+          <p:cNvSpPr/>
+          <p:nvPr/>
+        </p:nvSpPr>
+        <p:spPr>
+          <a:xfrm>
+            <a:off x="457200" y="2560320"/>
+            <a:ext cx="8229600" cy="521208"/>
+          </a:xfrm>
+          <a:prstGeom prst="rect">
+            <a:avLst/>
+          </a:prstGeom>
+          <a:solidFill>
+            <a:srgbClr val="E8F5E9"/>
+          </a:solidFill>
+          <a:ln/>
+          <a:effectLst>
+            <a:outerShdw sx="100000" sy="100000" kx="0" ky="0" algn="bl" rotWithShape="0" blurRad="50800" dist="25400" dir="8100000">
+              <a:srgbClr val="000000">
+                <a:alpha val="12000"/>
+              </a:srgbClr>
+            </a:outerShdw>
+          </a:effectLst>
+        </p:spPr>
+      </p:sp>
+      <p:sp>
+        <p:nvSpPr>
+          <p:cNvPr id="14" name="Shape 12"/>
+          <p:cNvSpPr/>
+          <p:nvPr/>
+        </p:nvSpPr>
+        <p:spPr>
+          <a:xfrm>
+            <a:off x="457200" y="2560320"/>
+            <a:ext cx="45720" cy="521208"/>
+          </a:xfrm>
+          <a:prstGeom prst="rect">
+            <a:avLst/>
+          </a:prstGeom>
+          <a:solidFill>
+            <a:srgbClr val="2E7D32"/>
+          </a:solidFill>
+          <a:ln/>
+        </p:spPr>
+      </p:sp>
+      <p:sp>
+        <p:nvSpPr>
+          <p:cNvPr id="15" name="Text 13"/>
+          <p:cNvSpPr/>
+          <p:nvPr/>
+        </p:nvSpPr>
+        <p:spPr>
+          <a:xfrm>
+            <a:off x="685800" y="2560320"/>
+            <a:ext cx="7818120" cy="521208"/>
+          </a:xfrm>
+          <a:prstGeom prst="rect">
+            <a:avLst/>
+          </a:prstGeom>
+          <a:noFill/>
+          <a:ln/>
+        </p:spPr>
+        <p:txBody>
+          <a:bodyPr wrap="square" lIns="0" tIns="0" rIns="0" bIns="0" rtlCol="0" anchor="ctr"/>
+          <a:lstStyle/>
+          <a:p>
+            <a:pPr indent="0" marL="0">
+              <a:buNone/>
+            </a:pPr>
+            <a:r>
+              <a:rPr lang="en-US" sz="1200" dirty="0">
+                <a:solidFill>
+                  <a:srgbClr val="1A1A2E"/>
+                </a:solidFill>
+                <a:latin typeface="Calibri" pitchFamily="34" charset="0"/>
+                <a:ea typeface="Calibri" pitchFamily="34" charset="-122"/>
+                <a:cs typeface="Calibri" pitchFamily="34" charset="-120"/>
+              </a:rPr>
+              <a:t>Ex: classe Artiste avec methode calculerCA()</a:t>
+            </a:r>
+            <a:endParaRPr lang="en-US" sz="1200" dirty="0"/>
+          </a:p>
+        </p:txBody>
+      </p:sp>
+      <p:sp>
+        <p:nvSpPr>
+          <p:cNvPr id="16" name="Shape 14"/>
+          <p:cNvSpPr/>
+          <p:nvPr/>
+        </p:nvSpPr>
+        <p:spPr>
+          <a:xfrm>
+            <a:off x="457200" y="3108960"/>
+            <a:ext cx="8229600" cy="521208"/>
+          </a:xfrm>
+          <a:prstGeom prst="rect">
+            <a:avLst/>
+          </a:prstGeom>
+          <a:solidFill>
+            <a:srgbClr val="FFFFFF"/>
+          </a:solidFill>
+          <a:ln/>
+          <a:effectLst>
+            <a:outerShdw sx="100000" sy="100000" kx="0" ky="0" algn="bl" rotWithShape="0" blurRad="50800" dist="25400" dir="8100000">
+              <a:srgbClr val="000000">
+                <a:alpha val="12000"/>
+              </a:srgbClr>
+            </a:outerShdw>
+          </a:effectLst>
+        </p:spPr>
+      </p:sp>
+      <p:sp>
+        <p:nvSpPr>
+          <p:cNvPr id="17" name="Shape 15"/>
+          <p:cNvSpPr/>
+          <p:nvPr/>
+        </p:nvSpPr>
+        <p:spPr>
+          <a:xfrm>
+            <a:off x="457200" y="3108960"/>
+            <a:ext cx="45720" cy="521208"/>
+          </a:xfrm>
+          <a:prstGeom prst="rect">
+            <a:avLst/>
+          </a:prstGeom>
+          <a:solidFill>
+            <a:srgbClr val="2E7D32"/>
+          </a:solidFill>
+          <a:ln/>
+        </p:spPr>
+      </p:sp>
+      <p:sp>
+        <p:nvSpPr>
+          <p:cNvPr id="18" name="Text 16"/>
+          <p:cNvSpPr/>
+          <p:nvPr/>
+        </p:nvSpPr>
+        <p:spPr>
+          <a:xfrm>
+            <a:off x="685800" y="3108960"/>
+            <a:ext cx="7818120" cy="521208"/>
+          </a:xfrm>
+          <a:prstGeom prst="rect">
+            <a:avLst/>
+          </a:prstGeom>
+          <a:noFill/>
+          <a:ln/>
+        </p:spPr>
+        <p:txBody>
+          <a:bodyPr wrap="square" lIns="0" tIns="0" rIns="0" bIns="0" rtlCol="0" anchor="ctr"/>
+          <a:lstStyle/>
+          <a:p>
+            <a:pPr indent="0" marL="0">
+              <a:buNone/>
+            </a:pPr>
+            <a:r>
+              <a:rPr lang="en-US" sz="1200" dirty="0">
+                <a:solidFill>
+                  <a:srgbClr val="1A1A2E"/>
+                </a:solidFill>
+                <a:latin typeface="Calibri" pitchFamily="34" charset="0"/>
+                <a:ea typeface="Calibri" pitchFamily="34" charset="-122"/>
+                <a:cs typeface="Calibri" pitchFamily="34" charset="-120"/>
+              </a:rPr>
+              <a:t>Langages : Java (JPA/Hibernate), Python (SQLAlchemy)</a:t>
+            </a:r>
+            <a:endParaRPr lang="en-US" sz="1200" dirty="0"/>
+          </a:p>
+        </p:txBody>
+      </p:sp>
+      <p:sp>
+        <p:nvSpPr>
+          <p:cNvPr id="19" name="Shape 17"/>
+          <p:cNvSpPr/>
+          <p:nvPr/>
+        </p:nvSpPr>
+        <p:spPr>
+          <a:xfrm>
+            <a:off x="457200" y="3657600"/>
+            <a:ext cx="8229600" cy="521208"/>
+          </a:xfrm>
+          <a:prstGeom prst="rect">
+            <a:avLst/>
+          </a:prstGeom>
+          <a:solidFill>
+            <a:srgbClr val="E8F5E9"/>
+          </a:solidFill>
+          <a:ln/>
+          <a:effectLst>
+            <a:outerShdw sx="100000" sy="100000" kx="0" ky="0" algn="bl" rotWithShape="0" blurRad="50800" dist="25400" dir="8100000">
+              <a:srgbClr val="000000">
+                <a:alpha val="12000"/>
+              </a:srgbClr>
+            </a:outerShdw>
+          </a:effectLst>
+        </p:spPr>
+      </p:sp>
+      <p:sp>
+        <p:nvSpPr>
+          <p:cNvPr id="20" name="Shape 18"/>
+          <p:cNvSpPr/>
+          <p:nvPr/>
+        </p:nvSpPr>
+        <p:spPr>
+          <a:xfrm>
+            <a:off x="457200" y="3657600"/>
+            <a:ext cx="45720" cy="521208"/>
+          </a:xfrm>
+          <a:prstGeom prst="rect">
+            <a:avLst/>
+          </a:prstGeom>
+          <a:solidFill>
+            <a:srgbClr val="2E7D32"/>
+          </a:solidFill>
+          <a:ln/>
+        </p:spPr>
+      </p:sp>
+      <p:sp>
+        <p:nvSpPr>
+          <p:cNvPr id="21" name="Text 19"/>
+          <p:cNvSpPr/>
+          <p:nvPr/>
+        </p:nvSpPr>
+        <p:spPr>
+          <a:xfrm>
+            <a:off x="685800" y="3657600"/>
+            <a:ext cx="7818120" cy="521208"/>
+          </a:xfrm>
+          <a:prstGeom prst="rect">
+            <a:avLst/>
+          </a:prstGeom>
+          <a:noFill/>
+          <a:ln/>
+        </p:spPr>
+        <p:txBody>
+          <a:bodyPr wrap="square" lIns="0" tIns="0" rIns="0" bIns="0" rtlCol="0" anchor="ctr"/>
+          <a:lstStyle/>
+          <a:p>
+            <a:pPr indent="0" marL="0">
+              <a:buNone/>
+            </a:pPr>
+            <a:r>
+              <a:rPr lang="en-US" sz="1200" dirty="0">
+                <a:solidFill>
+                  <a:srgbClr val="1A1A2E"/>
+                </a:solidFill>
+                <a:latin typeface="Calibri" pitchFamily="34" charset="0"/>
+                <a:ea typeface="Calibri" pitchFamily="34" charset="-122"/>
+                <a:cs typeface="Calibri" pitchFamily="34" charset="-120"/>
+              </a:rPr>
+              <a:t>Dans ce cours : on reste en relationnel (MySQL) mais on connaît l'alternative</a:t>
+            </a:r>
+            <a:endParaRPr lang="en-US" sz="1200" dirty="0"/>
+          </a:p>
+        </p:txBody>
+      </p:sp>
+      <p:sp>
+        <p:nvSpPr>
+          <p:cNvPr id="22" name="Shape 20"/>
+          <p:cNvSpPr/>
+          <p:nvPr/>
+        </p:nvSpPr>
+        <p:spPr>
+          <a:xfrm>
+            <a:off x="457200" y="4206240"/>
+            <a:ext cx="8229600" cy="521208"/>
+          </a:xfrm>
+          <a:prstGeom prst="rect">
+            <a:avLst/>
+          </a:prstGeom>
+          <a:solidFill>
+            <a:srgbClr val="FFFFFF"/>
+          </a:solidFill>
+          <a:ln/>
+          <a:effectLst>
+            <a:outerShdw sx="100000" sy="100000" kx="0" ky="0" algn="bl" rotWithShape="0" blurRad="50800" dist="25400" dir="8100000">
+              <a:srgbClr val="000000">
+                <a:alpha val="12000"/>
+              </a:srgbClr>
+            </a:outerShdw>
+          </a:effectLst>
+        </p:spPr>
+      </p:sp>
+      <p:sp>
+        <p:nvSpPr>
+          <p:cNvPr id="23" name="Shape 21"/>
+          <p:cNvSpPr/>
+          <p:nvPr/>
+        </p:nvSpPr>
+        <p:spPr>
+          <a:xfrm>
+            <a:off x="457200" y="4206240"/>
+            <a:ext cx="45720" cy="521208"/>
+          </a:xfrm>
+          <a:prstGeom prst="rect">
+            <a:avLst/>
+          </a:prstGeom>
+          <a:solidFill>
+            <a:srgbClr val="2E7D32"/>
+          </a:solidFill>
+          <a:ln/>
+        </p:spPr>
+      </p:sp>
+      <p:sp>
+        <p:nvSpPr>
+          <p:cNvPr id="24" name="Text 22"/>
+          <p:cNvSpPr/>
+          <p:nvPr/>
+        </p:nvSpPr>
+        <p:spPr>
+          <a:xfrm>
+            <a:off x="685800" y="4206240"/>
+            <a:ext cx="7818120" cy="521208"/>
+          </a:xfrm>
+          <a:prstGeom prst="rect">
+            <a:avLst/>
+          </a:prstGeom>
+          <a:noFill/>
+          <a:ln/>
+        </p:spPr>
+        <p:txBody>
+          <a:bodyPr wrap="square" lIns="0" tIns="0" rIns="0" bIns="0" rtlCol="0" anchor="ctr"/>
+          <a:lstStyle/>
+          <a:p>
+            <a:pPr indent="0" marL="0">
+              <a:buNone/>
+            </a:pPr>
+            <a:r>
+              <a:rPr lang="en-US" sz="1200" dirty="0">
+                <a:solidFill>
+                  <a:srgbClr val="1A1A2E"/>
+                </a:solidFill>
+                <a:latin typeface="Calibri" pitchFamily="34" charset="0"/>
+                <a:ea typeface="Calibri" pitchFamily="34" charset="-122"/>
+                <a:cs typeface="Calibri" pitchFamily="34" charset="-120"/>
+              </a:rPr>
+              <a:t>Les ORM (Object-Relational Mapping) font le pont entre les deux mondes</a:t>
+            </a:r>
+            <a:endParaRPr lang="en-US" sz="1200" dirty="0"/>
+          </a:p>
+        </p:txBody>
+      </p:sp>
+    </p:spTree>
+  </p:cSld>
+  <p:clrMapOvr>
+    <a:masterClrMapping/>
+  </p:clrMapOvr>
+</p:sld>
+</file>
+
+<file path=ppt/slides/slide9.xml><?xml version="1.0" encoding="utf-8"?>
+<p:sld xmlns:a="http://schemas.openxmlformats.org/drawingml/2006/main" xmlns:r="http://schemas.openxmlformats.org/officeDocument/2006/relationships" xmlns:p="http://schemas.openxmlformats.org/presentationml/2006/main">
+  <p:cSld name="Slide 9">
+    <p:bg>
+      <p:bgPr>
+        <a:solidFill>
+          <a:srgbClr val="F5F7FA"/>
+        </a:solidFill>
+      </p:bgPr>
+    </p:bg>
+    <p:spTree>
+      <p:nvGrpSpPr>
+        <p:cNvPr id="1" name=""/>
+        <p:cNvGrpSpPr/>
+        <p:nvPr/>
+      </p:nvGrpSpPr>
+      <p:grpSpPr>
+        <a:xfrm>
+          <a:off x="0" y="0"/>
+          <a:ext cx="0" cy="0"/>
+          <a:chOff x="0" y="0"/>
+          <a:chExt cx="0" cy="0"/>
+        </a:xfrm>
+      </p:grpSpPr>
+      <p:sp>
+        <p:nvSpPr>
+          <p:cNvPr id="2" name="Shape 0"/>
+          <p:cNvSpPr/>
+          <p:nvPr/>
+        </p:nvSpPr>
+        <p:spPr>
+          <a:xfrm>
+            <a:off x="0" y="0"/>
+            <a:ext cx="9144000" cy="54864"/>
+          </a:xfrm>
+          <a:prstGeom prst="rect">
+            <a:avLst/>
+          </a:prstGeom>
+          <a:solidFill>
+            <a:srgbClr val="2E7D32"/>
+          </a:solidFill>
+          <a:ln/>
+        </p:spPr>
+      </p:sp>
+      <p:sp>
+        <p:nvSpPr>
+          <p:cNvPr id="3" name="Text 1"/>
+          <p:cNvSpPr/>
+          <p:nvPr/>
+        </p:nvSpPr>
+        <p:spPr>
+          <a:xfrm>
+            <a:off x="457200" y="182880"/>
+            <a:ext cx="8229600" cy="594360"/>
+          </a:xfrm>
+          <a:prstGeom prst="rect">
+            <a:avLst/>
+          </a:prstGeom>
+          <a:noFill/>
+          <a:ln/>
+        </p:spPr>
+        <p:txBody>
+          <a:bodyPr wrap="square" lIns="0" tIns="0" rIns="0" bIns="0" rtlCol="0" anchor="ctr"/>
+          <a:lstStyle/>
+          <a:p>
+            <a:pPr indent="0" marL="0">
+              <a:buNone/>
+            </a:pPr>
+            <a:r>
+              <a:rPr lang="en-US" sz="2400" b="1" dirty="0">
                 <a:solidFill>
                   <a:srgbClr val="1B5E20"/>
                 </a:solidFill>
@@ -4534,22 +8586,69 @@
                 <a:ea typeface="Trebuchet MS" pitchFamily="34" charset="-122"/>
                 <a:cs typeface="Trebuchet MS" pitchFamily="34" charset="-120"/>
               </a:rPr>
-              <a:t>Types MySQL — aide-mémoire</a:t>
-            </a:r>
-            <a:endParaRPr lang="en-US" sz="1000" dirty="0"/>
-          </a:p>
-        </p:txBody>
-      </p:sp>
-      <p:sp>
-        <p:nvSpPr>
-          <p:cNvPr id="10" name="Text 8"/>
-          <p:cNvSpPr/>
-          <p:nvPr/>
-        </p:nvSpPr>
-        <p:spPr>
-          <a:xfrm>
-            <a:off x="3291840" y="1965960"/>
-            <a:ext cx="5212080" cy="713232"/>
+              <a:t>D1 : Évaluer l'efficacité du design</a:t>
+            </a:r>
+            <a:endParaRPr lang="en-US" sz="2400" dirty="0"/>
+          </a:p>
+        </p:txBody>
+      </p:sp>
+      <p:sp>
+        <p:nvSpPr>
+          <p:cNvPr id="4" name="Shape 2"/>
+          <p:cNvSpPr/>
+          <p:nvPr/>
+        </p:nvSpPr>
+        <p:spPr>
+          <a:xfrm>
+            <a:off x="457200" y="914400"/>
+            <a:ext cx="8229600" cy="464058"/>
+          </a:xfrm>
+          <a:prstGeom prst="rect">
+            <a:avLst/>
+          </a:prstGeom>
+          <a:solidFill>
+            <a:srgbClr val="FFFFFF"/>
+          </a:solidFill>
+          <a:ln/>
+          <a:effectLst>
+            <a:outerShdw sx="100000" sy="100000" kx="0" ky="0" algn="bl" rotWithShape="0" blurRad="50800" dist="25400" dir="8100000">
+              <a:srgbClr val="000000">
+                <a:alpha val="12000"/>
+              </a:srgbClr>
+            </a:outerShdw>
+          </a:effectLst>
+        </p:spPr>
+      </p:sp>
+      <p:sp>
+        <p:nvSpPr>
+          <p:cNvPr id="5" name="Shape 3"/>
+          <p:cNvSpPr/>
+          <p:nvPr/>
+        </p:nvSpPr>
+        <p:spPr>
+          <a:xfrm>
+            <a:off x="457200" y="914400"/>
+            <a:ext cx="45720" cy="464058"/>
+          </a:xfrm>
+          <a:prstGeom prst="rect">
+            <a:avLst/>
+          </a:prstGeom>
+          <a:solidFill>
+            <a:srgbClr val="2E7D32"/>
+          </a:solidFill>
+          <a:ln/>
+        </p:spPr>
+      </p:sp>
+      <p:sp>
+        <p:nvSpPr>
+          <p:cNvPr id="6" name="Text 4"/>
+          <p:cNvSpPr/>
+          <p:nvPr/>
+        </p:nvSpPr>
+        <p:spPr>
+          <a:xfrm>
+            <a:off x="685800" y="914400"/>
+            <a:ext cx="7818120" cy="464058"/>
           </a:xfrm>
           <a:prstGeom prst="rect">
             <a:avLst/>
@@ -4565,30 +8664,30 @@
               <a:buNone/>
             </a:pPr>
             <a:r>
-              <a:rPr lang="en-US" sz="900" dirty="0">
+              <a:rPr lang="en-US" sz="1200" dirty="0">
                 <a:solidFill>
-                  <a:srgbClr val="333333"/>
+                  <a:srgbClr val="1A1A2E"/>
                 </a:solidFill>
                 <a:latin typeface="Calibri" pitchFamily="34" charset="0"/>
                 <a:ea typeface="Calibri" pitchFamily="34" charset="-122"/>
                 <a:cs typeface="Calibri" pitchFamily="34" charset="-120"/>
               </a:rPr>
-              <a:t>INT / BIGINT : nombres entiers (id, quantité, capacité) | VARCHAR(n) : texte variable max n caractères (nom, email) | DE...</a:t>
-            </a:r>
-            <a:endParaRPr lang="en-US" sz="900" dirty="0"/>
-          </a:p>
-        </p:txBody>
-      </p:sp>
-      <p:sp>
-        <p:nvSpPr>
-          <p:cNvPr id="11" name="Shape 9"/>
-          <p:cNvSpPr/>
-          <p:nvPr/>
-        </p:nvSpPr>
-        <p:spPr>
-          <a:xfrm>
-            <a:off x="457200" y="2743200"/>
-            <a:ext cx="8229600" cy="713232"/>
+              <a:t>Le critère D1 demande une ÉVALUATION CRITIQUE du design</a:t>
+            </a:r>
+            <a:endParaRPr lang="en-US" sz="1200" dirty="0"/>
+          </a:p>
+        </p:txBody>
+      </p:sp>
+      <p:sp>
+        <p:nvSpPr>
+          <p:cNvPr id="7" name="Shape 5"/>
+          <p:cNvSpPr/>
+          <p:nvPr/>
+        </p:nvSpPr>
+        <p:spPr>
+          <a:xfrm>
+            <a:off x="457200" y="1405890"/>
+            <a:ext cx="8229600" cy="464058"/>
           </a:xfrm>
           <a:prstGeom prst="rect">
             <a:avLst/>
@@ -4597,18 +8696,45 @@
             <a:srgbClr val="E8F5E9"/>
           </a:solidFill>
           <a:ln/>
-        </p:spPr>
-      </p:sp>
-      <p:sp>
-        <p:nvSpPr>
-          <p:cNvPr id="12" name="Text 10"/>
-          <p:cNvSpPr/>
-          <p:nvPr/>
-        </p:nvSpPr>
-        <p:spPr>
-          <a:xfrm>
-            <a:off x="640080" y="2743200"/>
-            <a:ext cx="2560320" cy="713232"/>
+          <a:effectLst>
+            <a:outerShdw sx="100000" sy="100000" kx="0" ky="0" algn="bl" rotWithShape="0" blurRad="50800" dist="25400" dir="8100000">
+              <a:srgbClr val="000000">
+                <a:alpha val="12000"/>
+              </a:srgbClr>
+            </a:outerShdw>
+          </a:effectLst>
+        </p:spPr>
+      </p:sp>
+      <p:sp>
+        <p:nvSpPr>
+          <p:cNvPr id="8" name="Shape 6"/>
+          <p:cNvSpPr/>
+          <p:nvPr/>
+        </p:nvSpPr>
+        <p:spPr>
+          <a:xfrm>
+            <a:off x="457200" y="1405890"/>
+            <a:ext cx="45720" cy="464058"/>
+          </a:xfrm>
+          <a:prstGeom prst="rect">
+            <a:avLst/>
+          </a:prstGeom>
+          <a:solidFill>
+            <a:srgbClr val="2E7D32"/>
+          </a:solidFill>
+          <a:ln/>
+        </p:spPr>
+      </p:sp>
+      <p:sp>
+        <p:nvSpPr>
+          <p:cNvPr id="9" name="Text 7"/>
+          <p:cNvSpPr/>
+          <p:nvPr/>
+        </p:nvSpPr>
+        <p:spPr>
+          <a:xfrm>
+            <a:off x="685800" y="1405890"/>
+            <a:ext cx="7818120" cy="464058"/>
           </a:xfrm>
           <a:prstGeom prst="rect">
             <a:avLst/>
@@ -4624,69 +8750,30 @@
               <a:buNone/>
             </a:pPr>
             <a:r>
-              <a:rPr lang="en-US" sz="1000" b="1" dirty="0">
+              <a:rPr lang="en-US" sz="1200" dirty="0">
                 <a:solidFill>
-                  <a:srgbClr val="1B5E20"/>
-                </a:solidFill>
-                <a:latin typeface="Trebuchet MS" pitchFamily="34" charset="0"/>
-                <a:ea typeface="Trebuchet MS" pitchFamily="34" charset="-122"/>
-                <a:cs typeface="Trebuchet MS" pitchFamily="34" charset="-120"/>
-              </a:rPr>
-              <a:t>Conception d'interfaces</a:t>
-            </a:r>
-            <a:endParaRPr lang="en-US" sz="1000" dirty="0"/>
-          </a:p>
-        </p:txBody>
-      </p:sp>
-      <p:sp>
-        <p:nvSpPr>
-          <p:cNvPr id="13" name="Text 11"/>
-          <p:cNvSpPr/>
-          <p:nvPr/>
-        </p:nvSpPr>
-        <p:spPr>
-          <a:xfrm>
-            <a:off x="3291840" y="2743200"/>
-            <a:ext cx="5212080" cy="713232"/>
-          </a:xfrm>
-          <a:prstGeom prst="rect">
-            <a:avLst/>
-          </a:prstGeom>
-          <a:noFill/>
-          <a:ln/>
-        </p:spPr>
-        <p:txBody>
-          <a:bodyPr wrap="square" lIns="0" tIns="0" rIns="0" bIns="0" rtlCol="0" anchor="ctr"/>
-          <a:lstStyle/>
-          <a:p>
-            <a:pPr indent="0" marL="0">
-              <a:buNone/>
-            </a:pPr>
-            <a:r>
-              <a:rPr lang="en-US" sz="900" dirty="0">
-                <a:solidFill>
-                  <a:srgbClr val="333333"/>
+                  <a:srgbClr val="1A1A2E"/>
                 </a:solidFill>
                 <a:latin typeface="Calibri" pitchFamily="34" charset="0"/>
                 <a:ea typeface="Calibri" pitchFamily="34" charset="-122"/>
                 <a:cs typeface="Calibri" pitchFamily="34" charset="-120"/>
               </a:rPr>
-              <a:t>Maquetter les formulaires AVANT de coder | Formulaire ajout artiste : champs + validations | Formulaire réservation sess...</a:t>
-            </a:r>
-            <a:endParaRPr lang="en-US" sz="900" dirty="0"/>
-          </a:p>
-        </p:txBody>
-      </p:sp>
-      <p:sp>
-        <p:nvSpPr>
-          <p:cNvPr id="14" name="Shape 12"/>
-          <p:cNvSpPr/>
-          <p:nvPr/>
-        </p:nvSpPr>
-        <p:spPr>
-          <a:xfrm>
-            <a:off x="457200" y="3520440"/>
-            <a:ext cx="8229600" cy="713232"/>
+              <a:t>Forces du design SwissSound :</a:t>
+            </a:r>
+            <a:endParaRPr lang="en-US" sz="1200" dirty="0"/>
+          </a:p>
+        </p:txBody>
+      </p:sp>
+      <p:sp>
+        <p:nvSpPr>
+          <p:cNvPr id="10" name="Shape 8"/>
+          <p:cNvSpPr/>
+          <p:nvPr/>
+        </p:nvSpPr>
+        <p:spPr>
+          <a:xfrm>
+            <a:off x="457200" y="1897380"/>
+            <a:ext cx="8229600" cy="464058"/>
           </a:xfrm>
           <a:prstGeom prst="rect">
             <a:avLst/>
@@ -4695,18 +8782,45 @@
             <a:srgbClr val="FFFFFF"/>
           </a:solidFill>
           <a:ln/>
-        </p:spPr>
-      </p:sp>
-      <p:sp>
-        <p:nvSpPr>
-          <p:cNvPr id="15" name="Text 13"/>
-          <p:cNvSpPr/>
-          <p:nvPr/>
-        </p:nvSpPr>
-        <p:spPr>
-          <a:xfrm>
-            <a:off x="640080" y="3520440"/>
-            <a:ext cx="2560320" cy="713232"/>
+          <a:effectLst>
+            <a:outerShdw sx="100000" sy="100000" kx="0" ky="0" algn="bl" rotWithShape="0" blurRad="50800" dist="25400" dir="8100000">
+              <a:srgbClr val="000000">
+                <a:alpha val="12000"/>
+              </a:srgbClr>
+            </a:outerShdw>
+          </a:effectLst>
+        </p:spPr>
+      </p:sp>
+      <p:sp>
+        <p:nvSpPr>
+          <p:cNvPr id="11" name="Shape 9"/>
+          <p:cNvSpPr/>
+          <p:nvPr/>
+        </p:nvSpPr>
+        <p:spPr>
+          <a:xfrm>
+            <a:off x="457200" y="1897380"/>
+            <a:ext cx="45720" cy="464058"/>
+          </a:xfrm>
+          <a:prstGeom prst="rect">
+            <a:avLst/>
+          </a:prstGeom>
+          <a:solidFill>
+            <a:srgbClr val="2E7D32"/>
+          </a:solidFill>
+          <a:ln/>
+        </p:spPr>
+      </p:sp>
+      <p:sp>
+        <p:nvSpPr>
+          <p:cNvPr id="12" name="Text 10"/>
+          <p:cNvSpPr/>
+          <p:nvPr/>
+        </p:nvSpPr>
+        <p:spPr>
+          <a:xfrm>
+            <a:off x="685800" y="1897380"/>
+            <a:ext cx="7818120" cy="464058"/>
           </a:xfrm>
           <a:prstGeom prst="rect">
             <a:avLst/>
@@ -4722,56 +8836,447 @@
               <a:buNone/>
             </a:pPr>
             <a:r>
-              <a:rPr lang="en-US" sz="1000" b="1" dirty="0">
+              <a:rPr lang="en-US" sz="1200" dirty="0">
                 <a:solidFill>
-                  <a:srgbClr val="1B5E20"/>
-                </a:solidFill>
-                <a:latin typeface="Trebuchet MS" pitchFamily="34" charset="0"/>
-                <a:ea typeface="Trebuchet MS" pitchFamily="34" charset="-122"/>
-                <a:cs typeface="Trebuchet MS" pitchFamily="34" charset="-120"/>
-              </a:rPr>
-              <a:t>Sécurité dès la conception + BDD OO</a:t>
-            </a:r>
-            <a:endParaRPr lang="en-US" sz="1000" dirty="0"/>
-          </a:p>
-        </p:txBody>
-      </p:sp>
-      <p:sp>
-        <p:nvSpPr>
-          <p:cNvPr id="16" name="Text 14"/>
-          <p:cNvSpPr/>
-          <p:nvPr/>
-        </p:nvSpPr>
-        <p:spPr>
-          <a:xfrm>
-            <a:off x="3291840" y="3520440"/>
-            <a:ext cx="5212080" cy="713232"/>
-          </a:xfrm>
-          <a:prstGeom prst="rect">
-            <a:avLst/>
-          </a:prstGeom>
-          <a:noFill/>
-          <a:ln/>
-        </p:spPr>
-        <p:txBody>
-          <a:bodyPr wrap="square" lIns="0" tIns="0" rIns="0" bIns="0" rtlCol="0" anchor="ctr"/>
-          <a:lstStyle/>
-          <a:p>
-            <a:pPr indent="0" marL="0">
-              <a:buNone/>
-            </a:pPr>
-            <a:r>
-              <a:rPr lang="en-US" sz="900" dirty="0">
-                <a:solidFill>
-                  <a:srgbClr val="333333"/>
+                  <a:srgbClr val="1A1A2E"/>
                 </a:solidFill>
                 <a:latin typeface="Calibri" pitchFamily="34" charset="0"/>
                 <a:ea typeface="Calibri" pitchFamily="34" charset="-122"/>
                 <a:cs typeface="Calibri" pitchFamily="34" charset="-120"/>
               </a:rPr>
-              <a:t>Qui accède à quoi ? Matrice de droits (admin, ingénieur, comptable, réception) | Données sensibles : emails, téléphones ...</a:t>
-            </a:r>
-            <a:endParaRPr lang="en-US" sz="900" dirty="0"/>
+              <a:t>→ 3NF respectée, intégrité référentielle complète, schéma cohérent</a:t>
+            </a:r>
+            <a:endParaRPr lang="en-US" sz="1200" dirty="0"/>
+          </a:p>
+        </p:txBody>
+      </p:sp>
+      <p:sp>
+        <p:nvSpPr>
+          <p:cNvPr id="13" name="Shape 11"/>
+          <p:cNvSpPr/>
+          <p:nvPr/>
+        </p:nvSpPr>
+        <p:spPr>
+          <a:xfrm>
+            <a:off x="457200" y="2388870"/>
+            <a:ext cx="8229600" cy="464058"/>
+          </a:xfrm>
+          <a:prstGeom prst="rect">
+            <a:avLst/>
+          </a:prstGeom>
+          <a:solidFill>
+            <a:srgbClr val="E8F5E9"/>
+          </a:solidFill>
+          <a:ln/>
+          <a:effectLst>
+            <a:outerShdw sx="100000" sy="100000" kx="0" ky="0" algn="bl" rotWithShape="0" blurRad="50800" dist="25400" dir="8100000">
+              <a:srgbClr val="000000">
+                <a:alpha val="12000"/>
+              </a:srgbClr>
+            </a:outerShdw>
+          </a:effectLst>
+        </p:spPr>
+      </p:sp>
+      <p:sp>
+        <p:nvSpPr>
+          <p:cNvPr id="14" name="Shape 12"/>
+          <p:cNvSpPr/>
+          <p:nvPr/>
+        </p:nvSpPr>
+        <p:spPr>
+          <a:xfrm>
+            <a:off x="457200" y="2388870"/>
+            <a:ext cx="45720" cy="464058"/>
+          </a:xfrm>
+          <a:prstGeom prst="rect">
+            <a:avLst/>
+          </a:prstGeom>
+          <a:solidFill>
+            <a:srgbClr val="2E7D32"/>
+          </a:solidFill>
+          <a:ln/>
+        </p:spPr>
+      </p:sp>
+      <p:sp>
+        <p:nvSpPr>
+          <p:cNvPr id="15" name="Text 13"/>
+          <p:cNvSpPr/>
+          <p:nvPr/>
+        </p:nvSpPr>
+        <p:spPr>
+          <a:xfrm>
+            <a:off x="685800" y="2388870"/>
+            <a:ext cx="7818120" cy="464058"/>
+          </a:xfrm>
+          <a:prstGeom prst="rect">
+            <a:avLst/>
+          </a:prstGeom>
+          <a:noFill/>
+          <a:ln/>
+        </p:spPr>
+        <p:txBody>
+          <a:bodyPr wrap="square" lIns="0" tIns="0" rIns="0" bIns="0" rtlCol="0" anchor="ctr"/>
+          <a:lstStyle/>
+          <a:p>
+            <a:pPr indent="0" marL="0">
+              <a:buNone/>
+            </a:pPr>
+            <a:r>
+              <a:rPr lang="en-US" sz="1200" dirty="0">
+                <a:solidFill>
+                  <a:srgbClr val="1A1A2E"/>
+                </a:solidFill>
+                <a:latin typeface="Calibri" pitchFamily="34" charset="0"/>
+                <a:ea typeface="Calibri" pitchFamily="34" charset="-122"/>
+                <a:cs typeface="Calibri" pitchFamily="34" charset="-120"/>
+              </a:rPr>
+              <a:t>Faiblesses potentielles :</a:t>
+            </a:r>
+            <a:endParaRPr lang="en-US" sz="1200" dirty="0"/>
+          </a:p>
+        </p:txBody>
+      </p:sp>
+      <p:sp>
+        <p:nvSpPr>
+          <p:cNvPr id="16" name="Shape 14"/>
+          <p:cNvSpPr/>
+          <p:nvPr/>
+        </p:nvSpPr>
+        <p:spPr>
+          <a:xfrm>
+            <a:off x="457200" y="2880360"/>
+            <a:ext cx="8229600" cy="464058"/>
+          </a:xfrm>
+          <a:prstGeom prst="rect">
+            <a:avLst/>
+          </a:prstGeom>
+          <a:solidFill>
+            <a:srgbClr val="FFFFFF"/>
+          </a:solidFill>
+          <a:ln/>
+          <a:effectLst>
+            <a:outerShdw sx="100000" sy="100000" kx="0" ky="0" algn="bl" rotWithShape="0" blurRad="50800" dist="25400" dir="8100000">
+              <a:srgbClr val="000000">
+                <a:alpha val="12000"/>
+              </a:srgbClr>
+            </a:outerShdw>
+          </a:effectLst>
+        </p:spPr>
+      </p:sp>
+      <p:sp>
+        <p:nvSpPr>
+          <p:cNvPr id="17" name="Shape 15"/>
+          <p:cNvSpPr/>
+          <p:nvPr/>
+        </p:nvSpPr>
+        <p:spPr>
+          <a:xfrm>
+            <a:off x="457200" y="2880360"/>
+            <a:ext cx="45720" cy="464058"/>
+          </a:xfrm>
+          <a:prstGeom prst="rect">
+            <a:avLst/>
+          </a:prstGeom>
+          <a:solidFill>
+            <a:srgbClr val="2E7D32"/>
+          </a:solidFill>
+          <a:ln/>
+        </p:spPr>
+      </p:sp>
+      <p:sp>
+        <p:nvSpPr>
+          <p:cNvPr id="18" name="Text 16"/>
+          <p:cNvSpPr/>
+          <p:nvPr/>
+        </p:nvSpPr>
+        <p:spPr>
+          <a:xfrm>
+            <a:off x="685800" y="2880360"/>
+            <a:ext cx="7818120" cy="464058"/>
+          </a:xfrm>
+          <a:prstGeom prst="rect">
+            <a:avLst/>
+          </a:prstGeom>
+          <a:noFill/>
+          <a:ln/>
+        </p:spPr>
+        <p:txBody>
+          <a:bodyPr wrap="square" lIns="0" tIns="0" rIns="0" bIns="0" rtlCol="0" anchor="ctr"/>
+          <a:lstStyle/>
+          <a:p>
+            <a:pPr indent="0" marL="0">
+              <a:buNone/>
+            </a:pPr>
+            <a:r>
+              <a:rPr lang="en-US" sz="1200" dirty="0">
+                <a:solidFill>
+                  <a:srgbClr val="1A1A2E"/>
+                </a:solidFill>
+                <a:latin typeface="Calibri" pitchFamily="34" charset="0"/>
+                <a:ea typeface="Calibri" pitchFamily="34" charset="-122"/>
+                <a:cs typeface="Calibri" pitchFamily="34" charset="-120"/>
+              </a:rPr>
+              <a:t>→ Pas de gestion multi-sites, pas d'historique des prix, pas d'audit trail</a:t>
+            </a:r>
+            <a:endParaRPr lang="en-US" sz="1200" dirty="0"/>
+          </a:p>
+        </p:txBody>
+      </p:sp>
+      <p:sp>
+        <p:nvSpPr>
+          <p:cNvPr id="19" name="Shape 17"/>
+          <p:cNvSpPr/>
+          <p:nvPr/>
+        </p:nvSpPr>
+        <p:spPr>
+          <a:xfrm>
+            <a:off x="457200" y="3371850"/>
+            <a:ext cx="8229600" cy="464058"/>
+          </a:xfrm>
+          <a:prstGeom prst="rect">
+            <a:avLst/>
+          </a:prstGeom>
+          <a:solidFill>
+            <a:srgbClr val="E8F5E9"/>
+          </a:solidFill>
+          <a:ln/>
+          <a:effectLst>
+            <a:outerShdw sx="100000" sy="100000" kx="0" ky="0" algn="bl" rotWithShape="0" blurRad="50800" dist="25400" dir="8100000">
+              <a:srgbClr val="000000">
+                <a:alpha val="12000"/>
+              </a:srgbClr>
+            </a:outerShdw>
+          </a:effectLst>
+        </p:spPr>
+      </p:sp>
+      <p:sp>
+        <p:nvSpPr>
+          <p:cNvPr id="20" name="Shape 18"/>
+          <p:cNvSpPr/>
+          <p:nvPr/>
+        </p:nvSpPr>
+        <p:spPr>
+          <a:xfrm>
+            <a:off x="457200" y="3371850"/>
+            <a:ext cx="45720" cy="464058"/>
+          </a:xfrm>
+          <a:prstGeom prst="rect">
+            <a:avLst/>
+          </a:prstGeom>
+          <a:solidFill>
+            <a:srgbClr val="2E7D32"/>
+          </a:solidFill>
+          <a:ln/>
+        </p:spPr>
+      </p:sp>
+      <p:sp>
+        <p:nvSpPr>
+          <p:cNvPr id="21" name="Text 19"/>
+          <p:cNvSpPr/>
+          <p:nvPr/>
+        </p:nvSpPr>
+        <p:spPr>
+          <a:xfrm>
+            <a:off x="685800" y="3371850"/>
+            <a:ext cx="7818120" cy="464058"/>
+          </a:xfrm>
+          <a:prstGeom prst="rect">
+            <a:avLst/>
+          </a:prstGeom>
+          <a:noFill/>
+          <a:ln/>
+        </p:spPr>
+        <p:txBody>
+          <a:bodyPr wrap="square" lIns="0" tIns="0" rIns="0" bIns="0" rtlCol="0" anchor="ctr"/>
+          <a:lstStyle/>
+          <a:p>
+            <a:pPr indent="0" marL="0">
+              <a:buNone/>
+            </a:pPr>
+            <a:r>
+              <a:rPr lang="en-US" sz="1200" dirty="0">
+                <a:solidFill>
+                  <a:srgbClr val="1A1A2E"/>
+                </a:solidFill>
+                <a:latin typeface="Calibri" pitchFamily="34" charset="0"/>
+                <a:ea typeface="Calibri" pitchFamily="34" charset="-122"/>
+                <a:cs typeface="Calibri" pitchFamily="34" charset="-120"/>
+              </a:rPr>
+              <a:t>Recommandations d'amélioration :</a:t>
+            </a:r>
+            <a:endParaRPr lang="en-US" sz="1200" dirty="0"/>
+          </a:p>
+        </p:txBody>
+      </p:sp>
+      <p:sp>
+        <p:nvSpPr>
+          <p:cNvPr id="22" name="Shape 20"/>
+          <p:cNvSpPr/>
+          <p:nvPr/>
+        </p:nvSpPr>
+        <p:spPr>
+          <a:xfrm>
+            <a:off x="457200" y="3863340"/>
+            <a:ext cx="8229600" cy="464058"/>
+          </a:xfrm>
+          <a:prstGeom prst="rect">
+            <a:avLst/>
+          </a:prstGeom>
+          <a:solidFill>
+            <a:srgbClr val="FFFFFF"/>
+          </a:solidFill>
+          <a:ln/>
+          <a:effectLst>
+            <a:outerShdw sx="100000" sy="100000" kx="0" ky="0" algn="bl" rotWithShape="0" blurRad="50800" dist="25400" dir="8100000">
+              <a:srgbClr val="000000">
+                <a:alpha val="12000"/>
+              </a:srgbClr>
+            </a:outerShdw>
+          </a:effectLst>
+        </p:spPr>
+      </p:sp>
+      <p:sp>
+        <p:nvSpPr>
+          <p:cNvPr id="23" name="Shape 21"/>
+          <p:cNvSpPr/>
+          <p:nvPr/>
+        </p:nvSpPr>
+        <p:spPr>
+          <a:xfrm>
+            <a:off x="457200" y="3863340"/>
+            <a:ext cx="45720" cy="464058"/>
+          </a:xfrm>
+          <a:prstGeom prst="rect">
+            <a:avLst/>
+          </a:prstGeom>
+          <a:solidFill>
+            <a:srgbClr val="2E7D32"/>
+          </a:solidFill>
+          <a:ln/>
+        </p:spPr>
+      </p:sp>
+      <p:sp>
+        <p:nvSpPr>
+          <p:cNvPr id="24" name="Text 22"/>
+          <p:cNvSpPr/>
+          <p:nvPr/>
+        </p:nvSpPr>
+        <p:spPr>
+          <a:xfrm>
+            <a:off x="685800" y="3863340"/>
+            <a:ext cx="7818120" cy="464058"/>
+          </a:xfrm>
+          <a:prstGeom prst="rect">
+            <a:avLst/>
+          </a:prstGeom>
+          <a:noFill/>
+          <a:ln/>
+        </p:spPr>
+        <p:txBody>
+          <a:bodyPr wrap="square" lIns="0" tIns="0" rIns="0" bIns="0" rtlCol="0" anchor="ctr"/>
+          <a:lstStyle/>
+          <a:p>
+            <a:pPr indent="0" marL="0">
+              <a:buNone/>
+            </a:pPr>
+            <a:r>
+              <a:rPr lang="en-US" sz="1200" dirty="0">
+                <a:solidFill>
+                  <a:srgbClr val="1A1A2E"/>
+                </a:solidFill>
+                <a:latin typeface="Calibri" pitchFamily="34" charset="0"/>
+                <a:ea typeface="Calibri" pitchFamily="34" charset="-122"/>
+                <a:cs typeface="Calibri" pitchFamily="34" charset="-120"/>
+              </a:rPr>
+              <a:t>→ Ajouter table 'historique_tarifs', table 'log_actions', support multi-devises</a:t>
+            </a:r>
+            <a:endParaRPr lang="en-US" sz="1200" dirty="0"/>
+          </a:p>
+        </p:txBody>
+      </p:sp>
+      <p:sp>
+        <p:nvSpPr>
+          <p:cNvPr id="25" name="Shape 23"/>
+          <p:cNvSpPr/>
+          <p:nvPr/>
+        </p:nvSpPr>
+        <p:spPr>
+          <a:xfrm>
+            <a:off x="457200" y="4354830"/>
+            <a:ext cx="8229600" cy="464058"/>
+          </a:xfrm>
+          <a:prstGeom prst="rect">
+            <a:avLst/>
+          </a:prstGeom>
+          <a:solidFill>
+            <a:srgbClr val="E8F5E9"/>
+          </a:solidFill>
+          <a:ln/>
+          <a:effectLst>
+            <a:outerShdw sx="100000" sy="100000" kx="0" ky="0" algn="bl" rotWithShape="0" blurRad="50800" dist="25400" dir="8100000">
+              <a:srgbClr val="000000">
+                <a:alpha val="12000"/>
+              </a:srgbClr>
+            </a:outerShdw>
+          </a:effectLst>
+        </p:spPr>
+      </p:sp>
+      <p:sp>
+        <p:nvSpPr>
+          <p:cNvPr id="26" name="Shape 24"/>
+          <p:cNvSpPr/>
+          <p:nvPr/>
+        </p:nvSpPr>
+        <p:spPr>
+          <a:xfrm>
+            <a:off x="457200" y="4354830"/>
+            <a:ext cx="45720" cy="464058"/>
+          </a:xfrm>
+          <a:prstGeom prst="rect">
+            <a:avLst/>
+          </a:prstGeom>
+          <a:solidFill>
+            <a:srgbClr val="2E7D32"/>
+          </a:solidFill>
+          <a:ln/>
+        </p:spPr>
+      </p:sp>
+      <p:sp>
+        <p:nvSpPr>
+          <p:cNvPr id="27" name="Text 25"/>
+          <p:cNvSpPr/>
+          <p:nvPr/>
+        </p:nvSpPr>
+        <p:spPr>
+          <a:xfrm>
+            <a:off x="685800" y="4354830"/>
+            <a:ext cx="7818120" cy="464058"/>
+          </a:xfrm>
+          <a:prstGeom prst="rect">
+            <a:avLst/>
+          </a:prstGeom>
+          <a:noFill/>
+          <a:ln/>
+        </p:spPr>
+        <p:txBody>
+          <a:bodyPr wrap="square" lIns="0" tIns="0" rIns="0" bIns="0" rtlCol="0" anchor="ctr"/>
+          <a:lstStyle/>
+          <a:p>
+            <a:pPr indent="0" marL="0">
+              <a:buNone/>
+            </a:pPr>
+            <a:r>
+              <a:rPr lang="en-US" sz="1200" dirty="0">
+                <a:solidFill>
+                  <a:srgbClr val="1A1A2E"/>
+                </a:solidFill>
+                <a:latin typeface="Calibri" pitchFamily="34" charset="0"/>
+                <a:ea typeface="Calibri" pitchFamily="34" charset="-122"/>
+                <a:cs typeface="Calibri" pitchFamily="34" charset="-120"/>
+              </a:rPr>
+              <a:t>Rédiger 1-2 pages argumentées pour le rapport BTEC</a:t>
+            </a:r>
+            <a:endParaRPr lang="en-US" sz="1200" dirty="0"/>
           </a:p>
         </p:txBody>
       </p:sp>
